--- a/docs/DRISHTI_BDA_Presentation.pptx
+++ b/docs/DRISHTI_BDA_Presentation.pptx
@@ -124,7 +124,7 @@
   <p:extLst>
     <p:ext uri="{521415D9-36F7-43E2-AB2F-B90AF26B5E84}">
       <p14:sectionLst xmlns:p14="http://schemas.microsoft.com/office/powerpoint/2010/main">
-        <p14:section name="Introduction" id="{e8940288-8a10-0225-94de-14684c778384}">
+        <p14:section name="Introduction" id="{d15b2bdf-a2ce-0855-24d5-8ac72cb8711b}">
           <p14:sldIdLst>
             <p14:sldId id="256"/>
             <p14:sldId id="257"/>
@@ -132,29 +132,29 @@
             <p14:sldId id="259"/>
           </p14:sldIdLst>
         </p14:section>
-        <p14:section name="Solution" id="{5f4a692b-e7a3-827b-6491-dda85447c102}">
+        <p14:section name="Solution" id="{d4b2497f-7f38-61f5-67af-5032aefdfda6}">
           <p14:sldIdLst>
             <p14:sldId id="260"/>
           </p14:sldIdLst>
         </p14:section>
-        <p14:section name="Design" id="{e701a3b3-89f1-8304-adec-94b29a996265}">
+        <p14:section name="Design" id="{e1e6847c-a220-aab1-9ebd-cc627461e4cf}">
           <p14:sldIdLst>
             <p14:sldId id="261"/>
             <p14:sldId id="262"/>
           </p14:sldIdLst>
         </p14:section>
-        <p14:section name="Big Data" id="{d8c6c90d-efba-e306-a521-dd2038a5a3bc}">
+        <p14:section name="Big Data" id="{ea36bff4-3a88-31c6-b184-f09826013702}">
           <p14:sldIdLst>
             <p14:sldId id="263"/>
             <p14:sldId id="264"/>
           </p14:sldIdLst>
         </p14:section>
-        <p14:section name="Analytics" id="{cd8abc71-8553-d47e-3d73-ad597a0eb190}">
+        <p14:section name="Analytics" id="{0ca834b7-e857-db26-9478-6fcb0c6c7ea3}">
           <p14:sldIdLst>
             <p14:sldId id="265"/>
           </p14:sldIdLst>
         </p14:section>
-        <p14:section name="Demo" id="{b4ac23df-e1b5-1acc-2b25-0a7de29d1783}">
+        <p14:section name="Demo" id="{db769320-abf4-1b8b-dc54-44a1439e6d35}">
           <p14:sldIdLst>
             <p14:sldId id="266"/>
             <p14:sldId id="267"/>
@@ -162,12 +162,12 @@
             <p14:sldId id="269"/>
           </p14:sldIdLst>
         </p14:section>
-        <p14:section name="Implementation" id="{4e611698-d67a-de02-4f91-ff492c351bd4}">
+        <p14:section name="Implementation" id="{243425e3-d081-0e2b-8b6b-054fae554828}">
           <p14:sldIdLst>
             <p14:sldId id="270"/>
           </p14:sldIdLst>
         </p14:section>
-        <p14:section name="Results" id="{1ad61c18-7062-4c58-0cf0-1f9210be5490}">
+        <p14:section name="Results" id="{1171cc2a-4f7a-39a4-e6a2-b60f3b5dce82}">
           <p14:sldIdLst>
             <p14:sldId id="271"/>
             <p14:sldId id="272"/>
@@ -197,7 +197,7 @@
             <a:pPr>
               <a:defRPr sz="1600" b="0" i="0" u="none" strike="noStrike">
                 <a:solidFill>
-                  <a:srgbClr val="E8EEFB"/>
+                  <a:srgbClr val="15211E"/>
                 </a:solidFill>
                 <a:latin typeface="Calibri"/>
               </a:defRPr>
@@ -205,7 +205,7 @@
             <a:r>
               <a:rPr sz="1600" b="0" i="0" u="none" strike="noStrike">
                 <a:solidFill>
-                  <a:srgbClr val="E8EEFB"/>
+                  <a:srgbClr val="15211E"/>
                 </a:solidFill>
                 <a:latin typeface="Calibri"/>
               </a:rPr>
@@ -240,7 +240,7 @@
           </c:tx>
           <c:spPr>
             <a:solidFill>
-              <a:srgbClr val="3CC8FF"/>
+              <a:srgbClr val="0B5C7A"/>
             </a:solidFill>
             <a:effectLst/>
           </c:spPr>
@@ -254,7 +254,7 @@
                 <a:pPr>
                   <a:defRPr b="0" i="0" strike="noStrike" sz="1200" u="none">
                     <a:solidFill>
-                      <a:srgbClr val="E8EEFB"/>
+                      <a:srgbClr val="15211E"/>
                     </a:solidFill>
                     <a:latin typeface="Calibri"/>
                   </a:defRPr>
@@ -328,7 +328,7 @@
               <a:pPr>
                 <a:defRPr b="0" i="0" strike="noStrike" sz="1200" u="none">
                   <a:solidFill>
-                    <a:srgbClr val="E8EEFB"/>
+                    <a:srgbClr val="15211E"/>
                   </a:solidFill>
                   <a:latin typeface="Calibri"/>
                 </a:defRPr>
@@ -376,7 +376,7 @@
             <a:pPr>
               <a:defRPr sz="1200" b="0" i="0" u="none" strike="noStrike">
                 <a:solidFill>
-                  <a:srgbClr val="8DA0C2"/>
+                  <a:srgbClr val="4F5D58"/>
                 </a:solidFill>
                 <a:latin typeface="Calibri"/>
               </a:defRPr>
@@ -401,7 +401,7 @@
           <c:spPr>
             <a:ln w="6350" cap="flat">
               <a:solidFill>
-                <a:srgbClr val="22314F"/>
+                <a:srgbClr val="CBD2CA"/>
               </a:solidFill>
               <a:prstDash val="solid"/>
               <a:round/>
@@ -428,7 +428,7 @@
             <a:pPr>
               <a:defRPr sz="1200" b="0" i="0" u="none" strike="noStrike">
                 <a:solidFill>
-                  <a:srgbClr val="8DA0C2"/>
+                  <a:srgbClr val="4F5D58"/>
                 </a:solidFill>
                 <a:latin typeface="Calibri"/>
               </a:defRPr>
@@ -478,7 +478,7 @@
             <a:pPr>
               <a:defRPr sz="1600" b="0" i="0" u="none" strike="noStrike">
                 <a:solidFill>
-                  <a:srgbClr val="E8EEFB"/>
+                  <a:srgbClr val="15211E"/>
                 </a:solidFill>
                 <a:latin typeface="Calibri"/>
               </a:defRPr>
@@ -486,7 +486,7 @@
             <a:r>
               <a:rPr sz="1600" b="0" i="0" u="none" strike="noStrike">
                 <a:solidFill>
-                  <a:srgbClr val="E8EEFB"/>
+                  <a:srgbClr val="15211E"/>
                 </a:solidFill>
                 <a:latin typeface="Calibri"/>
               </a:rPr>
@@ -521,7 +521,7 @@
           </c:tx>
           <c:spPr>
             <a:solidFill>
-              <a:srgbClr val="B18CFF"/>
+              <a:srgbClr val="6D5BA8"/>
             </a:solidFill>
             <a:effectLst/>
           </c:spPr>
@@ -535,7 +535,7 @@
                 <a:pPr>
                   <a:defRPr b="0" i="0" strike="noStrike" sz="1200" u="none">
                     <a:solidFill>
-                      <a:srgbClr val="E8EEFB"/>
+                      <a:srgbClr val="15211E"/>
                     </a:solidFill>
                     <a:latin typeface="Calibri"/>
                   </a:defRPr>
@@ -651,7 +651,7 @@
               <a:pPr>
                 <a:defRPr b="0" i="0" strike="noStrike" sz="1200" u="none">
                   <a:solidFill>
-                    <a:srgbClr val="E8EEFB"/>
+                    <a:srgbClr val="15211E"/>
                   </a:solidFill>
                   <a:latin typeface="Calibri"/>
                 </a:defRPr>
@@ -699,7 +699,7 @@
             <a:pPr>
               <a:defRPr sz="1200" b="0" i="0" u="none" strike="noStrike">
                 <a:solidFill>
-                  <a:srgbClr val="8DA0C2"/>
+                  <a:srgbClr val="4F5D58"/>
                 </a:solidFill>
                 <a:latin typeface="Calibri"/>
               </a:defRPr>
@@ -724,7 +724,7 @@
           <c:spPr>
             <a:ln w="6350" cap="flat">
               <a:solidFill>
-                <a:srgbClr val="22314F"/>
+                <a:srgbClr val="CBD2CA"/>
               </a:solidFill>
               <a:prstDash val="solid"/>
               <a:round/>
@@ -751,7 +751,7 @@
             <a:pPr>
               <a:defRPr sz="1200" b="0" i="0" u="none" strike="noStrike">
                 <a:solidFill>
-                  <a:srgbClr val="8DA0C2"/>
+                  <a:srgbClr val="4F5D58"/>
                 </a:solidFill>
                 <a:latin typeface="Calibri"/>
               </a:defRPr>
@@ -2326,7 +2326,7 @@
           <a:p>
             <a:r>
               <a:rPr lang="en-US" dirty="0"/>
-              <a:t>This is the real application, running on a MongoDB with 3.6 million records. Left: key capabilities. Right: the command centre with KPIs, world risk map and live alerts.</a:t>
+              <a:t>This is the real application, running on a MongoDB with 3.6 million records. Left: key capabilities. Right: the Situation page: summary sentence, network at a glance, world risk map and live alert register.</a:t>
             </a:r>
             <a:endParaRPr lang="en-US" dirty="0"/>
           </a:p>
@@ -2756,7 +2756,7 @@
     <p:bg>
       <p:bgPr>
         <a:solidFill>
-          <a:srgbClr val="0A101D"/>
+          <a:srgbClr val="F1F3EF"/>
         </a:solidFill>
       </p:bgPr>
     </p:bg>
@@ -2801,7 +2801,7 @@
             <a:r>
               <a:rPr lang="en-US" sz="1000" dirty="0">
                 <a:solidFill>
-                  <a:srgbClr val="8DA0C2"/>
+                  <a:srgbClr val="4F5D58"/>
                 </a:solidFill>
                 <a:latin typeface="Calibri" pitchFamily="34" charset="0"/>
                 <a:ea typeface="Calibri" pitchFamily="34" charset="-122"/>
@@ -2843,7 +2843,7 @@
             <a:lvl1pPr>
               <a:defRPr sz="1000">
                 <a:solidFill>
-                  <a:srgbClr val="8DA0C2"/>
+                  <a:srgbClr val="4F5D58"/>
                 </a:solidFill>
                 <a:latin typeface="Calibri"/>
                 <a:ea typeface="Calibri"/>
@@ -2875,7 +2875,7 @@
     <p:bg>
       <p:bgPr>
         <a:solidFill>
-          <a:srgbClr val="0A101D"/>
+          <a:srgbClr val="F1F3EF"/>
         </a:solidFill>
       </p:bgPr>
     </p:bg>
@@ -2948,7 +2948,7 @@
             <a:lvl1pPr>
               <a:defRPr sz="1000">
                 <a:solidFill>
-                  <a:srgbClr val="8DA0C2"/>
+                  <a:srgbClr val="4F5D58"/>
                 </a:solidFill>
                 <a:latin typeface="Calibri"/>
                 <a:ea typeface="Calibri"/>
@@ -3247,24 +3247,24 @@
       </p:grpSpPr>
       <p:sp>
         <p:nvSpPr>
-          <p:cNvPr id="2" name="ring1"/>
+          <p:cNvPr id="2" name="mark"/>
           <p:cNvSpPr/>
           <p:nvPr/>
         </p:nvSpPr>
         <p:spPr>
           <a:xfrm>
-            <a:off x="7955280" y="1097280"/>
-            <a:ext cx="3840480" cy="3840480"/>
-          </a:xfrm>
-          <a:prstGeom prst="ellipse">
+            <a:off x="8412480" y="1097280"/>
+            <a:ext cx="3291840" cy="3291840"/>
+          </a:xfrm>
+          <a:prstGeom prst="rect">
             <a:avLst/>
           </a:prstGeom>
           <a:solidFill>
-            <a:srgbClr val="111B2F"/>
+            <a:srgbClr val="15211E"/>
           </a:solidFill>
           <a:ln w="12700">
             <a:solidFill>
-              <a:srgbClr val="22314F"/>
+              <a:srgbClr val="15211E"/>
             </a:solidFill>
             <a:prstDash val="solid"/>
           </a:ln>
@@ -3272,24 +3272,24 @@
       </p:sp>
       <p:sp>
         <p:nvSpPr>
-          <p:cNvPr id="3" name="ring2"/>
+          <p:cNvPr id="3" name="staff-fill-outer"/>
           <p:cNvSpPr/>
           <p:nvPr/>
         </p:nvSpPr>
         <p:spPr>
           <a:xfrm>
-            <a:off x="8595360" y="1737360"/>
-            <a:ext cx="2560320" cy="2560320"/>
-          </a:xfrm>
-          <a:prstGeom prst="ellipse">
+            <a:off x="9144000" y="1600200"/>
+            <a:ext cx="1051560" cy="2286000"/>
+          </a:xfrm>
+          <a:prstGeom prst="rect">
             <a:avLst/>
           </a:prstGeom>
           <a:solidFill>
-            <a:srgbClr val="16223A"/>
+            <a:srgbClr val="F1F3EF"/>
           </a:solidFill>
-          <a:ln w="25400">
+          <a:ln w="12700">
             <a:solidFill>
-              <a:srgbClr val="3CC8FF"/>
+              <a:srgbClr val="F1F3EF"/>
             </a:solidFill>
             <a:prstDash val="solid"/>
           </a:ln>
@@ -3297,24 +3297,24 @@
       </p:sp>
       <p:sp>
         <p:nvSpPr>
-          <p:cNvPr id="4" name="pupil"/>
+          <p:cNvPr id="4" name="staff-void"/>
           <p:cNvSpPr/>
           <p:nvPr/>
         </p:nvSpPr>
         <p:spPr>
           <a:xfrm>
-            <a:off x="9281160" y="2423160"/>
-            <a:ext cx="1188720" cy="1188720"/>
-          </a:xfrm>
-          <a:prstGeom prst="ellipse">
+            <a:off x="9235440" y="1691640"/>
+            <a:ext cx="868680" cy="914400"/>
+          </a:xfrm>
+          <a:prstGeom prst="rect">
             <a:avLst/>
           </a:prstGeom>
           <a:solidFill>
-            <a:srgbClr val="FF3B5C"/>
+            <a:srgbClr val="15211E"/>
           </a:solidFill>
           <a:ln w="12700">
             <a:solidFill>
-              <a:srgbClr val="FF3B5C"/>
+              <a:srgbClr val="15211E"/>
             </a:solidFill>
             <a:prstDash val="solid"/>
           </a:ln>
@@ -3322,24 +3322,24 @@
       </p:sp>
       <p:sp>
         <p:nvSpPr>
-          <p:cNvPr id="5" name="pupil-core"/>
+          <p:cNvPr id="5" name="tick"/>
           <p:cNvSpPr/>
           <p:nvPr/>
         </p:nvSpPr>
         <p:spPr>
           <a:xfrm>
-            <a:off x="9674352" y="2816352"/>
-            <a:ext cx="402336" cy="402336"/>
-          </a:xfrm>
-          <a:prstGeom prst="ellipse">
+            <a:off x="10195560" y="1691640"/>
+            <a:ext cx="457200" cy="36576"/>
+          </a:xfrm>
+          <a:prstGeom prst="rect">
             <a:avLst/>
           </a:prstGeom>
           <a:solidFill>
-            <a:srgbClr val="0A101D"/>
+            <a:srgbClr val="F1F3EF"/>
           </a:solidFill>
           <a:ln w="12700">
             <a:solidFill>
-              <a:srgbClr val="0A101D"/>
+              <a:srgbClr val="F1F3EF"/>
             </a:solidFill>
             <a:prstDash val="solid"/>
           </a:ln>
@@ -3347,7 +3347,207 @@
       </p:sp>
       <p:sp>
         <p:nvSpPr>
-          <p:cNvPr id="6" name="Text 4"/>
+          <p:cNvPr id="6" name="tick"/>
+          <p:cNvSpPr/>
+          <p:nvPr/>
+        </p:nvSpPr>
+        <p:spPr>
+          <a:xfrm>
+            <a:off x="10195560" y="2011680"/>
+            <a:ext cx="274320" cy="36576"/>
+          </a:xfrm>
+          <a:prstGeom prst="rect">
+            <a:avLst/>
+          </a:prstGeom>
+          <a:solidFill>
+            <a:srgbClr val="F1F3EF"/>
+          </a:solidFill>
+          <a:ln w="12700">
+            <a:solidFill>
+              <a:srgbClr val="F1F3EF"/>
+            </a:solidFill>
+            <a:prstDash val="solid"/>
+          </a:ln>
+        </p:spPr>
+      </p:sp>
+      <p:sp>
+        <p:nvSpPr>
+          <p:cNvPr id="7" name="tick"/>
+          <p:cNvSpPr/>
+          <p:nvPr/>
+        </p:nvSpPr>
+        <p:spPr>
+          <a:xfrm>
+            <a:off x="10195560" y="2331720"/>
+            <a:ext cx="457200" cy="36576"/>
+          </a:xfrm>
+          <a:prstGeom prst="rect">
+            <a:avLst/>
+          </a:prstGeom>
+          <a:solidFill>
+            <a:srgbClr val="F1F3EF"/>
+          </a:solidFill>
+          <a:ln w="12700">
+            <a:solidFill>
+              <a:srgbClr val="F1F3EF"/>
+            </a:solidFill>
+            <a:prstDash val="solid"/>
+          </a:ln>
+        </p:spPr>
+      </p:sp>
+      <p:sp>
+        <p:nvSpPr>
+          <p:cNvPr id="8" name="tick"/>
+          <p:cNvSpPr/>
+          <p:nvPr/>
+        </p:nvSpPr>
+        <p:spPr>
+          <a:xfrm>
+            <a:off x="10195560" y="2651760"/>
+            <a:ext cx="274320" cy="36576"/>
+          </a:xfrm>
+          <a:prstGeom prst="rect">
+            <a:avLst/>
+          </a:prstGeom>
+          <a:solidFill>
+            <a:srgbClr val="F1F3EF"/>
+          </a:solidFill>
+          <a:ln w="12700">
+            <a:solidFill>
+              <a:srgbClr val="F1F3EF"/>
+            </a:solidFill>
+            <a:prstDash val="solid"/>
+          </a:ln>
+        </p:spPr>
+      </p:sp>
+      <p:sp>
+        <p:nvSpPr>
+          <p:cNvPr id="9" name="tick"/>
+          <p:cNvSpPr/>
+          <p:nvPr/>
+        </p:nvSpPr>
+        <p:spPr>
+          <a:xfrm>
+            <a:off x="10195560" y="2971800"/>
+            <a:ext cx="457200" cy="36576"/>
+          </a:xfrm>
+          <a:prstGeom prst="rect">
+            <a:avLst/>
+          </a:prstGeom>
+          <a:solidFill>
+            <a:srgbClr val="F1F3EF"/>
+          </a:solidFill>
+          <a:ln w="12700">
+            <a:solidFill>
+              <a:srgbClr val="F1F3EF"/>
+            </a:solidFill>
+            <a:prstDash val="solid"/>
+          </a:ln>
+        </p:spPr>
+      </p:sp>
+      <p:sp>
+        <p:nvSpPr>
+          <p:cNvPr id="10" name="tick"/>
+          <p:cNvSpPr/>
+          <p:nvPr/>
+        </p:nvSpPr>
+        <p:spPr>
+          <a:xfrm>
+            <a:off x="10195560" y="3291840"/>
+            <a:ext cx="274320" cy="36576"/>
+          </a:xfrm>
+          <a:prstGeom prst="rect">
+            <a:avLst/>
+          </a:prstGeom>
+          <a:solidFill>
+            <a:srgbClr val="F1F3EF"/>
+          </a:solidFill>
+          <a:ln w="12700">
+            <a:solidFill>
+              <a:srgbClr val="F1F3EF"/>
+            </a:solidFill>
+            <a:prstDash val="solid"/>
+          </a:ln>
+        </p:spPr>
+      </p:sp>
+      <p:sp>
+        <p:nvSpPr>
+          <p:cNvPr id="11" name="tick"/>
+          <p:cNvSpPr/>
+          <p:nvPr/>
+        </p:nvSpPr>
+        <p:spPr>
+          <a:xfrm>
+            <a:off x="10195560" y="3611880"/>
+            <a:ext cx="457200" cy="36576"/>
+          </a:xfrm>
+          <a:prstGeom prst="rect">
+            <a:avLst/>
+          </a:prstGeom>
+          <a:solidFill>
+            <a:srgbClr val="F1F3EF"/>
+          </a:solidFill>
+          <a:ln w="12700">
+            <a:solidFill>
+              <a:srgbClr val="F1F3EF"/>
+            </a:solidFill>
+            <a:prstDash val="solid"/>
+          </a:ln>
+        </p:spPr>
+      </p:sp>
+      <p:sp>
+        <p:nvSpPr>
+          <p:cNvPr id="12" name="waterline"/>
+          <p:cNvSpPr/>
+          <p:nvPr/>
+        </p:nvSpPr>
+        <p:spPr>
+          <a:xfrm>
+            <a:off x="8686800" y="2606040"/>
+            <a:ext cx="2743200" cy="82296"/>
+          </a:xfrm>
+          <a:prstGeom prst="rect">
+            <a:avLst/>
+          </a:prstGeom>
+          <a:solidFill>
+            <a:srgbClr val="D1561F"/>
+          </a:solidFill>
+          <a:ln w="12700">
+            <a:solidFill>
+              <a:srgbClr val="D1561F"/>
+            </a:solidFill>
+            <a:prstDash val="solid"/>
+          </a:ln>
+        </p:spPr>
+      </p:sp>
+      <p:sp>
+        <p:nvSpPr>
+          <p:cNvPr id="13" name="limit"/>
+          <p:cNvSpPr/>
+          <p:nvPr/>
+        </p:nvSpPr>
+        <p:spPr>
+          <a:xfrm>
+            <a:off x="10972800" y="1371600"/>
+            <a:ext cx="274320" cy="274320"/>
+          </a:xfrm>
+          <a:prstGeom prst="rect">
+            <a:avLst/>
+          </a:prstGeom>
+          <a:solidFill>
+            <a:srgbClr val="A3102E"/>
+          </a:solidFill>
+          <a:ln w="12700">
+            <a:solidFill>
+              <a:srgbClr val="A3102E"/>
+            </a:solidFill>
+            <a:prstDash val="solid"/>
+          </a:ln>
+        </p:spPr>
+      </p:sp>
+      <p:sp>
+        <p:nvSpPr>
+          <p:cNvPr id="14" name="Text 12"/>
           <p:cNvSpPr txBox="1"/>
           <p:nvPr/>
         </p:nvSpPr>
@@ -3372,7 +3572,7 @@
             <a:r>
               <a:rPr lang="en-US" sz="1400" b="1" spc="300" kern="0" dirty="0">
                 <a:solidFill>
-                  <a:srgbClr val="3CC8FF"/>
+                  <a:srgbClr val="0B5C7A"/>
                 </a:solidFill>
                 <a:latin typeface="Calibri" pitchFamily="34" charset="0"/>
                 <a:ea typeface="Calibri" pitchFamily="34" charset="-122"/>
@@ -3386,7 +3586,7 @@
       </p:sp>
       <p:sp>
         <p:nvSpPr>
-          <p:cNvPr id="7" name="Text 5"/>
+          <p:cNvPr id="15" name="Text 13"/>
           <p:cNvSpPr txBox="1"/>
           <p:nvPr/>
         </p:nvSpPr>
@@ -3411,81 +3611,120 @@
             <a:r>
               <a:rPr lang="en-US" sz="7200" b="1" dirty="0">
                 <a:solidFill>
-                  <a:srgbClr val="E8EEFB"/>
+                  <a:srgbClr val="15211E"/>
+                </a:solidFill>
+                <a:latin typeface="Cambria" pitchFamily="34" charset="0"/>
+                <a:ea typeface="Cambria" pitchFamily="34" charset="-122"/>
+                <a:cs typeface="Cambria" pitchFamily="34" charset="-120"/>
+              </a:rPr>
+              <a:t>DRISHTI</a:t>
+            </a:r>
+            <a:pPr indent="0" marL="0">
+              <a:buNone/>
+            </a:pPr>
+            <a:r>
+              <a:rPr lang="en-US" sz="4000" dirty="0">
+                <a:solidFill>
+                  <a:srgbClr val="0B5C7A"/>
+                </a:solidFill>
+                <a:latin typeface="Nirmala UI" pitchFamily="34" charset="0"/>
+                <a:ea typeface="Nirmala UI" pitchFamily="34" charset="-122"/>
+                <a:cs typeface="Nirmala UI" pitchFamily="34" charset="-120"/>
+              </a:rPr>
+              <a:t>  दृष्टि</a:t>
+            </a:r>
+            <a:endParaRPr lang="en-US" sz="7200" dirty="0"/>
+          </a:p>
+        </p:txBody>
+      </p:sp>
+      <p:sp>
+        <p:nvSpPr>
+          <p:cNvPr id="16" name="Text 14"/>
+          <p:cNvSpPr txBox="1"/>
+          <p:nvPr/>
+        </p:nvSpPr>
+        <p:spPr>
+          <a:xfrm>
+            <a:off x="640080" y="2331720"/>
+            <a:ext cx="7680960" cy="822960"/>
+          </a:xfrm>
+          <a:prstGeom prst="rect">
+            <a:avLst/>
+          </a:prstGeom>
+          <a:noFill/>
+          <a:ln/>
+        </p:spPr>
+        <p:txBody>
+          <a:bodyPr wrap="square" lIns="0" tIns="0" rIns="0" bIns="0" rtlCol="0" anchor="t"/>
+          <a:lstStyle/>
+          <a:p>
+            <a:pPr indent="0" marL="0">
+              <a:buNone/>
+            </a:pPr>
+            <a:r>
+              <a:rPr lang="en-US" sz="2400" dirty="0">
+                <a:solidFill>
+                  <a:srgbClr val="15211E"/>
                 </a:solidFill>
                 <a:latin typeface="Calibri" pitchFamily="34" charset="0"/>
                 <a:ea typeface="Calibri" pitchFamily="34" charset="-122"/>
                 <a:cs typeface="Calibri" pitchFamily="34" charset="-120"/>
               </a:rPr>
-              <a:t>DRISHTI</a:t>
-            </a:r>
+              <a:t>Disaster Risk Intelligence &amp; Situational Hazard Tracking Interface</a:t>
+            </a:r>
+            <a:endParaRPr lang="en-US" sz="2400" dirty="0"/>
+          </a:p>
+        </p:txBody>
+      </p:sp>
+      <p:sp>
+        <p:nvSpPr>
+          <p:cNvPr id="17" name="Text 15"/>
+          <p:cNvSpPr txBox="1"/>
+          <p:nvPr/>
+        </p:nvSpPr>
+        <p:spPr>
+          <a:xfrm>
+            <a:off x="640080" y="3291840"/>
+            <a:ext cx="7498080" cy="731520"/>
+          </a:xfrm>
+          <a:prstGeom prst="rect">
+            <a:avLst/>
+          </a:prstGeom>
+          <a:noFill/>
+          <a:ln/>
+        </p:spPr>
+        <p:txBody>
+          <a:bodyPr wrap="square" lIns="0" tIns="0" rIns="0" bIns="0" rtlCol="0" anchor="t"/>
+          <a:lstStyle/>
+          <a:p>
             <a:pPr indent="0" marL="0">
               <a:buNone/>
             </a:pPr>
             <a:r>
-              <a:rPr lang="en-US" sz="4000" b="1" dirty="0">
-                <a:solidFill>
-                  <a:srgbClr val="3CC8FF"/>
-                </a:solidFill>
-                <a:latin typeface="Nirmala UI" pitchFamily="34" charset="0"/>
-                <a:ea typeface="Nirmala UI" pitchFamily="34" charset="-122"/>
-                <a:cs typeface="Nirmala UI" pitchFamily="34" charset="-120"/>
-              </a:rPr>
-              <a:t>  दृष्टि</a:t>
-            </a:r>
-            <a:endParaRPr lang="en-US" sz="7200" dirty="0"/>
-          </a:p>
-        </p:txBody>
-      </p:sp>
-      <p:sp>
-        <p:nvSpPr>
-          <p:cNvPr id="8" name="Text 6"/>
-          <p:cNvSpPr txBox="1"/>
-          <p:nvPr/>
-        </p:nvSpPr>
-        <p:spPr>
-          <a:xfrm>
-            <a:off x="640080" y="2331720"/>
-            <a:ext cx="7680960" cy="822960"/>
-          </a:xfrm>
-          <a:prstGeom prst="rect">
-            <a:avLst/>
-          </a:prstGeom>
-          <a:noFill/>
-          <a:ln/>
-        </p:spPr>
-        <p:txBody>
-          <a:bodyPr wrap="square" lIns="0" tIns="0" rIns="0" bIns="0" rtlCol="0" anchor="t"/>
-          <a:lstStyle/>
-          <a:p>
-            <a:pPr indent="0" marL="0">
-              <a:buNone/>
-            </a:pPr>
-            <a:r>
-              <a:rPr lang="en-US" sz="2400" dirty="0">
-                <a:solidFill>
-                  <a:srgbClr val="E8EEFB"/>
+              <a:rPr lang="en-US" sz="1600" i="1" dirty="0">
+                <a:solidFill>
+                  <a:srgbClr val="4F5D58"/>
                 </a:solidFill>
                 <a:latin typeface="Calibri" pitchFamily="34" charset="0"/>
                 <a:ea typeface="Calibri" pitchFamily="34" charset="-122"/>
                 <a:cs typeface="Calibri" pitchFamily="34" charset="-120"/>
               </a:rPr>
-              <a:t>Disaster Risk Intelligence &amp; Situational Hazard Tracking Interface</a:t>
-            </a:r>
-            <a:endParaRPr lang="en-US" sz="2400" dirty="0"/>
-          </a:p>
-        </p:txBody>
-      </p:sp>
-      <p:sp>
-        <p:nvSpPr>
-          <p:cNvPr id="9" name="Text 7"/>
+              <a:t>Disaster &amp; Emergency Intelligence System: A MongoDB-Based Big Data Analytics Platform</a:t>
+            </a:r>
+            <a:endParaRPr lang="en-US" sz="1600" dirty="0"/>
+          </a:p>
+        </p:txBody>
+      </p:sp>
+      <p:sp>
+        <p:nvSpPr>
+          <p:cNvPr id="18" name="Text 16"/>
           <p:cNvSpPr txBox="1"/>
           <p:nvPr/>
         </p:nvSpPr>
         <p:spPr>
           <a:xfrm>
-            <a:off x="640080" y="3291840"/>
-            <a:ext cx="7498080" cy="731520"/>
+            <a:off x="640080" y="4343400"/>
+            <a:ext cx="3840480" cy="1280160"/>
           </a:xfrm>
           <a:prstGeom prst="rect">
             <a:avLst/>
@@ -3501,40 +3740,18 @@
               <a:buNone/>
             </a:pPr>
             <a:r>
-              <a:rPr lang="en-US" sz="1600" i="1" dirty="0">
-                <a:solidFill>
-                  <a:srgbClr val="8DA0C2"/>
+              <a:rPr lang="en-US" sz="1500" dirty="0">
+                <a:solidFill>
+                  <a:srgbClr val="15211E"/>
                 </a:solidFill>
                 <a:latin typeface="Calibri" pitchFamily="34" charset="0"/>
                 <a:ea typeface="Calibri" pitchFamily="34" charset="-122"/>
                 <a:cs typeface="Calibri" pitchFamily="34" charset="-120"/>
               </a:rPr>
-              <a:t>Disaster &amp; Emergency Intelligence System: A MongoDB-Based Big Data Analytics Platform</a:t>
-            </a:r>
-            <a:endParaRPr lang="en-US" sz="1600" dirty="0"/>
-          </a:p>
-        </p:txBody>
-      </p:sp>
-      <p:sp>
-        <p:nvSpPr>
-          <p:cNvPr id="10" name="Text 8"/>
-          <p:cNvSpPr txBox="1"/>
-          <p:nvPr/>
-        </p:nvSpPr>
-        <p:spPr>
-          <a:xfrm>
-            <a:off x="640080" y="4343400"/>
-            <a:ext cx="3840480" cy="1280160"/>
-          </a:xfrm>
-          <a:prstGeom prst="rect">
-            <a:avLst/>
-          </a:prstGeom>
-          <a:noFill/>
-          <a:ln/>
-        </p:spPr>
-        <p:txBody>
-          <a:bodyPr wrap="square" lIns="0" tIns="0" rIns="0" bIns="0" rtlCol="0" anchor="t"/>
-          <a:lstStyle/>
+              <a:t>Vichitra Attri  1BI23IS135</a:t>
+            </a:r>
+            <a:endParaRPr lang="en-US" sz="1500" dirty="0"/>
+          </a:p>
           <a:p>
             <a:pPr indent="0" marL="0">
               <a:buNone/>
@@ -3542,13 +3759,13 @@
             <a:r>
               <a:rPr lang="en-US" sz="1500" dirty="0">
                 <a:solidFill>
-                  <a:srgbClr val="E8EEFB"/>
+                  <a:srgbClr val="15211E"/>
                 </a:solidFill>
                 <a:latin typeface="Calibri" pitchFamily="34" charset="0"/>
                 <a:ea typeface="Calibri" pitchFamily="34" charset="-122"/>
                 <a:cs typeface="Calibri" pitchFamily="34" charset="-120"/>
               </a:rPr>
-              <a:t>Vichitra Attri  1BI23IS135</a:t>
+              <a:t>Vidhyashree S  1BI23IS136</a:t>
             </a:r>
             <a:endParaRPr lang="en-US" sz="1500" dirty="0"/>
           </a:p>
@@ -3559,13 +3776,13 @@
             <a:r>
               <a:rPr lang="en-US" sz="1500" dirty="0">
                 <a:solidFill>
-                  <a:srgbClr val="E8EEFB"/>
+                  <a:srgbClr val="15211E"/>
                 </a:solidFill>
                 <a:latin typeface="Calibri" pitchFamily="34" charset="0"/>
                 <a:ea typeface="Calibri" pitchFamily="34" charset="-122"/>
                 <a:cs typeface="Calibri" pitchFamily="34" charset="-120"/>
               </a:rPr>
-              <a:t>Vidhyashree S  1BI23IS136</a:t>
+              <a:t>Vidya Bai K  1BI23IS137</a:t>
             </a:r>
             <a:endParaRPr lang="en-US" sz="1500" dirty="0"/>
           </a:p>
@@ -3576,16 +3793,38 @@
             <a:r>
               <a:rPr lang="en-US" sz="1500" dirty="0">
                 <a:solidFill>
-                  <a:srgbClr val="E8EEFB"/>
+                  <a:srgbClr val="15211E"/>
                 </a:solidFill>
                 <a:latin typeface="Calibri" pitchFamily="34" charset="0"/>
                 <a:ea typeface="Calibri" pitchFamily="34" charset="-122"/>
                 <a:cs typeface="Calibri" pitchFamily="34" charset="-120"/>
               </a:rPr>
-              <a:t>Vidya Bai K  1BI23IS137</a:t>
+              <a:t>Vikram K  1BI23IS138</a:t>
             </a:r>
             <a:endParaRPr lang="en-US" sz="1500" dirty="0"/>
           </a:p>
+        </p:txBody>
+      </p:sp>
+      <p:sp>
+        <p:nvSpPr>
+          <p:cNvPr id="19" name="Text 17"/>
+          <p:cNvSpPr txBox="1"/>
+          <p:nvPr/>
+        </p:nvSpPr>
+        <p:spPr>
+          <a:xfrm>
+            <a:off x="4754880" y="4343400"/>
+            <a:ext cx="3840480" cy="1280160"/>
+          </a:xfrm>
+          <a:prstGeom prst="rect">
+            <a:avLst/>
+          </a:prstGeom>
+          <a:noFill/>
+          <a:ln/>
+        </p:spPr>
+        <p:txBody>
+          <a:bodyPr wrap="square" lIns="0" tIns="0" rIns="0" bIns="0" rtlCol="0" anchor="t"/>
+          <a:lstStyle/>
           <a:p>
             <a:pPr indent="0" marL="0">
               <a:buNone/>
@@ -3593,52 +3832,30 @@
             <a:r>
               <a:rPr lang="en-US" sz="1500" dirty="0">
                 <a:solidFill>
-                  <a:srgbClr val="E8EEFB"/>
+                  <a:srgbClr val="4F5D58"/>
                 </a:solidFill>
                 <a:latin typeface="Calibri" pitchFamily="34" charset="0"/>
                 <a:ea typeface="Calibri" pitchFamily="34" charset="-122"/>
                 <a:cs typeface="Calibri" pitchFamily="34" charset="-120"/>
               </a:rPr>
-              <a:t>Vikram K  1BI23IS138</a:t>
+              <a:t>Under the guidance of</a:t>
             </a:r>
             <a:endParaRPr lang="en-US" sz="1500" dirty="0"/>
           </a:p>
-        </p:txBody>
-      </p:sp>
-      <p:sp>
-        <p:nvSpPr>
-          <p:cNvPr id="11" name="Text 9"/>
-          <p:cNvSpPr txBox="1"/>
-          <p:nvPr/>
-        </p:nvSpPr>
-        <p:spPr>
-          <a:xfrm>
-            <a:off x="4754880" y="4343400"/>
-            <a:ext cx="3840480" cy="1280160"/>
-          </a:xfrm>
-          <a:prstGeom prst="rect">
-            <a:avLst/>
-          </a:prstGeom>
-          <a:noFill/>
-          <a:ln/>
-        </p:spPr>
-        <p:txBody>
-          <a:bodyPr wrap="square" lIns="0" tIns="0" rIns="0" bIns="0" rtlCol="0" anchor="t"/>
-          <a:lstStyle/>
           <a:p>
             <a:pPr indent="0" marL="0">
               <a:buNone/>
             </a:pPr>
             <a:r>
-              <a:rPr lang="en-US" sz="1500" dirty="0">
-                <a:solidFill>
-                  <a:srgbClr val="8DA0C2"/>
+              <a:rPr lang="en-US" sz="1500" b="1" dirty="0">
+                <a:solidFill>
+                  <a:srgbClr val="15211E"/>
                 </a:solidFill>
                 <a:latin typeface="Calibri" pitchFamily="34" charset="0"/>
                 <a:ea typeface="Calibri" pitchFamily="34" charset="-122"/>
                 <a:cs typeface="Calibri" pitchFamily="34" charset="-120"/>
               </a:rPr>
-              <a:t>Under the guidance of</a:t>
+              <a:t>Prof. Roopa B</a:t>
             </a:r>
             <a:endParaRPr lang="en-US" sz="1500" dirty="0"/>
           </a:p>
@@ -3647,65 +3864,48 @@
               <a:buNone/>
             </a:pPr>
             <a:r>
-              <a:rPr lang="en-US" sz="1500" b="1" dirty="0">
-                <a:solidFill>
-                  <a:srgbClr val="E8EEFB"/>
+              <a:rPr lang="en-US" sz="1500" dirty="0">
+                <a:solidFill>
+                  <a:srgbClr val="15211E"/>
                 </a:solidFill>
                 <a:latin typeface="Calibri" pitchFamily="34" charset="0"/>
                 <a:ea typeface="Calibri" pitchFamily="34" charset="-122"/>
                 <a:cs typeface="Calibri" pitchFamily="34" charset="-120"/>
               </a:rPr>
-              <a:t>Prof. Roopa B</a:t>
+              <a:t>Assistant Professor, Dept. of ISE</a:t>
             </a:r>
             <a:endParaRPr lang="en-US" sz="1500" dirty="0"/>
           </a:p>
+        </p:txBody>
+      </p:sp>
+      <p:sp>
+        <p:nvSpPr>
+          <p:cNvPr id="20" name="Text 18"/>
+          <p:cNvSpPr txBox="1"/>
+          <p:nvPr/>
+        </p:nvSpPr>
+        <p:spPr>
+          <a:xfrm>
+            <a:off x="640080" y="6126480"/>
+            <a:ext cx="10058400" cy="320040"/>
+          </a:xfrm>
+          <a:prstGeom prst="rect">
+            <a:avLst/>
+          </a:prstGeom>
+          <a:noFill/>
+          <a:ln/>
+        </p:spPr>
+        <p:txBody>
+          <a:bodyPr wrap="square" lIns="0" tIns="0" rIns="0" bIns="0" rtlCol="0" anchor="ctr"/>
+          <a:lstStyle/>
           <a:p>
             <a:pPr indent="0" marL="0">
               <a:buNone/>
             </a:pPr>
             <a:r>
-              <a:rPr lang="en-US" sz="1500" dirty="0">
-                <a:solidFill>
-                  <a:srgbClr val="E8EEFB"/>
-                </a:solidFill>
-                <a:latin typeface="Calibri" pitchFamily="34" charset="0"/>
-                <a:ea typeface="Calibri" pitchFamily="34" charset="-122"/>
-                <a:cs typeface="Calibri" pitchFamily="34" charset="-120"/>
-              </a:rPr>
-              <a:t>Assistant Professor, Dept. of ISE</a:t>
-            </a:r>
-            <a:endParaRPr lang="en-US" sz="1500" dirty="0"/>
-          </a:p>
-        </p:txBody>
-      </p:sp>
-      <p:sp>
-        <p:nvSpPr>
-          <p:cNvPr id="12" name="Text 10"/>
-          <p:cNvSpPr txBox="1"/>
-          <p:nvPr/>
-        </p:nvSpPr>
-        <p:spPr>
-          <a:xfrm>
-            <a:off x="640080" y="6126480"/>
-            <a:ext cx="10058400" cy="320040"/>
-          </a:xfrm>
-          <a:prstGeom prst="rect">
-            <a:avLst/>
-          </a:prstGeom>
-          <a:noFill/>
-          <a:ln/>
-        </p:spPr>
-        <p:txBody>
-          <a:bodyPr wrap="square" lIns="0" tIns="0" rIns="0" bIns="0" rtlCol="0" anchor="ctr"/>
-          <a:lstStyle/>
-          <a:p>
-            <a:pPr indent="0" marL="0">
-              <a:buNone/>
-            </a:pPr>
-            <a:r>
               <a:rPr lang="en-US" sz="1200" dirty="0">
                 <a:solidFill>
-                  <a:srgbClr val="8DA0C2"/>
+                  <a:srgbClr val="4F5D58"/>
                 </a:solidFill>
                 <a:latin typeface="Calibri" pitchFamily="34" charset="0"/>
                 <a:ea typeface="Calibri" pitchFamily="34" charset="-122"/>
@@ -3785,27 +3985,20 @@
             <a:off x="548640" y="1371600"/>
             <a:ext cx="11064240" cy="1234440"/>
           </a:xfrm>
-          <a:prstGeom prst="roundRect">
+          <a:prstGeom prst="rect">
             <a:avLst>
               <a:gd name="adj" fmla="val 7407"/>
             </a:avLst>
           </a:prstGeom>
           <a:solidFill>
-            <a:srgbClr val="111B2F"/>
+            <a:srgbClr val="FAFBF8"/>
           </a:solidFill>
           <a:ln w="9525">
             <a:solidFill>
-              <a:srgbClr val="22314F"/>
+              <a:srgbClr val="CBD2CA"/>
             </a:solidFill>
             <a:prstDash val="solid"/>
           </a:ln>
-          <a:effectLst>
-            <a:outerShdw sx="100000" sy="100000" kx="0" ky="0" algn="bl" rotWithShape="0" blurRad="152400" dist="38100" dir="5400000">
-              <a:srgbClr val="000000">
-                <a:alpha val="35000"/>
-              </a:srgbClr>
-            </a:outerShdw>
-          </a:effectLst>
         </p:spPr>
       </p:sp>
       <p:sp>
@@ -3835,7 +4028,7 @@
             <a:r>
               <a:rPr lang="en-US" sz="2000" b="1" dirty="0">
                 <a:solidFill>
-                  <a:srgbClr val="3CC8FF"/>
+                  <a:srgbClr val="0B5C7A"/>
                 </a:solidFill>
                 <a:latin typeface="Courier New" pitchFamily="34" charset="0"/>
                 <a:ea typeface="Courier New" pitchFamily="34" charset="-122"/>
@@ -3874,7 +4067,7 @@
             <a:r>
               <a:rPr lang="en-US" sz="1400" dirty="0">
                 <a:solidFill>
-                  <a:srgbClr val="8DA0C2"/>
+                  <a:srgbClr val="4F5D58"/>
                 </a:solidFill>
                 <a:latin typeface="Calibri" pitchFamily="34" charset="0"/>
                 <a:ea typeface="Calibri" pitchFamily="34" charset="-122"/>
@@ -3897,17 +4090,17 @@
             <a:off x="548640" y="2834640"/>
             <a:ext cx="2651760" cy="914400"/>
           </a:xfrm>
-          <a:prstGeom prst="roundRect">
+          <a:prstGeom prst="rect">
             <a:avLst>
               <a:gd name="adj" fmla="val 10000"/>
             </a:avLst>
           </a:prstGeom>
           <a:solidFill>
-            <a:srgbClr val="FF3B5C"/>
+            <a:srgbClr val="A3102E"/>
           </a:solidFill>
           <a:ln w="12700">
             <a:solidFill>
-              <a:srgbClr val="FF3B5C"/>
+              <a:srgbClr val="A3102E"/>
             </a:solidFill>
             <a:prstDash val="solid"/>
           </a:ln>
@@ -3980,17 +4173,17 @@
             <a:off x="3360420" y="2834640"/>
             <a:ext cx="2651760" cy="914400"/>
           </a:xfrm>
-          <a:prstGeom prst="roundRect">
+          <a:prstGeom prst="rect">
             <a:avLst>
               <a:gd name="adj" fmla="val 10000"/>
             </a:avLst>
           </a:prstGeom>
           <a:solidFill>
-            <a:srgbClr val="FF8A3D"/>
+            <a:srgbClr val="D1561F"/>
           </a:solidFill>
           <a:ln w="12700">
             <a:solidFill>
-              <a:srgbClr val="FF8A3D"/>
+              <a:srgbClr val="D1561F"/>
             </a:solidFill>
             <a:prstDash val="solid"/>
           </a:ln>
@@ -4023,7 +4216,7 @@
             <a:r>
               <a:rPr lang="en-US" sz="2000" b="1" dirty="0">
                 <a:solidFill>
-                  <a:srgbClr val="0A101D"/>
+                  <a:srgbClr val="FFFFFF"/>
                 </a:solidFill>
                 <a:latin typeface="Calibri" pitchFamily="34" charset="0"/>
                 <a:ea typeface="Calibri" pitchFamily="34" charset="-122"/>
@@ -4040,7 +4233,7 @@
             <a:r>
               <a:rPr lang="en-US" sz="1400" dirty="0">
                 <a:solidFill>
-                  <a:srgbClr val="0A101D"/>
+                  <a:srgbClr val="FFFFFF"/>
                 </a:solidFill>
                 <a:latin typeface="Calibri" pitchFamily="34" charset="0"/>
                 <a:ea typeface="Calibri" pitchFamily="34" charset="-122"/>
@@ -4063,17 +4256,17 @@
             <a:off x="6172200" y="2834640"/>
             <a:ext cx="2651760" cy="914400"/>
           </a:xfrm>
-          <a:prstGeom prst="roundRect">
+          <a:prstGeom prst="rect">
             <a:avLst>
               <a:gd name="adj" fmla="val 10000"/>
             </a:avLst>
           </a:prstGeom>
           <a:solidFill>
-            <a:srgbClr val="FFD23F"/>
+            <a:srgbClr val="C79A1B"/>
           </a:solidFill>
           <a:ln w="12700">
             <a:solidFill>
-              <a:srgbClr val="FFD23F"/>
+              <a:srgbClr val="C79A1B"/>
             </a:solidFill>
             <a:prstDash val="solid"/>
           </a:ln>
@@ -4106,7 +4299,7 @@
             <a:r>
               <a:rPr lang="en-US" sz="2000" b="1" dirty="0">
                 <a:solidFill>
-                  <a:srgbClr val="0A101D"/>
+                  <a:srgbClr val="15211E"/>
                 </a:solidFill>
                 <a:latin typeface="Calibri" pitchFamily="34" charset="0"/>
                 <a:ea typeface="Calibri" pitchFamily="34" charset="-122"/>
@@ -4123,7 +4316,7 @@
             <a:r>
               <a:rPr lang="en-US" sz="1400" dirty="0">
                 <a:solidFill>
-                  <a:srgbClr val="0A101D"/>
+                  <a:srgbClr val="15211E"/>
                 </a:solidFill>
                 <a:latin typeface="Calibri" pitchFamily="34" charset="0"/>
                 <a:ea typeface="Calibri" pitchFamily="34" charset="-122"/>
@@ -4146,17 +4339,17 @@
             <a:off x="8983980" y="2834640"/>
             <a:ext cx="2651760" cy="914400"/>
           </a:xfrm>
-          <a:prstGeom prst="roundRect">
+          <a:prstGeom prst="rect">
             <a:avLst>
               <a:gd name="adj" fmla="val 10000"/>
             </a:avLst>
           </a:prstGeom>
           <a:solidFill>
-            <a:srgbClr val="3DDC97"/>
+            <a:srgbClr val="5B8A8F"/>
           </a:solidFill>
           <a:ln w="12700">
             <a:solidFill>
-              <a:srgbClr val="3DDC97"/>
+              <a:srgbClr val="5B8A8F"/>
             </a:solidFill>
             <a:prstDash val="solid"/>
           </a:ln>
@@ -4189,7 +4382,7 @@
             <a:r>
               <a:rPr lang="en-US" sz="2000" b="1" dirty="0">
                 <a:solidFill>
-                  <a:srgbClr val="0A101D"/>
+                  <a:srgbClr val="15211E"/>
                 </a:solidFill>
                 <a:latin typeface="Calibri" pitchFamily="34" charset="0"/>
                 <a:ea typeface="Calibri" pitchFamily="34" charset="-122"/>
@@ -4206,7 +4399,7 @@
             <a:r>
               <a:rPr lang="en-US" sz="1400" dirty="0">
                 <a:solidFill>
-                  <a:srgbClr val="0A101D"/>
+                  <a:srgbClr val="15211E"/>
                 </a:solidFill>
                 <a:latin typeface="Calibri" pitchFamily="34" charset="0"/>
                 <a:ea typeface="Calibri" pitchFamily="34" charset="-122"/>
@@ -4229,27 +4422,20 @@
             <a:off x="548640" y="4023360"/>
             <a:ext cx="5394960" cy="2103120"/>
           </a:xfrm>
-          <a:prstGeom prst="roundRect">
+          <a:prstGeom prst="rect">
             <a:avLst>
               <a:gd name="adj" fmla="val 4348"/>
             </a:avLst>
           </a:prstGeom>
           <a:solidFill>
-            <a:srgbClr val="111B2F"/>
+            <a:srgbClr val="FAFBF8"/>
           </a:solidFill>
           <a:ln w="9525">
             <a:solidFill>
-              <a:srgbClr val="22314F"/>
+              <a:srgbClr val="CBD2CA"/>
             </a:solidFill>
             <a:prstDash val="solid"/>
           </a:ln>
-          <a:effectLst>
-            <a:outerShdw sx="100000" sy="100000" kx="0" ky="0" algn="bl" rotWithShape="0" blurRad="152400" dist="38100" dir="5400000">
-              <a:srgbClr val="000000">
-                <a:alpha val="35000"/>
-              </a:srgbClr>
-            </a:outerShdw>
-          </a:effectLst>
         </p:spPr>
       </p:sp>
       <p:sp>
@@ -4279,7 +4465,7 @@
             <a:r>
               <a:rPr lang="en-US" sz="1800" b="1" dirty="0">
                 <a:solidFill>
-                  <a:srgbClr val="E8EEFB"/>
+                  <a:srgbClr val="15211E"/>
                 </a:solidFill>
                 <a:latin typeface="Calibri" pitchFamily="34" charset="0"/>
                 <a:ea typeface="Calibri" pitchFamily="34" charset="-122"/>
@@ -4322,7 +4508,7 @@
             <a:r>
               <a:rPr lang="en-US" sz="1500" dirty="0">
                 <a:solidFill>
-                  <a:srgbClr val="E8EEFB"/>
+                  <a:srgbClr val="15211E"/>
                 </a:solidFill>
                 <a:latin typeface="Calibri" pitchFamily="34" charset="0"/>
                 <a:ea typeface="Calibri" pitchFamily="34" charset="-122"/>
@@ -4343,7 +4529,7 @@
             <a:r>
               <a:rPr lang="en-US" sz="1500" dirty="0">
                 <a:solidFill>
-                  <a:srgbClr val="E8EEFB"/>
+                  <a:srgbClr val="15211E"/>
                 </a:solidFill>
                 <a:latin typeface="Calibri" pitchFamily="34" charset="0"/>
                 <a:ea typeface="Calibri" pitchFamily="34" charset="-122"/>
@@ -4364,7 +4550,7 @@
             <a:r>
               <a:rPr lang="en-US" sz="1500" dirty="0">
                 <a:solidFill>
-                  <a:srgbClr val="E8EEFB"/>
+                  <a:srgbClr val="15211E"/>
                 </a:solidFill>
                 <a:latin typeface="Calibri" pitchFamily="34" charset="0"/>
                 <a:ea typeface="Calibri" pitchFamily="34" charset="-122"/>
@@ -4387,27 +4573,20 @@
             <a:off x="6217920" y="4023360"/>
             <a:ext cx="5394960" cy="2103120"/>
           </a:xfrm>
-          <a:prstGeom prst="roundRect">
+          <a:prstGeom prst="rect">
             <a:avLst>
               <a:gd name="adj" fmla="val 4348"/>
             </a:avLst>
           </a:prstGeom>
           <a:solidFill>
-            <a:srgbClr val="111B2F"/>
+            <a:srgbClr val="FAFBF8"/>
           </a:solidFill>
           <a:ln w="9525">
             <a:solidFill>
-              <a:srgbClr val="22314F"/>
+              <a:srgbClr val="CBD2CA"/>
             </a:solidFill>
             <a:prstDash val="solid"/>
           </a:ln>
-          <a:effectLst>
-            <a:outerShdw sx="100000" sy="100000" kx="0" ky="0" algn="bl" rotWithShape="0" blurRad="152400" dist="38100" dir="5400000">
-              <a:srgbClr val="000000">
-                <a:alpha val="35000"/>
-              </a:srgbClr>
-            </a:outerShdw>
-          </a:effectLst>
         </p:spPr>
       </p:sp>
       <p:sp>
@@ -4437,7 +4616,7 @@
             <a:r>
               <a:rPr lang="en-US" sz="1800" b="1" dirty="0">
                 <a:solidFill>
-                  <a:srgbClr val="E8EEFB"/>
+                  <a:srgbClr val="15211E"/>
                 </a:solidFill>
                 <a:latin typeface="Calibri" pitchFamily="34" charset="0"/>
                 <a:ea typeface="Calibri" pitchFamily="34" charset="-122"/>
@@ -4476,7 +4655,7 @@
             <a:r>
               <a:rPr lang="en-US" sz="1400" dirty="0">
                 <a:solidFill>
-                  <a:srgbClr val="3CC8FF"/>
+                  <a:srgbClr val="0B5C7A"/>
                 </a:solidFill>
                 <a:latin typeface="Courier New" pitchFamily="34" charset="0"/>
                 <a:ea typeface="Courier New" pitchFamily="34" charset="-122"/>
@@ -4493,7 +4672,7 @@
             <a:r>
               <a:rPr lang="en-US" sz="1400" dirty="0">
                 <a:solidFill>
-                  <a:srgbClr val="3CC8FF"/>
+                  <a:srgbClr val="0B5C7A"/>
                 </a:solidFill>
                 <a:latin typeface="Courier New" pitchFamily="34" charset="0"/>
                 <a:ea typeface="Courier New" pitchFamily="34" charset="-122"/>
@@ -4510,7 +4689,7 @@
             <a:r>
               <a:rPr lang="en-US" sz="1400" dirty="0">
                 <a:solidFill>
-                  <a:srgbClr val="3CC8FF"/>
+                  <a:srgbClr val="0B5C7A"/>
                 </a:solidFill>
                 <a:latin typeface="Courier New" pitchFamily="34" charset="0"/>
                 <a:ea typeface="Courier New" pitchFamily="34" charset="-122"/>
@@ -4552,7 +4731,7 @@
             <a:lvl1pPr>
               <a:defRPr sz="1000">
                 <a:solidFill>
-                  <a:srgbClr val="8DA0C2"/>
+                  <a:srgbClr val="4F5D58"/>
                 </a:solidFill>
                 <a:latin typeface="Calibri"/>
                 <a:ea typeface="Calibri"/>
@@ -4621,7 +4800,7 @@
             </a:pPr>
             <a:r>
               <a:rPr lang="en-US" dirty="0"/>
-              <a:t>Live demo: interactive risk map and heatmap</a:t>
+              <a:t>Live demo: interactive risk map</a:t>
             </a:r>
             <a:endParaRPr lang="en-US" dirty="0"/>
           </a:p>
@@ -4658,7 +4837,7 @@
             <a:r>
               <a:rPr lang="en-US" sz="1600" dirty="0">
                 <a:solidFill>
-                  <a:srgbClr val="E8EEFB"/>
+                  <a:srgbClr val="15211E"/>
                 </a:solidFill>
                 <a:latin typeface="Calibri" pitchFamily="34" charset="0"/>
                 <a:ea typeface="Calibri" pitchFamily="34" charset="-122"/>
@@ -4679,7 +4858,7 @@
             <a:r>
               <a:rPr lang="en-US" sz="1600" dirty="0">
                 <a:solidFill>
-                  <a:srgbClr val="E8EEFB"/>
+                  <a:srgbClr val="15211E"/>
                 </a:solidFill>
                 <a:latin typeface="Calibri" pitchFamily="34" charset="0"/>
                 <a:ea typeface="Calibri" pitchFamily="34" charset="-122"/>
@@ -4700,7 +4879,7 @@
             <a:r>
               <a:rPr lang="en-US" sz="1600" dirty="0">
                 <a:solidFill>
-                  <a:srgbClr val="E8EEFB"/>
+                  <a:srgbClr val="15211E"/>
                 </a:solidFill>
                 <a:latin typeface="Calibri" pitchFamily="34" charset="0"/>
                 <a:ea typeface="Calibri" pitchFamily="34" charset="-122"/>
@@ -4721,7 +4900,7 @@
             <a:r>
               <a:rPr lang="en-US" sz="1600" dirty="0">
                 <a:solidFill>
-                  <a:srgbClr val="E8EEFB"/>
+                  <a:srgbClr val="15211E"/>
                 </a:solidFill>
                 <a:latin typeface="Calibri" pitchFamily="34" charset="0"/>
                 <a:ea typeface="Calibri" pitchFamily="34" charset="-122"/>
@@ -4742,7 +4921,7 @@
             <a:r>
               <a:rPr lang="en-US" sz="1600" dirty="0">
                 <a:solidFill>
-                  <a:srgbClr val="E8EEFB"/>
+                  <a:srgbClr val="15211E"/>
                 </a:solidFill>
                 <a:latin typeface="Calibri" pitchFamily="34" charset="0"/>
                 <a:ea typeface="Calibri" pitchFamily="34" charset="-122"/>
@@ -4765,27 +4944,20 @@
             <a:off x="4334256" y="1316736"/>
             <a:ext cx="7333488" cy="4173093"/>
           </a:xfrm>
-          <a:prstGeom prst="roundRect">
+          <a:prstGeom prst="rect">
             <a:avLst>
               <a:gd name="adj" fmla="val 1315"/>
             </a:avLst>
           </a:prstGeom>
           <a:solidFill>
-            <a:srgbClr val="111B2F"/>
+            <a:srgbClr val="FAFBF8"/>
           </a:solidFill>
           <a:ln w="12700">
             <a:solidFill>
-              <a:srgbClr val="22314F"/>
+              <a:srgbClr val="CBD2CA"/>
             </a:solidFill>
             <a:prstDash val="solid"/>
           </a:ln>
-          <a:effectLst>
-            <a:outerShdw sx="100000" sy="100000" kx="0" ky="0" algn="bl" rotWithShape="0" blurRad="152400" dist="38100" dir="5400000">
-              <a:srgbClr val="000000">
-                <a:alpha val="35000"/>
-              </a:srgbClr>
-            </a:outerShdw>
-          </a:effectLst>
         </p:spPr>
       </p:sp>
       <p:pic>
@@ -4842,7 +5014,7 @@
             <a:lvl1pPr>
               <a:defRPr sz="1000">
                 <a:solidFill>
-                  <a:srgbClr val="8DA0C2"/>
+                  <a:srgbClr val="4F5D58"/>
                 </a:solidFill>
                 <a:latin typeface="Calibri"/>
                 <a:ea typeface="Calibri"/>
@@ -4926,29 +5098,22 @@
         <p:spPr>
           <a:xfrm>
             <a:off x="493776" y="1316736"/>
-            <a:ext cx="7333488" cy="4624578"/>
-          </a:xfrm>
-          <a:prstGeom prst="roundRect">
+            <a:ext cx="7333488" cy="4850321"/>
+          </a:xfrm>
+          <a:prstGeom prst="rect">
             <a:avLst>
-              <a:gd name="adj" fmla="val 1186"/>
+              <a:gd name="adj" fmla="val 1131"/>
             </a:avLst>
           </a:prstGeom>
           <a:solidFill>
-            <a:srgbClr val="111B2F"/>
+            <a:srgbClr val="FAFBF8"/>
           </a:solidFill>
           <a:ln w="12700">
             <a:solidFill>
-              <a:srgbClr val="22314F"/>
+              <a:srgbClr val="CBD2CA"/>
             </a:solidFill>
             <a:prstDash val="solid"/>
           </a:ln>
-          <a:effectLst>
-            <a:outerShdw sx="100000" sy="100000" kx="0" ky="0" algn="bl" rotWithShape="0" blurRad="152400" dist="38100" dir="5400000">
-              <a:srgbClr val="000000">
-                <a:alpha val="35000"/>
-              </a:srgbClr>
-            </a:outerShdw>
-          </a:effectLst>
         </p:spPr>
       </p:sp>
       <p:pic>
@@ -4968,7 +5133,7 @@
         <p:spPr>
           <a:xfrm>
             <a:off x="548640" y="1371600"/>
-            <a:ext cx="7223760" cy="4514850"/>
+            <a:ext cx="7223760" cy="4740593"/>
           </a:xfrm>
           <a:prstGeom prst="rect">
             <a:avLst/>
@@ -4986,27 +5151,20 @@
             <a:off x="8092440" y="1371600"/>
             <a:ext cx="3520440" cy="1737360"/>
           </a:xfrm>
-          <a:prstGeom prst="roundRect">
+          <a:prstGeom prst="rect">
             <a:avLst>
               <a:gd name="adj" fmla="val 5263"/>
             </a:avLst>
           </a:prstGeom>
           <a:solidFill>
-            <a:srgbClr val="111B2F"/>
+            <a:srgbClr val="FAFBF8"/>
           </a:solidFill>
           <a:ln w="9525">
             <a:solidFill>
-              <a:srgbClr val="22314F"/>
+              <a:srgbClr val="CBD2CA"/>
             </a:solidFill>
             <a:prstDash val="solid"/>
           </a:ln>
-          <a:effectLst>
-            <a:outerShdw sx="100000" sy="100000" kx="0" ky="0" algn="bl" rotWithShape="0" blurRad="152400" dist="38100" dir="5400000">
-              <a:srgbClr val="000000">
-                <a:alpha val="35000"/>
-              </a:srgbClr>
-            </a:outerShdw>
-          </a:effectLst>
         </p:spPr>
       </p:sp>
       <p:sp>
@@ -5020,15 +5178,15 @@
             <a:off x="8321040" y="1600200"/>
             <a:ext cx="201168" cy="201168"/>
           </a:xfrm>
-          <a:prstGeom prst="ellipse">
+          <a:prstGeom prst="rect">
             <a:avLst/>
           </a:prstGeom>
           <a:solidFill>
-            <a:srgbClr val="FF3B5C"/>
+            <a:srgbClr val="A3102E"/>
           </a:solidFill>
           <a:ln w="12700">
             <a:solidFill>
-              <a:srgbClr val="FF3B5C"/>
+              <a:srgbClr val="A3102E"/>
             </a:solidFill>
             <a:prstDash val="solid"/>
           </a:ln>
@@ -5061,7 +5219,7 @@
             <a:r>
               <a:rPr lang="en-US" sz="1800" b="1" dirty="0">
                 <a:solidFill>
-                  <a:srgbClr val="E8EEFB"/>
+                  <a:srgbClr val="15211E"/>
                 </a:solidFill>
                 <a:latin typeface="Calibri" pitchFamily="34" charset="0"/>
                 <a:ea typeface="Calibri" pitchFamily="34" charset="-122"/>
@@ -5103,7 +5261,7 @@
             <a:r>
               <a:rPr lang="en-US" sz="1400" dirty="0">
                 <a:solidFill>
-                  <a:srgbClr val="8DA0C2"/>
+                  <a:srgbClr val="4F5D58"/>
                 </a:solidFill>
                 <a:latin typeface="Calibri" pitchFamily="34" charset="0"/>
                 <a:ea typeface="Calibri" pitchFamily="34" charset="-122"/>
@@ -5126,27 +5284,20 @@
             <a:off x="8092440" y="3291840"/>
             <a:ext cx="3520440" cy="1737360"/>
           </a:xfrm>
-          <a:prstGeom prst="roundRect">
+          <a:prstGeom prst="rect">
             <a:avLst>
               <a:gd name="adj" fmla="val 5263"/>
             </a:avLst>
           </a:prstGeom>
           <a:solidFill>
-            <a:srgbClr val="111B2F"/>
+            <a:srgbClr val="FAFBF8"/>
           </a:solidFill>
           <a:ln w="9525">
             <a:solidFill>
-              <a:srgbClr val="22314F"/>
+              <a:srgbClr val="CBD2CA"/>
             </a:solidFill>
             <a:prstDash val="solid"/>
           </a:ln>
-          <a:effectLst>
-            <a:outerShdw sx="100000" sy="100000" kx="0" ky="0" algn="bl" rotWithShape="0" blurRad="152400" dist="38100" dir="5400000">
-              <a:srgbClr val="000000">
-                <a:alpha val="35000"/>
-              </a:srgbClr>
-            </a:outerShdw>
-          </a:effectLst>
         </p:spPr>
       </p:sp>
       <p:sp>
@@ -5160,15 +5311,15 @@
             <a:off x="8321040" y="3520440"/>
             <a:ext cx="201168" cy="201168"/>
           </a:xfrm>
-          <a:prstGeom prst="ellipse">
+          <a:prstGeom prst="rect">
             <a:avLst/>
           </a:prstGeom>
           <a:solidFill>
-            <a:srgbClr val="3CC8FF"/>
+            <a:srgbClr val="0B5C7A"/>
           </a:solidFill>
           <a:ln w="12700">
             <a:solidFill>
-              <a:srgbClr val="3CC8FF"/>
+              <a:srgbClr val="0B5C7A"/>
             </a:solidFill>
             <a:prstDash val="solid"/>
           </a:ln>
@@ -5201,7 +5352,7 @@
             <a:r>
               <a:rPr lang="en-US" sz="1800" b="1" dirty="0">
                 <a:solidFill>
-                  <a:srgbClr val="E8EEFB"/>
+                  <a:srgbClr val="15211E"/>
                 </a:solidFill>
                 <a:latin typeface="Calibri" pitchFamily="34" charset="0"/>
                 <a:ea typeface="Calibri" pitchFamily="34" charset="-122"/>
@@ -5243,7 +5394,7 @@
             <a:r>
               <a:rPr lang="en-US" sz="1400" dirty="0">
                 <a:solidFill>
-                  <a:srgbClr val="8DA0C2"/>
+                  <a:srgbClr val="4F5D58"/>
                 </a:solidFill>
                 <a:latin typeface="Calibri" pitchFamily="34" charset="0"/>
                 <a:ea typeface="Calibri" pitchFamily="34" charset="-122"/>
@@ -5266,27 +5417,20 @@
             <a:off x="8092440" y="5212080"/>
             <a:ext cx="3520440" cy="1097280"/>
           </a:xfrm>
-          <a:prstGeom prst="roundRect">
+          <a:prstGeom prst="rect">
             <a:avLst>
               <a:gd name="adj" fmla="val 8333"/>
             </a:avLst>
           </a:prstGeom>
           <a:solidFill>
-            <a:srgbClr val="111B2F"/>
+            <a:srgbClr val="FAFBF8"/>
           </a:solidFill>
           <a:ln w="9525">
             <a:solidFill>
-              <a:srgbClr val="22314F"/>
+              <a:srgbClr val="CBD2CA"/>
             </a:solidFill>
             <a:prstDash val="solid"/>
           </a:ln>
-          <a:effectLst>
-            <a:outerShdw sx="100000" sy="100000" kx="0" ky="0" algn="bl" rotWithShape="0" blurRad="152400" dist="38100" dir="5400000">
-              <a:srgbClr val="000000">
-                <a:alpha val="35000"/>
-              </a:srgbClr>
-            </a:outerShdw>
-          </a:effectLst>
         </p:spPr>
       </p:sp>
       <p:sp>
@@ -5300,15 +5444,15 @@
             <a:off x="8321040" y="5440680"/>
             <a:ext cx="201168" cy="201168"/>
           </a:xfrm>
-          <a:prstGeom prst="ellipse">
+          <a:prstGeom prst="rect">
             <a:avLst/>
           </a:prstGeom>
           <a:solidFill>
-            <a:srgbClr val="B18CFF"/>
+            <a:srgbClr val="6D5BA8"/>
           </a:solidFill>
           <a:ln w="12700">
             <a:solidFill>
-              <a:srgbClr val="B18CFF"/>
+              <a:srgbClr val="6D5BA8"/>
             </a:solidFill>
             <a:prstDash val="solid"/>
           </a:ln>
@@ -5341,7 +5485,7 @@
             <a:r>
               <a:rPr lang="en-US" sz="1600" b="1" dirty="0">
                 <a:solidFill>
-                  <a:srgbClr val="E8EEFB"/>
+                  <a:srgbClr val="15211E"/>
                 </a:solidFill>
                 <a:latin typeface="Calibri" pitchFamily="34" charset="0"/>
                 <a:ea typeface="Calibri" pitchFamily="34" charset="-122"/>
@@ -5383,7 +5527,7 @@
             <a:r>
               <a:rPr lang="en-US" sz="1400" dirty="0">
                 <a:solidFill>
-                  <a:srgbClr val="8DA0C2"/>
+                  <a:srgbClr val="4F5D58"/>
                 </a:solidFill>
                 <a:latin typeface="Calibri" pitchFamily="34" charset="0"/>
                 <a:ea typeface="Calibri" pitchFamily="34" charset="-122"/>
@@ -5425,7 +5569,7 @@
             <a:lvl1pPr>
               <a:defRPr sz="1000">
                 <a:solidFill>
-                  <a:srgbClr val="8DA0C2"/>
+                  <a:srgbClr val="4F5D58"/>
                 </a:solidFill>
                 <a:latin typeface="Calibri"/>
                 <a:ea typeface="Calibri"/>
@@ -5508,30 +5652,23 @@
         </p:nvSpPr>
         <p:spPr>
           <a:xfrm>
-            <a:off x="493776" y="1271016"/>
-            <a:ext cx="7699248" cy="4616006"/>
-          </a:xfrm>
-          <a:prstGeom prst="roundRect">
+            <a:off x="493776" y="1316736"/>
+            <a:ext cx="6784848" cy="4698873"/>
+          </a:xfrm>
+          <a:prstGeom prst="rect">
             <a:avLst>
-              <a:gd name="adj" fmla="val 1189"/>
+              <a:gd name="adj" fmla="val 1168"/>
             </a:avLst>
           </a:prstGeom>
           <a:solidFill>
-            <a:srgbClr val="111B2F"/>
+            <a:srgbClr val="FAFBF8"/>
           </a:solidFill>
           <a:ln w="12700">
             <a:solidFill>
-              <a:srgbClr val="22314F"/>
+              <a:srgbClr val="CBD2CA"/>
             </a:solidFill>
             <a:prstDash val="solid"/>
           </a:ln>
-          <a:effectLst>
-            <a:outerShdw sx="100000" sy="100000" kx="0" ky="0" algn="bl" rotWithShape="0" blurRad="152400" dist="38100" dir="5400000">
-              <a:srgbClr val="000000">
-                <a:alpha val="35000"/>
-              </a:srgbClr>
-            </a:outerShdw>
-          </a:effectLst>
         </p:spPr>
       </p:sp>
       <p:pic>
@@ -5550,8 +5687,8 @@
         </p:blipFill>
         <p:spPr>
           <a:xfrm>
-            <a:off x="548640" y="1325880"/>
-            <a:ext cx="7589520" cy="4506278"/>
+            <a:off x="548640" y="1371600"/>
+            <a:ext cx="6675120" cy="4589145"/>
           </a:xfrm>
           <a:prstGeom prst="rect">
             <a:avLst/>
@@ -5566,8 +5703,8 @@
         </p:nvSpPr>
         <p:spPr>
           <a:xfrm>
-            <a:off x="8458200" y="1417320"/>
-            <a:ext cx="3200400" cy="4114800"/>
+            <a:off x="7680960" y="1417320"/>
+            <a:ext cx="3931920" cy="4114800"/>
           </a:xfrm>
           <a:prstGeom prst="rect">
             <a:avLst/>
@@ -5589,7 +5726,7 @@
             <a:r>
               <a:rPr lang="en-US" sz="1500" dirty="0">
                 <a:solidFill>
-                  <a:srgbClr val="E8EEFB"/>
+                  <a:srgbClr val="15211E"/>
                 </a:solidFill>
                 <a:latin typeface="Calibri" pitchFamily="34" charset="0"/>
                 <a:ea typeface="Calibri" pitchFamily="34" charset="-122"/>
@@ -5610,7 +5747,7 @@
             <a:r>
               <a:rPr lang="en-US" sz="1500" dirty="0">
                 <a:solidFill>
-                  <a:srgbClr val="E8EEFB"/>
+                  <a:srgbClr val="15211E"/>
                 </a:solidFill>
                 <a:latin typeface="Calibri" pitchFamily="34" charset="0"/>
                 <a:ea typeface="Calibri" pitchFamily="34" charset="-122"/>
@@ -5631,7 +5768,7 @@
             <a:r>
               <a:rPr lang="en-US" sz="1500" dirty="0">
                 <a:solidFill>
-                  <a:srgbClr val="E8EEFB"/>
+                  <a:srgbClr val="15211E"/>
                 </a:solidFill>
                 <a:latin typeface="Calibri" pitchFamily="34" charset="0"/>
                 <a:ea typeface="Calibri" pitchFamily="34" charset="-122"/>
@@ -5652,7 +5789,7 @@
             <a:r>
               <a:rPr lang="en-US" sz="1500" dirty="0">
                 <a:solidFill>
-                  <a:srgbClr val="E8EEFB"/>
+                  <a:srgbClr val="15211E"/>
                 </a:solidFill>
                 <a:latin typeface="Calibri" pitchFamily="34" charset="0"/>
                 <a:ea typeface="Calibri" pitchFamily="34" charset="-122"/>
@@ -5694,7 +5831,7 @@
             <a:lvl1pPr>
               <a:defRPr sz="1000">
                 <a:solidFill>
-                  <a:srgbClr val="8DA0C2"/>
+                  <a:srgbClr val="4F5D58"/>
                 </a:solidFill>
                 <a:latin typeface="Calibri"/>
                 <a:ea typeface="Calibri"/>
@@ -5763,7 +5900,7 @@
             </a:pPr>
             <a:r>
               <a:rPr lang="en-US" dirty="0"/>
-              <a:t>Pipeline Lab and situation reports</a:t>
+              <a:t>Pipelines page and situation reports</a:t>
             </a:r>
             <a:endParaRPr lang="en-US" dirty="0"/>
           </a:p>
@@ -5780,27 +5917,20 @@
             <a:off x="493776" y="1316736"/>
             <a:ext cx="5550408" cy="3170111"/>
           </a:xfrm>
-          <a:prstGeom prst="roundRect">
+          <a:prstGeom prst="rect">
             <a:avLst>
               <a:gd name="adj" fmla="val 1731"/>
             </a:avLst>
           </a:prstGeom>
           <a:solidFill>
-            <a:srgbClr val="111B2F"/>
+            <a:srgbClr val="FAFBF8"/>
           </a:solidFill>
           <a:ln w="12700">
             <a:solidFill>
-              <a:srgbClr val="22314F"/>
+              <a:srgbClr val="CBD2CA"/>
             </a:solidFill>
             <a:prstDash val="solid"/>
           </a:ln>
-          <a:effectLst>
-            <a:outerShdw sx="100000" sy="100000" kx="0" ky="0" algn="bl" rotWithShape="0" blurRad="152400" dist="38100" dir="5400000">
-              <a:srgbClr val="000000">
-                <a:alpha val="35000"/>
-              </a:srgbClr>
-            </a:outerShdw>
-          </a:effectLst>
         </p:spPr>
       </p:sp>
       <p:pic>
@@ -5838,27 +5968,20 @@
             <a:off x="6163056" y="1316736"/>
             <a:ext cx="5550408" cy="3170111"/>
           </a:xfrm>
-          <a:prstGeom prst="roundRect">
+          <a:prstGeom prst="rect">
             <a:avLst>
               <a:gd name="adj" fmla="val 1731"/>
             </a:avLst>
           </a:prstGeom>
           <a:solidFill>
-            <a:srgbClr val="111B2F"/>
+            <a:srgbClr val="FAFBF8"/>
           </a:solidFill>
           <a:ln w="12700">
             <a:solidFill>
-              <a:srgbClr val="22314F"/>
+              <a:srgbClr val="CBD2CA"/>
             </a:solidFill>
             <a:prstDash val="solid"/>
           </a:ln>
-          <a:effectLst>
-            <a:outerShdw sx="100000" sy="100000" kx="0" ky="0" algn="bl" rotWithShape="0" blurRad="152400" dist="38100" dir="5400000">
-              <a:srgbClr val="000000">
-                <a:alpha val="35000"/>
-              </a:srgbClr>
-            </a:outerShdw>
-          </a:effectLst>
         </p:spPr>
       </p:sp>
       <p:pic>
@@ -5912,13 +6035,13 @@
             <a:r>
               <a:rPr lang="en-US" sz="1600" b="1" dirty="0">
                 <a:solidFill>
-                  <a:srgbClr val="E8EEFB"/>
+                  <a:srgbClr val="15211E"/>
                 </a:solidFill>
                 <a:latin typeface="Calibri" pitchFamily="34" charset="0"/>
                 <a:ea typeface="Calibri" pitchFamily="34" charset="-122"/>
                 <a:cs typeface="Calibri" pitchFamily="34" charset="-120"/>
               </a:rPr>
-              <a:t>Pipeline Lab: inspect and run every pipeline with timings</a:t>
+              <a:t>Pipelines: inspect and run every aggregation with timings</a:t>
             </a:r>
             <a:endParaRPr lang="en-US" sz="1600" dirty="0"/>
           </a:p>
@@ -5951,7 +6074,7 @@
             <a:r>
               <a:rPr lang="en-US" sz="1600" b="1" dirty="0">
                 <a:solidFill>
-                  <a:srgbClr val="E8EEFB"/>
+                  <a:srgbClr val="15211E"/>
                 </a:solidFill>
                 <a:latin typeface="Calibri" pitchFamily="34" charset="0"/>
                 <a:ea typeface="Calibri" pitchFamily="34" charset="-122"/>
@@ -5993,7 +6116,7 @@
             <a:lvl1pPr>
               <a:defRPr sz="1000">
                 <a:solidFill>
-                  <a:srgbClr val="8DA0C2"/>
+                  <a:srgbClr val="4F5D58"/>
                 </a:solidFill>
                 <a:latin typeface="Calibri"/>
                 <a:ea typeface="Calibri"/>
@@ -6106,7 +6229,7 @@
                       <a:r>
                         <a:rPr lang="en-US" sz="1400" b="1" dirty="0">
                           <a:solidFill>
-                            <a:srgbClr val="3CC8FF"/>
+                            <a:srgbClr val="0B5C7A"/>
                           </a:solidFill>
                           <a:latin typeface="Calibri" pitchFamily="34" charset="0"/>
                           <a:ea typeface="Calibri" pitchFamily="34" charset="-122"/>
@@ -6124,7 +6247,7 @@
                   <a:tcPr marL="109728" marR="109728" marT="0" marB="0" anchor="ctr">
                     <a:lnL w="9525" cap="flat" cmpd="sng" algn="ctr">
                       <a:solidFill>
-                        <a:srgbClr val="22314F"/>
+                        <a:srgbClr val="CBD2CA"/>
                       </a:solidFill>
                       <a:prstDash val="solid"/>
                       <a:round/>
@@ -6133,7 +6256,7 @@
                     </a:lnL>
                     <a:lnR w="9525" cap="flat" cmpd="sng" algn="ctr">
                       <a:solidFill>
-                        <a:srgbClr val="22314F"/>
+                        <a:srgbClr val="CBD2CA"/>
                       </a:solidFill>
                       <a:prstDash val="solid"/>
                       <a:round/>
@@ -6142,7 +6265,7 @@
                     </a:lnR>
                     <a:lnT w="9525" cap="flat" cmpd="sng" algn="ctr">
                       <a:solidFill>
-                        <a:srgbClr val="22314F"/>
+                        <a:srgbClr val="CBD2CA"/>
                       </a:solidFill>
                       <a:prstDash val="solid"/>
                       <a:round/>
@@ -6151,7 +6274,7 @@
                     </a:lnT>
                     <a:lnB w="9525" cap="flat" cmpd="sng" algn="ctr">
                       <a:solidFill>
-                        <a:srgbClr val="22314F"/>
+                        <a:srgbClr val="CBD2CA"/>
                       </a:solidFill>
                       <a:prstDash val="solid"/>
                       <a:round/>
@@ -6159,7 +6282,7 @@
                       <a:tailEnd type="none" w="med" len="med"/>
                     </a:lnB>
                     <a:solidFill>
-                      <a:srgbClr val="16223A"/>
+                      <a:srgbClr val="E6EAE4"/>
                     </a:solidFill>
                   </a:tcPr>
                 </a:tc>
@@ -6174,7 +6297,7 @@
                       <a:r>
                         <a:rPr lang="en-US" sz="1400" b="1" dirty="0">
                           <a:solidFill>
-                            <a:srgbClr val="3CC8FF"/>
+                            <a:srgbClr val="0B5C7A"/>
                           </a:solidFill>
                           <a:latin typeface="Calibri" pitchFamily="34" charset="0"/>
                           <a:ea typeface="Calibri" pitchFamily="34" charset="-122"/>
@@ -6192,7 +6315,7 @@
                   <a:tcPr marL="109728" marR="109728" marT="0" marB="0" anchor="ctr">
                     <a:lnL w="9525" cap="flat" cmpd="sng" algn="ctr">
                       <a:solidFill>
-                        <a:srgbClr val="22314F"/>
+                        <a:srgbClr val="CBD2CA"/>
                       </a:solidFill>
                       <a:prstDash val="solid"/>
                       <a:round/>
@@ -6201,7 +6324,7 @@
                     </a:lnL>
                     <a:lnR w="9525" cap="flat" cmpd="sng" algn="ctr">
                       <a:solidFill>
-                        <a:srgbClr val="22314F"/>
+                        <a:srgbClr val="CBD2CA"/>
                       </a:solidFill>
                       <a:prstDash val="solid"/>
                       <a:round/>
@@ -6210,7 +6333,7 @@
                     </a:lnR>
                     <a:lnT w="9525" cap="flat" cmpd="sng" algn="ctr">
                       <a:solidFill>
-                        <a:srgbClr val="22314F"/>
+                        <a:srgbClr val="CBD2CA"/>
                       </a:solidFill>
                       <a:prstDash val="solid"/>
                       <a:round/>
@@ -6219,7 +6342,7 @@
                     </a:lnT>
                     <a:lnB w="9525" cap="flat" cmpd="sng" algn="ctr">
                       <a:solidFill>
-                        <a:srgbClr val="22314F"/>
+                        <a:srgbClr val="CBD2CA"/>
                       </a:solidFill>
                       <a:prstDash val="solid"/>
                       <a:round/>
@@ -6227,7 +6350,7 @@
                       <a:tailEnd type="none" w="med" len="med"/>
                     </a:lnB>
                     <a:solidFill>
-                      <a:srgbClr val="16223A"/>
+                      <a:srgbClr val="E6EAE4"/>
                     </a:solidFill>
                   </a:tcPr>
                 </a:tc>
@@ -6244,7 +6367,7 @@
                       <a:r>
                         <a:rPr lang="en-US" sz="1400" b="1" dirty="0">
                           <a:solidFill>
-                            <a:srgbClr val="E8EEFB"/>
+                            <a:srgbClr val="15211E"/>
                           </a:solidFill>
                           <a:latin typeface="Calibri" pitchFamily="34" charset="0"/>
                           <a:ea typeface="Calibri" pitchFamily="34" charset="-122"/>
@@ -6262,7 +6385,7 @@
                   <a:tcPr marL="109728" marR="109728" marT="0" marB="0" anchor="ctr">
                     <a:lnL w="9525" cap="flat" cmpd="sng" algn="ctr">
                       <a:solidFill>
-                        <a:srgbClr val="22314F"/>
+                        <a:srgbClr val="CBD2CA"/>
                       </a:solidFill>
                       <a:prstDash val="solid"/>
                       <a:round/>
@@ -6271,7 +6394,7 @@
                     </a:lnL>
                     <a:lnR w="9525" cap="flat" cmpd="sng" algn="ctr">
                       <a:solidFill>
-                        <a:srgbClr val="22314F"/>
+                        <a:srgbClr val="CBD2CA"/>
                       </a:solidFill>
                       <a:prstDash val="solid"/>
                       <a:round/>
@@ -6280,7 +6403,7 @@
                     </a:lnR>
                     <a:lnT w="9525" cap="flat" cmpd="sng" algn="ctr">
                       <a:solidFill>
-                        <a:srgbClr val="22314F"/>
+                        <a:srgbClr val="CBD2CA"/>
                       </a:solidFill>
                       <a:prstDash val="solid"/>
                       <a:round/>
@@ -6289,7 +6412,7 @@
                     </a:lnT>
                     <a:lnB w="9525" cap="flat" cmpd="sng" algn="ctr">
                       <a:solidFill>
-                        <a:srgbClr val="22314F"/>
+                        <a:srgbClr val="CBD2CA"/>
                       </a:solidFill>
                       <a:prstDash val="solid"/>
                       <a:round/>
@@ -6297,7 +6420,7 @@
                       <a:tailEnd type="none" w="med" len="med"/>
                     </a:lnB>
                     <a:solidFill>
-                      <a:srgbClr val="111B2F"/>
+                      <a:srgbClr val="FAFBF8"/>
                     </a:solidFill>
                   </a:tcPr>
                 </a:tc>
@@ -6312,7 +6435,7 @@
                       <a:r>
                         <a:rPr lang="en-US" sz="1400" dirty="0">
                           <a:solidFill>
-                            <a:srgbClr val="E8EEFB"/>
+                            <a:srgbClr val="15211E"/>
                           </a:solidFill>
                           <a:latin typeface="Calibri" pitchFamily="34" charset="0"/>
                           <a:ea typeface="Calibri" pitchFamily="34" charset="-122"/>
@@ -6330,7 +6453,7 @@
                   <a:tcPr marL="109728" marR="109728" marT="0" marB="0" anchor="ctr">
                     <a:lnL w="9525" cap="flat" cmpd="sng" algn="ctr">
                       <a:solidFill>
-                        <a:srgbClr val="22314F"/>
+                        <a:srgbClr val="CBD2CA"/>
                       </a:solidFill>
                       <a:prstDash val="solid"/>
                       <a:round/>
@@ -6339,7 +6462,7 @@
                     </a:lnL>
                     <a:lnR w="9525" cap="flat" cmpd="sng" algn="ctr">
                       <a:solidFill>
-                        <a:srgbClr val="22314F"/>
+                        <a:srgbClr val="CBD2CA"/>
                       </a:solidFill>
                       <a:prstDash val="solid"/>
                       <a:round/>
@@ -6348,7 +6471,7 @@
                     </a:lnR>
                     <a:lnT w="9525" cap="flat" cmpd="sng" algn="ctr">
                       <a:solidFill>
-                        <a:srgbClr val="22314F"/>
+                        <a:srgbClr val="CBD2CA"/>
                       </a:solidFill>
                       <a:prstDash val="solid"/>
                       <a:round/>
@@ -6357,7 +6480,7 @@
                     </a:lnT>
                     <a:lnB w="9525" cap="flat" cmpd="sng" algn="ctr">
                       <a:solidFill>
-                        <a:srgbClr val="22314F"/>
+                        <a:srgbClr val="CBD2CA"/>
                       </a:solidFill>
                       <a:prstDash val="solid"/>
                       <a:round/>
@@ -6365,7 +6488,7 @@
                       <a:tailEnd type="none" w="med" len="med"/>
                     </a:lnB>
                     <a:solidFill>
-                      <a:srgbClr val="111B2F"/>
+                      <a:srgbClr val="FAFBF8"/>
                     </a:solidFill>
                   </a:tcPr>
                 </a:tc>
@@ -6382,7 +6505,7 @@
                       <a:r>
                         <a:rPr lang="en-US" sz="1400" b="1" dirty="0">
                           <a:solidFill>
-                            <a:srgbClr val="E8EEFB"/>
+                            <a:srgbClr val="15211E"/>
                           </a:solidFill>
                           <a:latin typeface="Calibri" pitchFamily="34" charset="0"/>
                           <a:ea typeface="Calibri" pitchFamily="34" charset="-122"/>
@@ -6400,7 +6523,7 @@
                   <a:tcPr marL="109728" marR="109728" marT="0" marB="0" anchor="ctr">
                     <a:lnL w="9525" cap="flat" cmpd="sng" algn="ctr">
                       <a:solidFill>
-                        <a:srgbClr val="22314F"/>
+                        <a:srgbClr val="CBD2CA"/>
                       </a:solidFill>
                       <a:prstDash val="solid"/>
                       <a:round/>
@@ -6409,7 +6532,7 @@
                     </a:lnL>
                     <a:lnR w="9525" cap="flat" cmpd="sng" algn="ctr">
                       <a:solidFill>
-                        <a:srgbClr val="22314F"/>
+                        <a:srgbClr val="CBD2CA"/>
                       </a:solidFill>
                       <a:prstDash val="solid"/>
                       <a:round/>
@@ -6418,7 +6541,7 @@
                     </a:lnR>
                     <a:lnT w="9525" cap="flat" cmpd="sng" algn="ctr">
                       <a:solidFill>
-                        <a:srgbClr val="22314F"/>
+                        <a:srgbClr val="CBD2CA"/>
                       </a:solidFill>
                       <a:prstDash val="solid"/>
                       <a:round/>
@@ -6427,7 +6550,7 @@
                     </a:lnT>
                     <a:lnB w="9525" cap="flat" cmpd="sng" algn="ctr">
                       <a:solidFill>
-                        <a:srgbClr val="22314F"/>
+                        <a:srgbClr val="CBD2CA"/>
                       </a:solidFill>
                       <a:prstDash val="solid"/>
                       <a:round/>
@@ -6435,7 +6558,7 @@
                       <a:tailEnd type="none" w="med" len="med"/>
                     </a:lnB>
                     <a:solidFill>
-                      <a:srgbClr val="111B2F"/>
+                      <a:srgbClr val="FAFBF8"/>
                     </a:solidFill>
                   </a:tcPr>
                 </a:tc>
@@ -6450,7 +6573,7 @@
                       <a:r>
                         <a:rPr lang="en-US" sz="1400" dirty="0">
                           <a:solidFill>
-                            <a:srgbClr val="E8EEFB"/>
+                            <a:srgbClr val="15211E"/>
                           </a:solidFill>
                           <a:latin typeface="Calibri" pitchFamily="34" charset="0"/>
                           <a:ea typeface="Calibri" pitchFamily="34" charset="-122"/>
@@ -6468,7 +6591,7 @@
                   <a:tcPr marL="109728" marR="109728" marT="0" marB="0" anchor="ctr">
                     <a:lnL w="9525" cap="flat" cmpd="sng" algn="ctr">
                       <a:solidFill>
-                        <a:srgbClr val="22314F"/>
+                        <a:srgbClr val="CBD2CA"/>
                       </a:solidFill>
                       <a:prstDash val="solid"/>
                       <a:round/>
@@ -6477,7 +6600,7 @@
                     </a:lnL>
                     <a:lnR w="9525" cap="flat" cmpd="sng" algn="ctr">
                       <a:solidFill>
-                        <a:srgbClr val="22314F"/>
+                        <a:srgbClr val="CBD2CA"/>
                       </a:solidFill>
                       <a:prstDash val="solid"/>
                       <a:round/>
@@ -6486,7 +6609,7 @@
                     </a:lnR>
                     <a:lnT w="9525" cap="flat" cmpd="sng" algn="ctr">
                       <a:solidFill>
-                        <a:srgbClr val="22314F"/>
+                        <a:srgbClr val="CBD2CA"/>
                       </a:solidFill>
                       <a:prstDash val="solid"/>
                       <a:round/>
@@ -6495,7 +6618,7 @@
                     </a:lnT>
                     <a:lnB w="9525" cap="flat" cmpd="sng" algn="ctr">
                       <a:solidFill>
-                        <a:srgbClr val="22314F"/>
+                        <a:srgbClr val="CBD2CA"/>
                       </a:solidFill>
                       <a:prstDash val="solid"/>
                       <a:round/>
@@ -6503,7 +6626,7 @@
                       <a:tailEnd type="none" w="med" len="med"/>
                     </a:lnB>
                     <a:solidFill>
-                      <a:srgbClr val="111B2F"/>
+                      <a:srgbClr val="FAFBF8"/>
                     </a:solidFill>
                   </a:tcPr>
                 </a:tc>
@@ -6520,7 +6643,7 @@
                       <a:r>
                         <a:rPr lang="en-US" sz="1400" b="1" dirty="0">
                           <a:solidFill>
-                            <a:srgbClr val="E8EEFB"/>
+                            <a:srgbClr val="15211E"/>
                           </a:solidFill>
                           <a:latin typeface="Calibri" pitchFamily="34" charset="0"/>
                           <a:ea typeface="Calibri" pitchFamily="34" charset="-122"/>
@@ -6538,7 +6661,7 @@
                   <a:tcPr marL="109728" marR="109728" marT="0" marB="0" anchor="ctr">
                     <a:lnL w="9525" cap="flat" cmpd="sng" algn="ctr">
                       <a:solidFill>
-                        <a:srgbClr val="22314F"/>
+                        <a:srgbClr val="CBD2CA"/>
                       </a:solidFill>
                       <a:prstDash val="solid"/>
                       <a:round/>
@@ -6547,7 +6670,7 @@
                     </a:lnL>
                     <a:lnR w="9525" cap="flat" cmpd="sng" algn="ctr">
                       <a:solidFill>
-                        <a:srgbClr val="22314F"/>
+                        <a:srgbClr val="CBD2CA"/>
                       </a:solidFill>
                       <a:prstDash val="solid"/>
                       <a:round/>
@@ -6556,7 +6679,7 @@
                     </a:lnR>
                     <a:lnT w="9525" cap="flat" cmpd="sng" algn="ctr">
                       <a:solidFill>
-                        <a:srgbClr val="22314F"/>
+                        <a:srgbClr val="CBD2CA"/>
                       </a:solidFill>
                       <a:prstDash val="solid"/>
                       <a:round/>
@@ -6565,7 +6688,7 @@
                     </a:lnT>
                     <a:lnB w="9525" cap="flat" cmpd="sng" algn="ctr">
                       <a:solidFill>
-                        <a:srgbClr val="22314F"/>
+                        <a:srgbClr val="CBD2CA"/>
                       </a:solidFill>
                       <a:prstDash val="solid"/>
                       <a:round/>
@@ -6573,7 +6696,7 @@
                       <a:tailEnd type="none" w="med" len="med"/>
                     </a:lnB>
                     <a:solidFill>
-                      <a:srgbClr val="111B2F"/>
+                      <a:srgbClr val="FAFBF8"/>
                     </a:solidFill>
                   </a:tcPr>
                 </a:tc>
@@ -6588,7 +6711,7 @@
                       <a:r>
                         <a:rPr lang="en-US" sz="1400" dirty="0">
                           <a:solidFill>
-                            <a:srgbClr val="E8EEFB"/>
+                            <a:srgbClr val="15211E"/>
                           </a:solidFill>
                           <a:latin typeface="Calibri" pitchFamily="34" charset="0"/>
                           <a:ea typeface="Calibri" pitchFamily="34" charset="-122"/>
@@ -6606,7 +6729,7 @@
                   <a:tcPr marL="109728" marR="109728" marT="0" marB="0" anchor="ctr">
                     <a:lnL w="9525" cap="flat" cmpd="sng" algn="ctr">
                       <a:solidFill>
-                        <a:srgbClr val="22314F"/>
+                        <a:srgbClr val="CBD2CA"/>
                       </a:solidFill>
                       <a:prstDash val="solid"/>
                       <a:round/>
@@ -6615,7 +6738,7 @@
                     </a:lnL>
                     <a:lnR w="9525" cap="flat" cmpd="sng" algn="ctr">
                       <a:solidFill>
-                        <a:srgbClr val="22314F"/>
+                        <a:srgbClr val="CBD2CA"/>
                       </a:solidFill>
                       <a:prstDash val="solid"/>
                       <a:round/>
@@ -6624,7 +6747,7 @@
                     </a:lnR>
                     <a:lnT w="9525" cap="flat" cmpd="sng" algn="ctr">
                       <a:solidFill>
-                        <a:srgbClr val="22314F"/>
+                        <a:srgbClr val="CBD2CA"/>
                       </a:solidFill>
                       <a:prstDash val="solid"/>
                       <a:round/>
@@ -6633,7 +6756,7 @@
                     </a:lnT>
                     <a:lnB w="9525" cap="flat" cmpd="sng" algn="ctr">
                       <a:solidFill>
-                        <a:srgbClr val="22314F"/>
+                        <a:srgbClr val="CBD2CA"/>
                       </a:solidFill>
                       <a:prstDash val="solid"/>
                       <a:round/>
@@ -6641,7 +6764,7 @@
                       <a:tailEnd type="none" w="med" len="med"/>
                     </a:lnB>
                     <a:solidFill>
-                      <a:srgbClr val="111B2F"/>
+                      <a:srgbClr val="FAFBF8"/>
                     </a:solidFill>
                   </a:tcPr>
                 </a:tc>
@@ -6658,7 +6781,7 @@
                       <a:r>
                         <a:rPr lang="en-US" sz="1400" b="1" dirty="0">
                           <a:solidFill>
-                            <a:srgbClr val="E8EEFB"/>
+                            <a:srgbClr val="15211E"/>
                           </a:solidFill>
                           <a:latin typeface="Calibri" pitchFamily="34" charset="0"/>
                           <a:ea typeface="Calibri" pitchFamily="34" charset="-122"/>
@@ -6676,7 +6799,7 @@
                   <a:tcPr marL="109728" marR="109728" marT="0" marB="0" anchor="ctr">
                     <a:lnL w="9525" cap="flat" cmpd="sng" algn="ctr">
                       <a:solidFill>
-                        <a:srgbClr val="22314F"/>
+                        <a:srgbClr val="CBD2CA"/>
                       </a:solidFill>
                       <a:prstDash val="solid"/>
                       <a:round/>
@@ -6685,7 +6808,7 @@
                     </a:lnL>
                     <a:lnR w="9525" cap="flat" cmpd="sng" algn="ctr">
                       <a:solidFill>
-                        <a:srgbClr val="22314F"/>
+                        <a:srgbClr val="CBD2CA"/>
                       </a:solidFill>
                       <a:prstDash val="solid"/>
                       <a:round/>
@@ -6694,7 +6817,7 @@
                     </a:lnR>
                     <a:lnT w="9525" cap="flat" cmpd="sng" algn="ctr">
                       <a:solidFill>
-                        <a:srgbClr val="22314F"/>
+                        <a:srgbClr val="CBD2CA"/>
                       </a:solidFill>
                       <a:prstDash val="solid"/>
                       <a:round/>
@@ -6703,7 +6826,7 @@
                     </a:lnT>
                     <a:lnB w="9525" cap="flat" cmpd="sng" algn="ctr">
                       <a:solidFill>
-                        <a:srgbClr val="22314F"/>
+                        <a:srgbClr val="CBD2CA"/>
                       </a:solidFill>
                       <a:prstDash val="solid"/>
                       <a:round/>
@@ -6711,7 +6834,7 @@
                       <a:tailEnd type="none" w="med" len="med"/>
                     </a:lnB>
                     <a:solidFill>
-                      <a:srgbClr val="111B2F"/>
+                      <a:srgbClr val="FAFBF8"/>
                     </a:solidFill>
                   </a:tcPr>
                 </a:tc>
@@ -6726,7 +6849,7 @@
                       <a:r>
                         <a:rPr lang="en-US" sz="1400" dirty="0">
                           <a:solidFill>
-                            <a:srgbClr val="E8EEFB"/>
+                            <a:srgbClr val="15211E"/>
                           </a:solidFill>
                           <a:latin typeface="Calibri" pitchFamily="34" charset="0"/>
                           <a:ea typeface="Calibri" pitchFamily="34" charset="-122"/>
@@ -6744,7 +6867,7 @@
                   <a:tcPr marL="109728" marR="109728" marT="0" marB="0" anchor="ctr">
                     <a:lnL w="9525" cap="flat" cmpd="sng" algn="ctr">
                       <a:solidFill>
-                        <a:srgbClr val="22314F"/>
+                        <a:srgbClr val="CBD2CA"/>
                       </a:solidFill>
                       <a:prstDash val="solid"/>
                       <a:round/>
@@ -6753,7 +6876,7 @@
                     </a:lnL>
                     <a:lnR w="9525" cap="flat" cmpd="sng" algn="ctr">
                       <a:solidFill>
-                        <a:srgbClr val="22314F"/>
+                        <a:srgbClr val="CBD2CA"/>
                       </a:solidFill>
                       <a:prstDash val="solid"/>
                       <a:round/>
@@ -6762,7 +6885,7 @@
                     </a:lnR>
                     <a:lnT w="9525" cap="flat" cmpd="sng" algn="ctr">
                       <a:solidFill>
-                        <a:srgbClr val="22314F"/>
+                        <a:srgbClr val="CBD2CA"/>
                       </a:solidFill>
                       <a:prstDash val="solid"/>
                       <a:round/>
@@ -6771,7 +6894,7 @@
                     </a:lnT>
                     <a:lnB w="9525" cap="flat" cmpd="sng" algn="ctr">
                       <a:solidFill>
-                        <a:srgbClr val="22314F"/>
+                        <a:srgbClr val="CBD2CA"/>
                       </a:solidFill>
                       <a:prstDash val="solid"/>
                       <a:round/>
@@ -6779,7 +6902,7 @@
                       <a:tailEnd type="none" w="med" len="med"/>
                     </a:lnB>
                     <a:solidFill>
-                      <a:srgbClr val="111B2F"/>
+                      <a:srgbClr val="FAFBF8"/>
                     </a:solidFill>
                   </a:tcPr>
                 </a:tc>
@@ -6796,7 +6919,7 @@
                       <a:r>
                         <a:rPr lang="en-US" sz="1400" b="1" dirty="0">
                           <a:solidFill>
-                            <a:srgbClr val="E8EEFB"/>
+                            <a:srgbClr val="15211E"/>
                           </a:solidFill>
                           <a:latin typeface="Calibri" pitchFamily="34" charset="0"/>
                           <a:ea typeface="Calibri" pitchFamily="34" charset="-122"/>
@@ -6814,7 +6937,7 @@
                   <a:tcPr marL="109728" marR="109728" marT="0" marB="0" anchor="ctr">
                     <a:lnL w="9525" cap="flat" cmpd="sng" algn="ctr">
                       <a:solidFill>
-                        <a:srgbClr val="22314F"/>
+                        <a:srgbClr val="CBD2CA"/>
                       </a:solidFill>
                       <a:prstDash val="solid"/>
                       <a:round/>
@@ -6823,7 +6946,7 @@
                     </a:lnL>
                     <a:lnR w="9525" cap="flat" cmpd="sng" algn="ctr">
                       <a:solidFill>
-                        <a:srgbClr val="22314F"/>
+                        <a:srgbClr val="CBD2CA"/>
                       </a:solidFill>
                       <a:prstDash val="solid"/>
                       <a:round/>
@@ -6832,7 +6955,7 @@
                     </a:lnR>
                     <a:lnT w="9525" cap="flat" cmpd="sng" algn="ctr">
                       <a:solidFill>
-                        <a:srgbClr val="22314F"/>
+                        <a:srgbClr val="CBD2CA"/>
                       </a:solidFill>
                       <a:prstDash val="solid"/>
                       <a:round/>
@@ -6841,7 +6964,7 @@
                     </a:lnT>
                     <a:lnB w="9525" cap="flat" cmpd="sng" algn="ctr">
                       <a:solidFill>
-                        <a:srgbClr val="22314F"/>
+                        <a:srgbClr val="CBD2CA"/>
                       </a:solidFill>
                       <a:prstDash val="solid"/>
                       <a:round/>
@@ -6849,7 +6972,7 @@
                       <a:tailEnd type="none" w="med" len="med"/>
                     </a:lnB>
                     <a:solidFill>
-                      <a:srgbClr val="111B2F"/>
+                      <a:srgbClr val="FAFBF8"/>
                     </a:solidFill>
                   </a:tcPr>
                 </a:tc>
@@ -6864,7 +6987,7 @@
                       <a:r>
                         <a:rPr lang="en-US" sz="1400" dirty="0">
                           <a:solidFill>
-                            <a:srgbClr val="E8EEFB"/>
+                            <a:srgbClr val="15211E"/>
                           </a:solidFill>
                           <a:latin typeface="Calibri" pitchFamily="34" charset="0"/>
                           <a:ea typeface="Calibri" pitchFamily="34" charset="-122"/>
@@ -6882,7 +7005,7 @@
                   <a:tcPr marL="109728" marR="109728" marT="0" marB="0" anchor="ctr">
                     <a:lnL w="9525" cap="flat" cmpd="sng" algn="ctr">
                       <a:solidFill>
-                        <a:srgbClr val="22314F"/>
+                        <a:srgbClr val="CBD2CA"/>
                       </a:solidFill>
                       <a:prstDash val="solid"/>
                       <a:round/>
@@ -6891,7 +7014,7 @@
                     </a:lnL>
                     <a:lnR w="9525" cap="flat" cmpd="sng" algn="ctr">
                       <a:solidFill>
-                        <a:srgbClr val="22314F"/>
+                        <a:srgbClr val="CBD2CA"/>
                       </a:solidFill>
                       <a:prstDash val="solid"/>
                       <a:round/>
@@ -6900,7 +7023,7 @@
                     </a:lnR>
                     <a:lnT w="9525" cap="flat" cmpd="sng" algn="ctr">
                       <a:solidFill>
-                        <a:srgbClr val="22314F"/>
+                        <a:srgbClr val="CBD2CA"/>
                       </a:solidFill>
                       <a:prstDash val="solid"/>
                       <a:round/>
@@ -6909,7 +7032,7 @@
                     </a:lnT>
                     <a:lnB w="9525" cap="flat" cmpd="sng" algn="ctr">
                       <a:solidFill>
-                        <a:srgbClr val="22314F"/>
+                        <a:srgbClr val="CBD2CA"/>
                       </a:solidFill>
                       <a:prstDash val="solid"/>
                       <a:round/>
@@ -6917,7 +7040,7 @@
                       <a:tailEnd type="none" w="med" len="med"/>
                     </a:lnB>
                     <a:solidFill>
-                      <a:srgbClr val="111B2F"/>
+                      <a:srgbClr val="FAFBF8"/>
                     </a:solidFill>
                   </a:tcPr>
                 </a:tc>
@@ -6934,7 +7057,7 @@
                       <a:r>
                         <a:rPr lang="en-US" sz="1400" b="1" dirty="0">
                           <a:solidFill>
-                            <a:srgbClr val="E8EEFB"/>
+                            <a:srgbClr val="15211E"/>
                           </a:solidFill>
                           <a:latin typeface="Calibri" pitchFamily="34" charset="0"/>
                           <a:ea typeface="Calibri" pitchFamily="34" charset="-122"/>
@@ -6952,7 +7075,7 @@
                   <a:tcPr marL="109728" marR="109728" marT="0" marB="0" anchor="ctr">
                     <a:lnL w="9525" cap="flat" cmpd="sng" algn="ctr">
                       <a:solidFill>
-                        <a:srgbClr val="22314F"/>
+                        <a:srgbClr val="CBD2CA"/>
                       </a:solidFill>
                       <a:prstDash val="solid"/>
                       <a:round/>
@@ -6961,7 +7084,7 @@
                     </a:lnL>
                     <a:lnR w="9525" cap="flat" cmpd="sng" algn="ctr">
                       <a:solidFill>
-                        <a:srgbClr val="22314F"/>
+                        <a:srgbClr val="CBD2CA"/>
                       </a:solidFill>
                       <a:prstDash val="solid"/>
                       <a:round/>
@@ -6970,7 +7093,7 @@
                     </a:lnR>
                     <a:lnT w="9525" cap="flat" cmpd="sng" algn="ctr">
                       <a:solidFill>
-                        <a:srgbClr val="22314F"/>
+                        <a:srgbClr val="CBD2CA"/>
                       </a:solidFill>
                       <a:prstDash val="solid"/>
                       <a:round/>
@@ -6979,7 +7102,7 @@
                     </a:lnT>
                     <a:lnB w="9525" cap="flat" cmpd="sng" algn="ctr">
                       <a:solidFill>
-                        <a:srgbClr val="22314F"/>
+                        <a:srgbClr val="CBD2CA"/>
                       </a:solidFill>
                       <a:prstDash val="solid"/>
                       <a:round/>
@@ -6987,7 +7110,7 @@
                       <a:tailEnd type="none" w="med" len="med"/>
                     </a:lnB>
                     <a:solidFill>
-                      <a:srgbClr val="111B2F"/>
+                      <a:srgbClr val="FAFBF8"/>
                     </a:solidFill>
                   </a:tcPr>
                 </a:tc>
@@ -7002,13 +7125,13 @@
                       <a:r>
                         <a:rPr lang="en-US" sz="1400" dirty="0">
                           <a:solidFill>
-                            <a:srgbClr val="E8EEFB"/>
+                            <a:srgbClr val="15211E"/>
                           </a:solidFill>
                           <a:latin typeface="Calibri" pitchFamily="34" charset="0"/>
                           <a:ea typeface="Calibri" pitchFamily="34" charset="-122"/>
                           <a:cs typeface="Calibri" pitchFamily="34" charset="-120"/>
                         </a:rPr>
-                        <a:t>Analytics page, stored situation reports, printable PDF view</a:t>
+                        <a:t>Analysis page, stored situation reports, printable PDF view</a:t>
                       </a:r>
                       <a:endParaRPr lang="en-US" sz="1400" dirty="0">
                         <a:latin typeface="Calibri" charset="0"/>
@@ -7020,7 +7143,7 @@
                   <a:tcPr marL="109728" marR="109728" marT="0" marB="0" anchor="ctr">
                     <a:lnL w="9525" cap="flat" cmpd="sng" algn="ctr">
                       <a:solidFill>
-                        <a:srgbClr val="22314F"/>
+                        <a:srgbClr val="CBD2CA"/>
                       </a:solidFill>
                       <a:prstDash val="solid"/>
                       <a:round/>
@@ -7029,7 +7152,7 @@
                     </a:lnL>
                     <a:lnR w="9525" cap="flat" cmpd="sng" algn="ctr">
                       <a:solidFill>
-                        <a:srgbClr val="22314F"/>
+                        <a:srgbClr val="CBD2CA"/>
                       </a:solidFill>
                       <a:prstDash val="solid"/>
                       <a:round/>
@@ -7038,7 +7161,7 @@
                     </a:lnR>
                     <a:lnT w="9525" cap="flat" cmpd="sng" algn="ctr">
                       <a:solidFill>
-                        <a:srgbClr val="22314F"/>
+                        <a:srgbClr val="CBD2CA"/>
                       </a:solidFill>
                       <a:prstDash val="solid"/>
                       <a:round/>
@@ -7047,7 +7170,7 @@
                     </a:lnT>
                     <a:lnB w="9525" cap="flat" cmpd="sng" algn="ctr">
                       <a:solidFill>
-                        <a:srgbClr val="22314F"/>
+                        <a:srgbClr val="CBD2CA"/>
                       </a:solidFill>
                       <a:prstDash val="solid"/>
                       <a:round/>
@@ -7055,7 +7178,7 @@
                       <a:tailEnd type="none" w="med" len="med"/>
                     </a:lnB>
                     <a:solidFill>
-                      <a:srgbClr val="111B2F"/>
+                      <a:srgbClr val="FAFBF8"/>
                     </a:solidFill>
                   </a:tcPr>
                 </a:tc>
@@ -7091,7 +7214,7 @@
             <a:r>
               <a:rPr lang="en-US" sz="1600" dirty="0">
                 <a:solidFill>
-                  <a:srgbClr val="8DA0C2"/>
+                  <a:srgbClr val="4F5D58"/>
                 </a:solidFill>
                 <a:latin typeface="Calibri" pitchFamily="34" charset="0"/>
                 <a:ea typeface="Calibri" pitchFamily="34" charset="-122"/>
@@ -7133,7 +7256,7 @@
             <a:lvl1pPr>
               <a:defRPr sz="1000">
                 <a:solidFill>
-                  <a:srgbClr val="8DA0C2"/>
+                  <a:srgbClr val="4F5D58"/>
                 </a:solidFill>
                 <a:latin typeface="Calibri"/>
                 <a:ea typeface="Calibri"/>
@@ -7267,7 +7390,7 @@
             <a:r>
               <a:rPr lang="en-US" sz="1400" dirty="0">
                 <a:solidFill>
-                  <a:srgbClr val="8DA0C2"/>
+                  <a:srgbClr val="4F5D58"/>
                 </a:solidFill>
                 <a:latin typeface="Calibri" pitchFamily="34" charset="0"/>
                 <a:ea typeface="Calibri" pitchFamily="34" charset="-122"/>
@@ -7309,7 +7432,7 @@
             <a:lvl1pPr>
               <a:defRPr sz="1000">
                 <a:solidFill>
-                  <a:srgbClr val="8DA0C2"/>
+                  <a:srgbClr val="4F5D58"/>
                 </a:solidFill>
                 <a:latin typeface="Calibri"/>
                 <a:ea typeface="Calibri"/>
@@ -7395,27 +7518,20 @@
             <a:off x="548640" y="1371600"/>
             <a:ext cx="5486400" cy="4754880"/>
           </a:xfrm>
-          <a:prstGeom prst="roundRect">
+          <a:prstGeom prst="rect">
             <a:avLst>
               <a:gd name="adj" fmla="val 1923"/>
             </a:avLst>
           </a:prstGeom>
           <a:solidFill>
-            <a:srgbClr val="111B2F"/>
+            <a:srgbClr val="FAFBF8"/>
           </a:solidFill>
           <a:ln w="9525">
             <a:solidFill>
-              <a:srgbClr val="22314F"/>
+              <a:srgbClr val="CBD2CA"/>
             </a:solidFill>
             <a:prstDash val="solid"/>
           </a:ln>
-          <a:effectLst>
-            <a:outerShdw sx="100000" sy="100000" kx="0" ky="0" algn="bl" rotWithShape="0" blurRad="152400" dist="38100" dir="5400000">
-              <a:srgbClr val="000000">
-                <a:alpha val="35000"/>
-              </a:srgbClr>
-            </a:outerShdw>
-          </a:effectLst>
         </p:spPr>
       </p:sp>
       <p:sp>
@@ -7445,7 +7561,7 @@
             <a:r>
               <a:rPr lang="en-US" sz="2200" b="1" dirty="0">
                 <a:solidFill>
-                  <a:srgbClr val="3DDC97"/>
+                  <a:srgbClr val="5B8A8F"/>
                 </a:solidFill>
                 <a:latin typeface="Calibri" pitchFamily="34" charset="0"/>
                 <a:ea typeface="Calibri" pitchFamily="34" charset="-122"/>
@@ -7488,7 +7604,7 @@
             <a:r>
               <a:rPr lang="en-US" sz="1500" dirty="0">
                 <a:solidFill>
-                  <a:srgbClr val="E8EEFB"/>
+                  <a:srgbClr val="15211E"/>
                 </a:solidFill>
                 <a:latin typeface="Calibri" pitchFamily="34" charset="0"/>
                 <a:ea typeface="Calibri" pitchFamily="34" charset="-122"/>
@@ -7509,7 +7625,7 @@
             <a:r>
               <a:rPr lang="en-US" sz="1500" dirty="0">
                 <a:solidFill>
-                  <a:srgbClr val="E8EEFB"/>
+                  <a:srgbClr val="15211E"/>
                 </a:solidFill>
                 <a:latin typeface="Calibri" pitchFamily="34" charset="0"/>
                 <a:ea typeface="Calibri" pitchFamily="34" charset="-122"/>
@@ -7530,7 +7646,7 @@
             <a:r>
               <a:rPr lang="en-US" sz="1500" dirty="0">
                 <a:solidFill>
-                  <a:srgbClr val="E8EEFB"/>
+                  <a:srgbClr val="15211E"/>
                 </a:solidFill>
                 <a:latin typeface="Calibri" pitchFamily="34" charset="0"/>
                 <a:ea typeface="Calibri" pitchFamily="34" charset="-122"/>
@@ -7551,7 +7667,7 @@
             <a:r>
               <a:rPr lang="en-US" sz="1500" dirty="0">
                 <a:solidFill>
-                  <a:srgbClr val="E8EEFB"/>
+                  <a:srgbClr val="15211E"/>
                 </a:solidFill>
                 <a:latin typeface="Calibri" pitchFamily="34" charset="0"/>
                 <a:ea typeface="Calibri" pitchFamily="34" charset="-122"/>
@@ -7572,7 +7688,7 @@
             <a:r>
               <a:rPr lang="en-US" sz="1500" dirty="0">
                 <a:solidFill>
-                  <a:srgbClr val="E8EEFB"/>
+                  <a:srgbClr val="15211E"/>
                 </a:solidFill>
                 <a:latin typeface="Calibri" pitchFamily="34" charset="0"/>
                 <a:ea typeface="Calibri" pitchFamily="34" charset="-122"/>
@@ -7593,13 +7709,13 @@
             <a:r>
               <a:rPr lang="en-US" sz="1500" dirty="0">
                 <a:solidFill>
-                  <a:srgbClr val="E8EEFB"/>
+                  <a:srgbClr val="15211E"/>
                 </a:solidFill>
                 <a:latin typeface="Calibri" pitchFamily="34" charset="0"/>
                 <a:ea typeface="Calibri" pitchFamily="34" charset="-122"/>
                 <a:cs typeface="Calibri" pitchFamily="34" charset="-120"/>
               </a:rPr>
-              <a:t>Pipeline Lab showing every query</a:t>
+              <a:t>Pipelines page showing every query</a:t>
             </a:r>
             <a:endParaRPr lang="en-US" sz="1500" dirty="0"/>
           </a:p>
@@ -7616,27 +7732,20 @@
             <a:off x="6217920" y="1371600"/>
             <a:ext cx="5394960" cy="4754880"/>
           </a:xfrm>
-          <a:prstGeom prst="roundRect">
+          <a:prstGeom prst="rect">
             <a:avLst>
               <a:gd name="adj" fmla="val 1923"/>
             </a:avLst>
           </a:prstGeom>
           <a:solidFill>
-            <a:srgbClr val="111B2F"/>
+            <a:srgbClr val="FAFBF8"/>
           </a:solidFill>
           <a:ln w="9525">
             <a:solidFill>
-              <a:srgbClr val="22314F"/>
+              <a:srgbClr val="CBD2CA"/>
             </a:solidFill>
             <a:prstDash val="solid"/>
           </a:ln>
-          <a:effectLst>
-            <a:outerShdw sx="100000" sy="100000" kx="0" ky="0" algn="bl" rotWithShape="0" blurRad="152400" dist="38100" dir="5400000">
-              <a:srgbClr val="000000">
-                <a:alpha val="35000"/>
-              </a:srgbClr>
-            </a:outerShdw>
-          </a:effectLst>
         </p:spPr>
       </p:sp>
       <p:sp>
@@ -7666,7 +7775,7 @@
             <a:r>
               <a:rPr lang="en-US" sz="2200" b="1" dirty="0">
                 <a:solidFill>
-                  <a:srgbClr val="3CC8FF"/>
+                  <a:srgbClr val="0B5C7A"/>
                 </a:solidFill>
                 <a:latin typeface="Calibri" pitchFamily="34" charset="0"/>
                 <a:ea typeface="Calibri" pitchFamily="34" charset="-122"/>
@@ -7709,7 +7818,7 @@
             <a:r>
               <a:rPr lang="en-US" sz="1500" dirty="0">
                 <a:solidFill>
-                  <a:srgbClr val="E8EEFB"/>
+                  <a:srgbClr val="15211E"/>
                 </a:solidFill>
                 <a:latin typeface="Calibri" pitchFamily="34" charset="0"/>
                 <a:ea typeface="Calibri" pitchFamily="34" charset="-122"/>
@@ -7730,7 +7839,7 @@
             <a:r>
               <a:rPr lang="en-US" sz="1500" dirty="0">
                 <a:solidFill>
-                  <a:srgbClr val="E8EEFB"/>
+                  <a:srgbClr val="15211E"/>
                 </a:solidFill>
                 <a:latin typeface="Calibri" pitchFamily="34" charset="0"/>
                 <a:ea typeface="Calibri" pitchFamily="34" charset="-122"/>
@@ -7751,7 +7860,7 @@
             <a:r>
               <a:rPr lang="en-US" sz="1500" dirty="0">
                 <a:solidFill>
-                  <a:srgbClr val="E8EEFB"/>
+                  <a:srgbClr val="15211E"/>
                 </a:solidFill>
                 <a:latin typeface="Calibri" pitchFamily="34" charset="0"/>
                 <a:ea typeface="Calibri" pitchFamily="34" charset="-122"/>
@@ -7772,7 +7881,7 @@
             <a:r>
               <a:rPr lang="en-US" sz="1500" dirty="0">
                 <a:solidFill>
-                  <a:srgbClr val="E8EEFB"/>
+                  <a:srgbClr val="15211E"/>
                 </a:solidFill>
                 <a:latin typeface="Calibri" pitchFamily="34" charset="0"/>
                 <a:ea typeface="Calibri" pitchFamily="34" charset="-122"/>
@@ -7793,7 +7902,7 @@
             <a:r>
               <a:rPr lang="en-US" sz="1500" dirty="0">
                 <a:solidFill>
-                  <a:srgbClr val="E8EEFB"/>
+                  <a:srgbClr val="15211E"/>
                 </a:solidFill>
                 <a:latin typeface="Calibri" pitchFamily="34" charset="0"/>
                 <a:ea typeface="Calibri" pitchFamily="34" charset="-122"/>
@@ -7835,7 +7944,7 @@
             <a:lvl1pPr>
               <a:defRPr sz="1000">
                 <a:solidFill>
-                  <a:srgbClr val="8DA0C2"/>
+                  <a:srgbClr val="4F5D58"/>
                 </a:solidFill>
                 <a:latin typeface="Calibri"/>
                 <a:ea typeface="Calibri"/>
@@ -7905,51 +8014,51 @@
             <a:r>
               <a:rPr lang="en-US" sz="6000" b="1" dirty="0">
                 <a:solidFill>
-                  <a:srgbClr val="E8EEFB"/>
+                  <a:srgbClr val="15211E"/>
+                </a:solidFill>
+                <a:latin typeface="Cambria" pitchFamily="34" charset="0"/>
+                <a:ea typeface="Cambria" pitchFamily="34" charset="-122"/>
+                <a:cs typeface="Cambria" pitchFamily="34" charset="-120"/>
+              </a:rPr>
+              <a:t>Thank you</a:t>
+            </a:r>
+            <a:endParaRPr lang="en-US" sz="6000" dirty="0"/>
+          </a:p>
+        </p:txBody>
+      </p:sp>
+      <p:sp>
+        <p:nvSpPr>
+          <p:cNvPr id="3" name="Text 1"/>
+          <p:cNvSpPr txBox="1"/>
+          <p:nvPr/>
+        </p:nvSpPr>
+        <p:spPr>
+          <a:xfrm>
+            <a:off x="640080" y="2194560"/>
+            <a:ext cx="10972800" cy="731520"/>
+          </a:xfrm>
+          <a:prstGeom prst="rect">
+            <a:avLst/>
+          </a:prstGeom>
+          <a:noFill/>
+          <a:ln/>
+        </p:spPr>
+        <p:txBody>
+          <a:bodyPr wrap="square" lIns="0" tIns="0" rIns="0" bIns="0" rtlCol="0" anchor="ctr"/>
+          <a:lstStyle/>
+          <a:p>
+            <a:pPr indent="0" marL="0">
+              <a:buNone/>
+            </a:pPr>
+            <a:r>
+              <a:rPr lang="en-US" sz="3000" dirty="0">
+                <a:solidFill>
+                  <a:srgbClr val="0B5C7A"/>
                 </a:solidFill>
                 <a:latin typeface="Calibri" pitchFamily="34" charset="0"/>
                 <a:ea typeface="Calibri" pitchFamily="34" charset="-122"/>
                 <a:cs typeface="Calibri" pitchFamily="34" charset="-120"/>
               </a:rPr>
-              <a:t>Thank you</a:t>
-            </a:r>
-            <a:endParaRPr lang="en-US" sz="6000" dirty="0"/>
-          </a:p>
-        </p:txBody>
-      </p:sp>
-      <p:sp>
-        <p:nvSpPr>
-          <p:cNvPr id="3" name="Text 1"/>
-          <p:cNvSpPr txBox="1"/>
-          <p:nvPr/>
-        </p:nvSpPr>
-        <p:spPr>
-          <a:xfrm>
-            <a:off x="640080" y="2194560"/>
-            <a:ext cx="10972800" cy="731520"/>
-          </a:xfrm>
-          <a:prstGeom prst="rect">
-            <a:avLst/>
-          </a:prstGeom>
-          <a:noFill/>
-          <a:ln/>
-        </p:spPr>
-        <p:txBody>
-          <a:bodyPr wrap="square" lIns="0" tIns="0" rIns="0" bIns="0" rtlCol="0" anchor="ctr"/>
-          <a:lstStyle/>
-          <a:p>
-            <a:pPr indent="0" marL="0">
-              <a:buNone/>
-            </a:pPr>
-            <a:r>
-              <a:rPr lang="en-US" sz="3000" dirty="0">
-                <a:solidFill>
-                  <a:srgbClr val="3CC8FF"/>
-                </a:solidFill>
-                <a:latin typeface="Calibri" pitchFamily="34" charset="0"/>
-                <a:ea typeface="Calibri" pitchFamily="34" charset="-122"/>
-                <a:cs typeface="Calibri" pitchFamily="34" charset="-120"/>
-              </a:rPr>
               <a:t>Questions?</a:t>
             </a:r>
             <a:endParaRPr lang="en-US" sz="3000" dirty="0"/>
@@ -7967,27 +8076,20 @@
             <a:off x="640080" y="3474720"/>
             <a:ext cx="7498080" cy="1554480"/>
           </a:xfrm>
-          <a:prstGeom prst="roundRect">
+          <a:prstGeom prst="rect">
             <a:avLst>
               <a:gd name="adj" fmla="val 5882"/>
             </a:avLst>
           </a:prstGeom>
           <a:solidFill>
-            <a:srgbClr val="111B2F"/>
+            <a:srgbClr val="FAFBF8"/>
           </a:solidFill>
           <a:ln w="9525">
             <a:solidFill>
-              <a:srgbClr val="22314F"/>
+              <a:srgbClr val="CBD2CA"/>
             </a:solidFill>
             <a:prstDash val="solid"/>
           </a:ln>
-          <a:effectLst>
-            <a:outerShdw sx="100000" sy="100000" kx="0" ky="0" algn="bl" rotWithShape="0" blurRad="152400" dist="38100" dir="5400000">
-              <a:srgbClr val="000000">
-                <a:alpha val="35000"/>
-              </a:srgbClr>
-            </a:outerShdw>
-          </a:effectLst>
         </p:spPr>
       </p:sp>
       <p:sp>
@@ -8017,7 +8119,7 @@
             <a:r>
               <a:rPr lang="en-US" sz="1600" dirty="0">
                 <a:solidFill>
-                  <a:srgbClr val="8DA0C2"/>
+                  <a:srgbClr val="4F5D58"/>
                 </a:solidFill>
                 <a:latin typeface="Calibri" pitchFamily="34" charset="0"/>
                 <a:ea typeface="Calibri" pitchFamily="34" charset="-122"/>
@@ -8058,7 +8160,7 @@
             <a:r>
               <a:rPr lang="en-US" sz="2400" b="1" u="sng" dirty="0">
                 <a:solidFill>
-                  <a:srgbClr val="3CC8FF"/>
+                  <a:srgbClr val="0B5C7A"/>
                 </a:solidFill>
                 <a:latin typeface="Calibri" pitchFamily="34" charset="0"/>
                 <a:ea typeface="Calibri" pitchFamily="34" charset="-122"/>
@@ -8104,7 +8206,7 @@
             <a:r>
               <a:rPr lang="en-US" sz="1400" dirty="0">
                 <a:solidFill>
-                  <a:srgbClr val="8DA0C2"/>
+                  <a:srgbClr val="4F5D58"/>
                 </a:solidFill>
                 <a:latin typeface="Calibri" pitchFamily="34" charset="0"/>
                 <a:ea typeface="Calibri" pitchFamily="34" charset="-122"/>
@@ -8143,7 +8245,7 @@
             <a:r>
               <a:rPr lang="en-US" sz="1400" dirty="0">
                 <a:solidFill>
-                  <a:srgbClr val="8DA0C2"/>
+                  <a:srgbClr val="4F5D58"/>
                 </a:solidFill>
                 <a:latin typeface="Nirmala UI" pitchFamily="34" charset="0"/>
                 <a:ea typeface="Nirmala UI" pitchFamily="34" charset="-122"/>
@@ -8239,51 +8341,51 @@
             <a:r>
               <a:rPr lang="en-US" sz="2600" dirty="0">
                 <a:solidFill>
-                  <a:srgbClr val="E8EEFB"/>
+                  <a:srgbClr val="15211E"/>
+                </a:solidFill>
+                <a:latin typeface="Cambria" pitchFamily="34" charset="0"/>
+                <a:ea typeface="Cambria" pitchFamily="34" charset="-122"/>
+                <a:cs typeface="Cambria" pitchFamily="34" charset="-120"/>
+              </a:rPr>
+              <a:t>A few hours of delay in spotting heavy rainfall or a rising river can decide how an emergency response ends.</a:t>
+            </a:r>
+            <a:endParaRPr lang="en-US" sz="2600" dirty="0"/>
+          </a:p>
+        </p:txBody>
+      </p:sp>
+      <p:sp>
+        <p:nvSpPr>
+          <p:cNvPr id="5" name="Text 2"/>
+          <p:cNvSpPr txBox="1"/>
+          <p:nvPr/>
+        </p:nvSpPr>
+        <p:spPr>
+          <a:xfrm>
+            <a:off x="548640" y="3931920"/>
+            <a:ext cx="4480560" cy="1097280"/>
+          </a:xfrm>
+          <a:prstGeom prst="rect">
+            <a:avLst/>
+          </a:prstGeom>
+          <a:noFill/>
+          <a:ln/>
+        </p:spPr>
+        <p:txBody>
+          <a:bodyPr wrap="square" lIns="0" tIns="0" rIns="0" bIns="0" rtlCol="0" anchor="t"/>
+          <a:lstStyle/>
+          <a:p>
+            <a:pPr indent="0" marL="0">
+              <a:buNone/>
+            </a:pPr>
+            <a:r>
+              <a:rPr lang="en-US" sz="1600" dirty="0">
+                <a:solidFill>
+                  <a:srgbClr val="4F5D58"/>
                 </a:solidFill>
                 <a:latin typeface="Calibri" pitchFamily="34" charset="0"/>
                 <a:ea typeface="Calibri" pitchFamily="34" charset="-122"/>
                 <a:cs typeface="Calibri" pitchFamily="34" charset="-120"/>
               </a:rPr>
-              <a:t>A few hours of delay in spotting heavy rainfall or a rising river can decide how an emergency response ends.</a:t>
-            </a:r>
-            <a:endParaRPr lang="en-US" sz="2600" dirty="0"/>
-          </a:p>
-        </p:txBody>
-      </p:sp>
-      <p:sp>
-        <p:nvSpPr>
-          <p:cNvPr id="5" name="Text 2"/>
-          <p:cNvSpPr txBox="1"/>
-          <p:nvPr/>
-        </p:nvSpPr>
-        <p:spPr>
-          <a:xfrm>
-            <a:off x="548640" y="3931920"/>
-            <a:ext cx="4480560" cy="1097280"/>
-          </a:xfrm>
-          <a:prstGeom prst="rect">
-            <a:avLst/>
-          </a:prstGeom>
-          <a:noFill/>
-          <a:ln/>
-        </p:spPr>
-        <p:txBody>
-          <a:bodyPr wrap="square" lIns="0" tIns="0" rIns="0" bIns="0" rtlCol="0" anchor="t"/>
-          <a:lstStyle/>
-          <a:p>
-            <a:pPr indent="0" marL="0">
-              <a:buNone/>
-            </a:pPr>
-            <a:r>
-              <a:rPr lang="en-US" sz="1600" dirty="0">
-                <a:solidFill>
-                  <a:srgbClr val="8DA0C2"/>
-                </a:solidFill>
-                <a:latin typeface="Calibri" pitchFamily="34" charset="0"/>
-                <a:ea typeface="Calibri" pitchFamily="34" charset="-122"/>
-                <a:cs typeface="Calibri" pitchFamily="34" charset="-120"/>
-              </a:rPr>
               <a:t>Rising urbanisation and unpredictable climate patterns make early detection harder every year.</a:t>
             </a:r>
             <a:endParaRPr lang="en-US" sz="1600" dirty="0"/>
@@ -8301,27 +8403,20 @@
             <a:off x="5486400" y="1371600"/>
             <a:ext cx="6126480" cy="1463040"/>
           </a:xfrm>
-          <a:prstGeom prst="roundRect">
+          <a:prstGeom prst="rect">
             <a:avLst>
               <a:gd name="adj" fmla="val 6250"/>
             </a:avLst>
           </a:prstGeom>
           <a:solidFill>
-            <a:srgbClr val="111B2F"/>
+            <a:srgbClr val="FAFBF8"/>
           </a:solidFill>
           <a:ln w="9525">
             <a:solidFill>
-              <a:srgbClr val="22314F"/>
+              <a:srgbClr val="CBD2CA"/>
             </a:solidFill>
             <a:prstDash val="solid"/>
           </a:ln>
-          <a:effectLst>
-            <a:outerShdw sx="100000" sy="100000" kx="0" ky="0" algn="bl" rotWithShape="0" blurRad="152400" dist="38100" dir="5400000">
-              <a:srgbClr val="000000">
-                <a:alpha val="35000"/>
-              </a:srgbClr>
-            </a:outerShdw>
-          </a:effectLst>
         </p:spPr>
       </p:sp>
       <p:sp>
@@ -8335,15 +8430,15 @@
             <a:off x="5715000" y="1600200"/>
             <a:ext cx="201168" cy="201168"/>
           </a:xfrm>
-          <a:prstGeom prst="ellipse">
+          <a:prstGeom prst="rect">
             <a:avLst/>
           </a:prstGeom>
           <a:solidFill>
-            <a:srgbClr val="FF3B5C"/>
+            <a:srgbClr val="A3102E"/>
           </a:solidFill>
           <a:ln w="12700">
             <a:solidFill>
-              <a:srgbClr val="FF3B5C"/>
+              <a:srgbClr val="A3102E"/>
             </a:solidFill>
             <a:prstDash val="solid"/>
           </a:ln>
@@ -8376,7 +8471,7 @@
             <a:r>
               <a:rPr lang="en-US" sz="1800" b="1" dirty="0">
                 <a:solidFill>
-                  <a:srgbClr val="E8EEFB"/>
+                  <a:srgbClr val="15211E"/>
                 </a:solidFill>
                 <a:latin typeface="Calibri" pitchFamily="34" charset="0"/>
                 <a:ea typeface="Calibri" pitchFamily="34" charset="-122"/>
@@ -8418,7 +8513,7 @@
             <a:r>
               <a:rPr lang="en-US" sz="1400" dirty="0">
                 <a:solidFill>
-                  <a:srgbClr val="8DA0C2"/>
+                  <a:srgbClr val="4F5D58"/>
                 </a:solidFill>
                 <a:latin typeface="Calibri" pitchFamily="34" charset="0"/>
                 <a:ea typeface="Calibri" pitchFamily="34" charset="-122"/>
@@ -8441,27 +8536,20 @@
             <a:off x="5486400" y="3017520"/>
             <a:ext cx="6126480" cy="1463040"/>
           </a:xfrm>
-          <a:prstGeom prst="roundRect">
+          <a:prstGeom prst="rect">
             <a:avLst>
               <a:gd name="adj" fmla="val 6250"/>
             </a:avLst>
           </a:prstGeom>
           <a:solidFill>
-            <a:srgbClr val="111B2F"/>
+            <a:srgbClr val="FAFBF8"/>
           </a:solidFill>
           <a:ln w="9525">
             <a:solidFill>
-              <a:srgbClr val="22314F"/>
+              <a:srgbClr val="CBD2CA"/>
             </a:solidFill>
             <a:prstDash val="solid"/>
           </a:ln>
-          <a:effectLst>
-            <a:outerShdw sx="100000" sy="100000" kx="0" ky="0" algn="bl" rotWithShape="0" blurRad="152400" dist="38100" dir="5400000">
-              <a:srgbClr val="000000">
-                <a:alpha val="35000"/>
-              </a:srgbClr>
-            </a:outerShdw>
-          </a:effectLst>
         </p:spPr>
       </p:sp>
       <p:sp>
@@ -8475,15 +8563,15 @@
             <a:off x="5715000" y="3246120"/>
             <a:ext cx="201168" cy="201168"/>
           </a:xfrm>
-          <a:prstGeom prst="ellipse">
+          <a:prstGeom prst="rect">
             <a:avLst/>
           </a:prstGeom>
           <a:solidFill>
-            <a:srgbClr val="FF8A3D"/>
+            <a:srgbClr val="D1561F"/>
           </a:solidFill>
           <a:ln w="12700">
             <a:solidFill>
-              <a:srgbClr val="FF8A3D"/>
+              <a:srgbClr val="D1561F"/>
             </a:solidFill>
             <a:prstDash val="solid"/>
           </a:ln>
@@ -8516,7 +8604,7 @@
             <a:r>
               <a:rPr lang="en-US" sz="1800" b="1" dirty="0">
                 <a:solidFill>
-                  <a:srgbClr val="E8EEFB"/>
+                  <a:srgbClr val="15211E"/>
                 </a:solidFill>
                 <a:latin typeface="Calibri" pitchFamily="34" charset="0"/>
                 <a:ea typeface="Calibri" pitchFamily="34" charset="-122"/>
@@ -8558,7 +8646,7 @@
             <a:r>
               <a:rPr lang="en-US" sz="1400" dirty="0">
                 <a:solidFill>
-                  <a:srgbClr val="8DA0C2"/>
+                  <a:srgbClr val="4F5D58"/>
                 </a:solidFill>
                 <a:latin typeface="Calibri" pitchFamily="34" charset="0"/>
                 <a:ea typeface="Calibri" pitchFamily="34" charset="-122"/>
@@ -8581,27 +8669,20 @@
             <a:off x="5486400" y="4663440"/>
             <a:ext cx="6126480" cy="1463040"/>
           </a:xfrm>
-          <a:prstGeom prst="roundRect">
+          <a:prstGeom prst="rect">
             <a:avLst>
               <a:gd name="adj" fmla="val 6250"/>
             </a:avLst>
           </a:prstGeom>
           <a:solidFill>
-            <a:srgbClr val="111B2F"/>
+            <a:srgbClr val="FAFBF8"/>
           </a:solidFill>
           <a:ln w="9525">
             <a:solidFill>
-              <a:srgbClr val="22314F"/>
+              <a:srgbClr val="CBD2CA"/>
             </a:solidFill>
             <a:prstDash val="solid"/>
           </a:ln>
-          <a:effectLst>
-            <a:outerShdw sx="100000" sy="100000" kx="0" ky="0" algn="bl" rotWithShape="0" blurRad="152400" dist="38100" dir="5400000">
-              <a:srgbClr val="000000">
-                <a:alpha val="35000"/>
-              </a:srgbClr>
-            </a:outerShdw>
-          </a:effectLst>
         </p:spPr>
       </p:sp>
       <p:sp>
@@ -8615,15 +8696,15 @@
             <a:off x="5715000" y="4892040"/>
             <a:ext cx="201168" cy="201168"/>
           </a:xfrm>
-          <a:prstGeom prst="ellipse">
+          <a:prstGeom prst="rect">
             <a:avLst/>
           </a:prstGeom>
           <a:solidFill>
-            <a:srgbClr val="3CC8FF"/>
+            <a:srgbClr val="0B5C7A"/>
           </a:solidFill>
           <a:ln w="12700">
             <a:solidFill>
-              <a:srgbClr val="3CC8FF"/>
+              <a:srgbClr val="0B5C7A"/>
             </a:solidFill>
             <a:prstDash val="solid"/>
           </a:ln>
@@ -8656,7 +8737,7 @@
             <a:r>
               <a:rPr lang="en-US" sz="1800" b="1" dirty="0">
                 <a:solidFill>
-                  <a:srgbClr val="E8EEFB"/>
+                  <a:srgbClr val="15211E"/>
                 </a:solidFill>
                 <a:latin typeface="Calibri" pitchFamily="34" charset="0"/>
                 <a:ea typeface="Calibri" pitchFamily="34" charset="-122"/>
@@ -8698,7 +8779,7 @@
             <a:r>
               <a:rPr lang="en-US" sz="1400" dirty="0">
                 <a:solidFill>
-                  <a:srgbClr val="8DA0C2"/>
+                  <a:srgbClr val="4F5D58"/>
                 </a:solidFill>
                 <a:latin typeface="Calibri" pitchFamily="34" charset="0"/>
                 <a:ea typeface="Calibri" pitchFamily="34" charset="-122"/>
@@ -8740,7 +8821,7 @@
             <a:lvl1pPr>
               <a:defRPr sz="1000">
                 <a:solidFill>
-                  <a:srgbClr val="8DA0C2"/>
+                  <a:srgbClr val="4F5D58"/>
                 </a:solidFill>
                 <a:latin typeface="Calibri"/>
                 <a:ea typeface="Calibri"/>
@@ -8826,27 +8907,20 @@
             <a:off x="548640" y="1371600"/>
             <a:ext cx="11064240" cy="822960"/>
           </a:xfrm>
-          <a:prstGeom prst="roundRect">
+          <a:prstGeom prst="rect">
             <a:avLst>
               <a:gd name="adj" fmla="val 11111"/>
             </a:avLst>
           </a:prstGeom>
           <a:solidFill>
-            <a:srgbClr val="111B2F"/>
+            <a:srgbClr val="FAFBF8"/>
           </a:solidFill>
           <a:ln w="9525">
             <a:solidFill>
-              <a:srgbClr val="22314F"/>
+              <a:srgbClr val="CBD2CA"/>
             </a:solidFill>
             <a:prstDash val="solid"/>
           </a:ln>
-          <a:effectLst>
-            <a:outerShdw sx="100000" sy="100000" kx="0" ky="0" algn="bl" rotWithShape="0" blurRad="152400" dist="38100" dir="5400000">
-              <a:srgbClr val="000000">
-                <a:alpha val="35000"/>
-              </a:srgbClr>
-            </a:outerShdw>
-          </a:effectLst>
         </p:spPr>
       </p:sp>
       <p:sp>
@@ -8860,15 +8934,15 @@
             <a:off x="731520" y="1554480"/>
             <a:ext cx="457200" cy="457200"/>
           </a:xfrm>
-          <a:prstGeom prst="ellipse">
+          <a:prstGeom prst="rect">
             <a:avLst/>
           </a:prstGeom>
           <a:solidFill>
-            <a:srgbClr val="3CC8FF"/>
+            <a:srgbClr val="0B5C7A"/>
           </a:solidFill>
           <a:ln w="12700">
             <a:solidFill>
-              <a:srgbClr val="3CC8FF"/>
+              <a:srgbClr val="0B5C7A"/>
             </a:solidFill>
             <a:prstDash val="solid"/>
           </a:ln>
@@ -8901,7 +8975,7 @@
             <a:r>
               <a:rPr lang="en-US" sz="1600" b="1" dirty="0">
                 <a:solidFill>
-                  <a:srgbClr val="0A101D"/>
+                  <a:srgbClr val="FFFFFF"/>
                 </a:solidFill>
                 <a:latin typeface="Calibri" pitchFamily="34" charset="0"/>
                 <a:ea typeface="Calibri" pitchFamily="34" charset="-122"/>
@@ -8940,7 +9014,7 @@
             <a:r>
               <a:rPr lang="en-US" sz="1800" b="1" dirty="0">
                 <a:solidFill>
-                  <a:srgbClr val="E8EEFB"/>
+                  <a:srgbClr val="15211E"/>
                 </a:solidFill>
                 <a:latin typeface="Calibri" pitchFamily="34" charset="0"/>
                 <a:ea typeface="Calibri" pitchFamily="34" charset="-122"/>
@@ -8979,7 +9053,7 @@
             <a:r>
               <a:rPr lang="en-US" sz="1500" dirty="0">
                 <a:solidFill>
-                  <a:srgbClr val="8DA0C2"/>
+                  <a:srgbClr val="4F5D58"/>
                 </a:solidFill>
                 <a:latin typeface="Calibri" pitchFamily="34" charset="0"/>
                 <a:ea typeface="Calibri" pitchFamily="34" charset="-122"/>
@@ -9002,27 +9076,20 @@
             <a:off x="548640" y="2331720"/>
             <a:ext cx="11064240" cy="822960"/>
           </a:xfrm>
-          <a:prstGeom prst="roundRect">
+          <a:prstGeom prst="rect">
             <a:avLst>
               <a:gd name="adj" fmla="val 11111"/>
             </a:avLst>
           </a:prstGeom>
           <a:solidFill>
-            <a:srgbClr val="111B2F"/>
+            <a:srgbClr val="FAFBF8"/>
           </a:solidFill>
           <a:ln w="9525">
             <a:solidFill>
-              <a:srgbClr val="22314F"/>
+              <a:srgbClr val="CBD2CA"/>
             </a:solidFill>
             <a:prstDash val="solid"/>
           </a:ln>
-          <a:effectLst>
-            <a:outerShdw sx="100000" sy="100000" kx="0" ky="0" algn="bl" rotWithShape="0" blurRad="152400" dist="38100" dir="5400000">
-              <a:srgbClr val="000000">
-                <a:alpha val="35000"/>
-              </a:srgbClr>
-            </a:outerShdw>
-          </a:effectLst>
         </p:spPr>
       </p:sp>
       <p:sp>
@@ -9036,15 +9103,15 @@
             <a:off x="731520" y="2514600"/>
             <a:ext cx="457200" cy="457200"/>
           </a:xfrm>
-          <a:prstGeom prst="ellipse">
+          <a:prstGeom prst="rect">
             <a:avLst/>
           </a:prstGeom>
           <a:solidFill>
-            <a:srgbClr val="3CC8FF"/>
+            <a:srgbClr val="0B5C7A"/>
           </a:solidFill>
           <a:ln w="12700">
             <a:solidFill>
-              <a:srgbClr val="3CC8FF"/>
+              <a:srgbClr val="0B5C7A"/>
             </a:solidFill>
             <a:prstDash val="solid"/>
           </a:ln>
@@ -9077,7 +9144,7 @@
             <a:r>
               <a:rPr lang="en-US" sz="1600" b="1" dirty="0">
                 <a:solidFill>
-                  <a:srgbClr val="0A101D"/>
+                  <a:srgbClr val="FFFFFF"/>
                 </a:solidFill>
                 <a:latin typeface="Calibri" pitchFamily="34" charset="0"/>
                 <a:ea typeface="Calibri" pitchFamily="34" charset="-122"/>
@@ -9116,7 +9183,7 @@
             <a:r>
               <a:rPr lang="en-US" sz="1800" b="1" dirty="0">
                 <a:solidFill>
-                  <a:srgbClr val="E8EEFB"/>
+                  <a:srgbClr val="15211E"/>
                 </a:solidFill>
                 <a:latin typeface="Calibri" pitchFamily="34" charset="0"/>
                 <a:ea typeface="Calibri" pitchFamily="34" charset="-122"/>
@@ -9155,7 +9222,7 @@
             <a:r>
               <a:rPr lang="en-US" sz="1500" dirty="0">
                 <a:solidFill>
-                  <a:srgbClr val="8DA0C2"/>
+                  <a:srgbClr val="4F5D58"/>
                 </a:solidFill>
                 <a:latin typeface="Calibri" pitchFamily="34" charset="0"/>
                 <a:ea typeface="Calibri" pitchFamily="34" charset="-122"/>
@@ -9178,27 +9245,20 @@
             <a:off x="548640" y="3291840"/>
             <a:ext cx="11064240" cy="822960"/>
           </a:xfrm>
-          <a:prstGeom prst="roundRect">
+          <a:prstGeom prst="rect">
             <a:avLst>
               <a:gd name="adj" fmla="val 11111"/>
             </a:avLst>
           </a:prstGeom>
           <a:solidFill>
-            <a:srgbClr val="111B2F"/>
+            <a:srgbClr val="FAFBF8"/>
           </a:solidFill>
           <a:ln w="9525">
             <a:solidFill>
-              <a:srgbClr val="22314F"/>
+              <a:srgbClr val="CBD2CA"/>
             </a:solidFill>
             <a:prstDash val="solid"/>
           </a:ln>
-          <a:effectLst>
-            <a:outerShdw sx="100000" sy="100000" kx="0" ky="0" algn="bl" rotWithShape="0" blurRad="152400" dist="38100" dir="5400000">
-              <a:srgbClr val="000000">
-                <a:alpha val="35000"/>
-              </a:srgbClr>
-            </a:outerShdw>
-          </a:effectLst>
         </p:spPr>
       </p:sp>
       <p:sp>
@@ -9212,15 +9272,15 @@
             <a:off x="731520" y="3474720"/>
             <a:ext cx="457200" cy="457200"/>
           </a:xfrm>
-          <a:prstGeom prst="ellipse">
+          <a:prstGeom prst="rect">
             <a:avLst/>
           </a:prstGeom>
           <a:solidFill>
-            <a:srgbClr val="3CC8FF"/>
+            <a:srgbClr val="0B5C7A"/>
           </a:solidFill>
           <a:ln w="12700">
             <a:solidFill>
-              <a:srgbClr val="3CC8FF"/>
+              <a:srgbClr val="0B5C7A"/>
             </a:solidFill>
             <a:prstDash val="solid"/>
           </a:ln>
@@ -9253,7 +9313,7 @@
             <a:r>
               <a:rPr lang="en-US" sz="1600" b="1" dirty="0">
                 <a:solidFill>
-                  <a:srgbClr val="0A101D"/>
+                  <a:srgbClr val="FFFFFF"/>
                 </a:solidFill>
                 <a:latin typeface="Calibri" pitchFamily="34" charset="0"/>
                 <a:ea typeface="Calibri" pitchFamily="34" charset="-122"/>
@@ -9292,7 +9352,7 @@
             <a:r>
               <a:rPr lang="en-US" sz="1800" b="1" dirty="0">
                 <a:solidFill>
-                  <a:srgbClr val="E8EEFB"/>
+                  <a:srgbClr val="15211E"/>
                 </a:solidFill>
                 <a:latin typeface="Calibri" pitchFamily="34" charset="0"/>
                 <a:ea typeface="Calibri" pitchFamily="34" charset="-122"/>
@@ -9331,7 +9391,7 @@
             <a:r>
               <a:rPr lang="en-US" sz="1500" dirty="0">
                 <a:solidFill>
-                  <a:srgbClr val="8DA0C2"/>
+                  <a:srgbClr val="4F5D58"/>
                 </a:solidFill>
                 <a:latin typeface="Calibri" pitchFamily="34" charset="0"/>
                 <a:ea typeface="Calibri" pitchFamily="34" charset="-122"/>
@@ -9354,27 +9414,20 @@
             <a:off x="548640" y="4251960"/>
             <a:ext cx="11064240" cy="822960"/>
           </a:xfrm>
-          <a:prstGeom prst="roundRect">
+          <a:prstGeom prst="rect">
             <a:avLst>
               <a:gd name="adj" fmla="val 11111"/>
             </a:avLst>
           </a:prstGeom>
           <a:solidFill>
-            <a:srgbClr val="111B2F"/>
+            <a:srgbClr val="FAFBF8"/>
           </a:solidFill>
           <a:ln w="9525">
             <a:solidFill>
-              <a:srgbClr val="22314F"/>
+              <a:srgbClr val="CBD2CA"/>
             </a:solidFill>
             <a:prstDash val="solid"/>
           </a:ln>
-          <a:effectLst>
-            <a:outerShdw sx="100000" sy="100000" kx="0" ky="0" algn="bl" rotWithShape="0" blurRad="152400" dist="38100" dir="5400000">
-              <a:srgbClr val="000000">
-                <a:alpha val="35000"/>
-              </a:srgbClr>
-            </a:outerShdw>
-          </a:effectLst>
         </p:spPr>
       </p:sp>
       <p:sp>
@@ -9388,15 +9441,15 @@
             <a:off x="731520" y="4434840"/>
             <a:ext cx="457200" cy="457200"/>
           </a:xfrm>
-          <a:prstGeom prst="ellipse">
+          <a:prstGeom prst="rect">
             <a:avLst/>
           </a:prstGeom>
           <a:solidFill>
-            <a:srgbClr val="3CC8FF"/>
+            <a:srgbClr val="0B5C7A"/>
           </a:solidFill>
           <a:ln w="12700">
             <a:solidFill>
-              <a:srgbClr val="3CC8FF"/>
+              <a:srgbClr val="0B5C7A"/>
             </a:solidFill>
             <a:prstDash val="solid"/>
           </a:ln>
@@ -9429,7 +9482,7 @@
             <a:r>
               <a:rPr lang="en-US" sz="1600" b="1" dirty="0">
                 <a:solidFill>
-                  <a:srgbClr val="0A101D"/>
+                  <a:srgbClr val="FFFFFF"/>
                 </a:solidFill>
                 <a:latin typeface="Calibri" pitchFamily="34" charset="0"/>
                 <a:ea typeface="Calibri" pitchFamily="34" charset="-122"/>
@@ -9468,7 +9521,7 @@
             <a:r>
               <a:rPr lang="en-US" sz="1800" b="1" dirty="0">
                 <a:solidFill>
-                  <a:srgbClr val="E8EEFB"/>
+                  <a:srgbClr val="15211E"/>
                 </a:solidFill>
                 <a:latin typeface="Calibri" pitchFamily="34" charset="0"/>
                 <a:ea typeface="Calibri" pitchFamily="34" charset="-122"/>
@@ -9507,7 +9560,7 @@
             <a:r>
               <a:rPr lang="en-US" sz="1500" dirty="0">
                 <a:solidFill>
-                  <a:srgbClr val="8DA0C2"/>
+                  <a:srgbClr val="4F5D58"/>
                 </a:solidFill>
                 <a:latin typeface="Calibri" pitchFamily="34" charset="0"/>
                 <a:ea typeface="Calibri" pitchFamily="34" charset="-122"/>
@@ -9530,27 +9583,20 @@
             <a:off x="548640" y="5212080"/>
             <a:ext cx="11064240" cy="822960"/>
           </a:xfrm>
-          <a:prstGeom prst="roundRect">
+          <a:prstGeom prst="rect">
             <a:avLst>
               <a:gd name="adj" fmla="val 11111"/>
             </a:avLst>
           </a:prstGeom>
           <a:solidFill>
-            <a:srgbClr val="111B2F"/>
+            <a:srgbClr val="FAFBF8"/>
           </a:solidFill>
           <a:ln w="9525">
             <a:solidFill>
-              <a:srgbClr val="22314F"/>
+              <a:srgbClr val="CBD2CA"/>
             </a:solidFill>
             <a:prstDash val="solid"/>
           </a:ln>
-          <a:effectLst>
-            <a:outerShdw sx="100000" sy="100000" kx="0" ky="0" algn="bl" rotWithShape="0" blurRad="152400" dist="38100" dir="5400000">
-              <a:srgbClr val="000000">
-                <a:alpha val="35000"/>
-              </a:srgbClr>
-            </a:outerShdw>
-          </a:effectLst>
         </p:spPr>
       </p:sp>
       <p:sp>
@@ -9564,15 +9610,15 @@
             <a:off x="731520" y="5394960"/>
             <a:ext cx="457200" cy="457200"/>
           </a:xfrm>
-          <a:prstGeom prst="ellipse">
+          <a:prstGeom prst="rect">
             <a:avLst/>
           </a:prstGeom>
           <a:solidFill>
-            <a:srgbClr val="3CC8FF"/>
+            <a:srgbClr val="0B5C7A"/>
           </a:solidFill>
           <a:ln w="12700">
             <a:solidFill>
-              <a:srgbClr val="3CC8FF"/>
+              <a:srgbClr val="0B5C7A"/>
             </a:solidFill>
             <a:prstDash val="solid"/>
           </a:ln>
@@ -9605,7 +9651,7 @@
             <a:r>
               <a:rPr lang="en-US" sz="1600" b="1" dirty="0">
                 <a:solidFill>
-                  <a:srgbClr val="0A101D"/>
+                  <a:srgbClr val="FFFFFF"/>
                 </a:solidFill>
                 <a:latin typeface="Calibri" pitchFamily="34" charset="0"/>
                 <a:ea typeface="Calibri" pitchFamily="34" charset="-122"/>
@@ -9644,7 +9690,7 @@
             <a:r>
               <a:rPr lang="en-US" sz="1800" b="1" dirty="0">
                 <a:solidFill>
-                  <a:srgbClr val="E8EEFB"/>
+                  <a:srgbClr val="15211E"/>
                 </a:solidFill>
                 <a:latin typeface="Calibri" pitchFamily="34" charset="0"/>
                 <a:ea typeface="Calibri" pitchFamily="34" charset="-122"/>
@@ -9683,7 +9729,7 @@
             <a:r>
               <a:rPr lang="en-US" sz="1500" dirty="0">
                 <a:solidFill>
-                  <a:srgbClr val="8DA0C2"/>
+                  <a:srgbClr val="4F5D58"/>
                 </a:solidFill>
                 <a:latin typeface="Calibri" pitchFamily="34" charset="0"/>
                 <a:ea typeface="Calibri" pitchFamily="34" charset="-122"/>
@@ -9725,7 +9771,7 @@
             <a:lvl1pPr>
               <a:defRPr sz="1000">
                 <a:solidFill>
-                  <a:srgbClr val="8DA0C2"/>
+                  <a:srgbClr val="4F5D58"/>
                 </a:solidFill>
                 <a:latin typeface="Calibri"/>
                 <a:ea typeface="Calibri"/>
@@ -9811,27 +9857,20 @@
             <a:off x="548640" y="1371600"/>
             <a:ext cx="3566160" cy="2286000"/>
           </a:xfrm>
-          <a:prstGeom prst="roundRect">
+          <a:prstGeom prst="rect">
             <a:avLst>
               <a:gd name="adj" fmla="val 4000"/>
             </a:avLst>
           </a:prstGeom>
           <a:solidFill>
-            <a:srgbClr val="111B2F"/>
+            <a:srgbClr val="FAFBF8"/>
           </a:solidFill>
           <a:ln w="9525">
             <a:solidFill>
-              <a:srgbClr val="22314F"/>
+              <a:srgbClr val="CBD2CA"/>
             </a:solidFill>
             <a:prstDash val="solid"/>
           </a:ln>
-          <a:effectLst>
-            <a:outerShdw sx="100000" sy="100000" kx="0" ky="0" algn="bl" rotWithShape="0" blurRad="152400" dist="38100" dir="5400000">
-              <a:srgbClr val="000000">
-                <a:alpha val="35000"/>
-              </a:srgbClr>
-            </a:outerShdw>
-          </a:effectLst>
         </p:spPr>
       </p:sp>
       <p:sp>
@@ -9845,15 +9884,15 @@
             <a:off x="777240" y="1600200"/>
             <a:ext cx="201168" cy="201168"/>
           </a:xfrm>
-          <a:prstGeom prst="ellipse">
+          <a:prstGeom prst="rect">
             <a:avLst/>
           </a:prstGeom>
           <a:solidFill>
-            <a:srgbClr val="3CC8FF"/>
+            <a:srgbClr val="0B5C7A"/>
           </a:solidFill>
           <a:ln w="12700">
             <a:solidFill>
-              <a:srgbClr val="3CC8FF"/>
+              <a:srgbClr val="0B5C7A"/>
             </a:solidFill>
             <a:prstDash val="solid"/>
           </a:ln>
@@ -9886,7 +9925,7 @@
             <a:r>
               <a:rPr lang="en-US" sz="2000" b="1" dirty="0">
                 <a:solidFill>
-                  <a:srgbClr val="E8EEFB"/>
+                  <a:srgbClr val="15211E"/>
                 </a:solidFill>
                 <a:latin typeface="Calibri" pitchFamily="34" charset="0"/>
                 <a:ea typeface="Calibri" pitchFamily="34" charset="-122"/>
@@ -9928,7 +9967,7 @@
             <a:r>
               <a:rPr lang="en-US" sz="1600" dirty="0">
                 <a:solidFill>
-                  <a:srgbClr val="8DA0C2"/>
+                  <a:srgbClr val="4F5D58"/>
                 </a:solidFill>
                 <a:latin typeface="Calibri" pitchFamily="34" charset="0"/>
                 <a:ea typeface="Calibri" pitchFamily="34" charset="-122"/>
@@ -9951,27 +9990,20 @@
             <a:off x="4297680" y="1371600"/>
             <a:ext cx="3566160" cy="2286000"/>
           </a:xfrm>
-          <a:prstGeom prst="roundRect">
+          <a:prstGeom prst="rect">
             <a:avLst>
               <a:gd name="adj" fmla="val 4000"/>
             </a:avLst>
           </a:prstGeom>
           <a:solidFill>
-            <a:srgbClr val="111B2F"/>
+            <a:srgbClr val="FAFBF8"/>
           </a:solidFill>
           <a:ln w="9525">
             <a:solidFill>
-              <a:srgbClr val="22314F"/>
+              <a:srgbClr val="CBD2CA"/>
             </a:solidFill>
             <a:prstDash val="solid"/>
           </a:ln>
-          <a:effectLst>
-            <a:outerShdw sx="100000" sy="100000" kx="0" ky="0" algn="bl" rotWithShape="0" blurRad="152400" dist="38100" dir="5400000">
-              <a:srgbClr val="000000">
-                <a:alpha val="35000"/>
-              </a:srgbClr>
-            </a:outerShdw>
-          </a:effectLst>
         </p:spPr>
       </p:sp>
       <p:sp>
@@ -9985,15 +10017,15 @@
             <a:off x="4526280" y="1600200"/>
             <a:ext cx="201168" cy="201168"/>
           </a:xfrm>
-          <a:prstGeom prst="ellipse">
+          <a:prstGeom prst="rect">
             <a:avLst/>
           </a:prstGeom>
           <a:solidFill>
-            <a:srgbClr val="B18CFF"/>
+            <a:srgbClr val="6D5BA8"/>
           </a:solidFill>
           <a:ln w="12700">
             <a:solidFill>
-              <a:srgbClr val="B18CFF"/>
+              <a:srgbClr val="6D5BA8"/>
             </a:solidFill>
             <a:prstDash val="solid"/>
           </a:ln>
@@ -10026,7 +10058,7 @@
             <a:r>
               <a:rPr lang="en-US" sz="2000" b="1" dirty="0">
                 <a:solidFill>
-                  <a:srgbClr val="E8EEFB"/>
+                  <a:srgbClr val="15211E"/>
                 </a:solidFill>
                 <a:latin typeface="Calibri" pitchFamily="34" charset="0"/>
                 <a:ea typeface="Calibri" pitchFamily="34" charset="-122"/>
@@ -10068,7 +10100,7 @@
             <a:r>
               <a:rPr lang="en-US" sz="1600" dirty="0">
                 <a:solidFill>
-                  <a:srgbClr val="8DA0C2"/>
+                  <a:srgbClr val="4F5D58"/>
                 </a:solidFill>
                 <a:latin typeface="Calibri" pitchFamily="34" charset="0"/>
                 <a:ea typeface="Calibri" pitchFamily="34" charset="-122"/>
@@ -10091,27 +10123,20 @@
             <a:off x="8046720" y="1371600"/>
             <a:ext cx="3566160" cy="2286000"/>
           </a:xfrm>
-          <a:prstGeom prst="roundRect">
+          <a:prstGeom prst="rect">
             <a:avLst>
               <a:gd name="adj" fmla="val 4000"/>
             </a:avLst>
           </a:prstGeom>
           <a:solidFill>
-            <a:srgbClr val="111B2F"/>
+            <a:srgbClr val="FAFBF8"/>
           </a:solidFill>
           <a:ln w="9525">
             <a:solidFill>
-              <a:srgbClr val="22314F"/>
+              <a:srgbClr val="CBD2CA"/>
             </a:solidFill>
             <a:prstDash val="solid"/>
           </a:ln>
-          <a:effectLst>
-            <a:outerShdw sx="100000" sy="100000" kx="0" ky="0" algn="bl" rotWithShape="0" blurRad="152400" dist="38100" dir="5400000">
-              <a:srgbClr val="000000">
-                <a:alpha val="35000"/>
-              </a:srgbClr>
-            </a:outerShdw>
-          </a:effectLst>
         </p:spPr>
       </p:sp>
       <p:sp>
@@ -10125,15 +10150,15 @@
             <a:off x="8275320" y="1600200"/>
             <a:ext cx="201168" cy="201168"/>
           </a:xfrm>
-          <a:prstGeom prst="ellipse">
+          <a:prstGeom prst="rect">
             <a:avLst/>
           </a:prstGeom>
           <a:solidFill>
-            <a:srgbClr val="3DDC97"/>
+            <a:srgbClr val="5B8A8F"/>
           </a:solidFill>
           <a:ln w="12700">
             <a:solidFill>
-              <a:srgbClr val="3DDC97"/>
+              <a:srgbClr val="5B8A8F"/>
             </a:solidFill>
             <a:prstDash val="solid"/>
           </a:ln>
@@ -10166,7 +10191,7 @@
             <a:r>
               <a:rPr lang="en-US" sz="2000" b="1" dirty="0">
                 <a:solidFill>
-                  <a:srgbClr val="E8EEFB"/>
+                  <a:srgbClr val="15211E"/>
                 </a:solidFill>
                 <a:latin typeface="Calibri" pitchFamily="34" charset="0"/>
                 <a:ea typeface="Calibri" pitchFamily="34" charset="-122"/>
@@ -10208,7 +10233,7 @@
             <a:r>
               <a:rPr lang="en-US" sz="1600" dirty="0">
                 <a:solidFill>
-                  <a:srgbClr val="8DA0C2"/>
+                  <a:srgbClr val="4F5D58"/>
                 </a:solidFill>
                 <a:latin typeface="Calibri" pitchFamily="34" charset="0"/>
                 <a:ea typeface="Calibri" pitchFamily="34" charset="-122"/>
@@ -10231,27 +10256,20 @@
             <a:off x="548640" y="3840480"/>
             <a:ext cx="3566160" cy="2286000"/>
           </a:xfrm>
-          <a:prstGeom prst="roundRect">
+          <a:prstGeom prst="rect">
             <a:avLst>
               <a:gd name="adj" fmla="val 4000"/>
             </a:avLst>
           </a:prstGeom>
           <a:solidFill>
-            <a:srgbClr val="111B2F"/>
+            <a:srgbClr val="FAFBF8"/>
           </a:solidFill>
           <a:ln w="9525">
             <a:solidFill>
-              <a:srgbClr val="22314F"/>
+              <a:srgbClr val="CBD2CA"/>
             </a:solidFill>
             <a:prstDash val="solid"/>
           </a:ln>
-          <a:effectLst>
-            <a:outerShdw sx="100000" sy="100000" kx="0" ky="0" algn="bl" rotWithShape="0" blurRad="152400" dist="38100" dir="5400000">
-              <a:srgbClr val="000000">
-                <a:alpha val="35000"/>
-              </a:srgbClr>
-            </a:outerShdw>
-          </a:effectLst>
         </p:spPr>
       </p:sp>
       <p:sp>
@@ -10265,15 +10283,15 @@
             <a:off x="777240" y="4069080"/>
             <a:ext cx="201168" cy="201168"/>
           </a:xfrm>
-          <a:prstGeom prst="ellipse">
+          <a:prstGeom prst="rect">
             <a:avLst/>
           </a:prstGeom>
           <a:solidFill>
-            <a:srgbClr val="FF8A3D"/>
+            <a:srgbClr val="D1561F"/>
           </a:solidFill>
           <a:ln w="12700">
             <a:solidFill>
-              <a:srgbClr val="FF8A3D"/>
+              <a:srgbClr val="D1561F"/>
             </a:solidFill>
             <a:prstDash val="solid"/>
           </a:ln>
@@ -10306,7 +10324,7 @@
             <a:r>
               <a:rPr lang="en-US" sz="2000" b="1" dirty="0">
                 <a:solidFill>
-                  <a:srgbClr val="E8EEFB"/>
+                  <a:srgbClr val="15211E"/>
                 </a:solidFill>
                 <a:latin typeface="Calibri" pitchFamily="34" charset="0"/>
                 <a:ea typeface="Calibri" pitchFamily="34" charset="-122"/>
@@ -10348,7 +10366,7 @@
             <a:r>
               <a:rPr lang="en-US" sz="1600" dirty="0">
                 <a:solidFill>
-                  <a:srgbClr val="8DA0C2"/>
+                  <a:srgbClr val="4F5D58"/>
                 </a:solidFill>
                 <a:latin typeface="Calibri" pitchFamily="34" charset="0"/>
                 <a:ea typeface="Calibri" pitchFamily="34" charset="-122"/>
@@ -10371,27 +10389,20 @@
             <a:off x="4297680" y="3840480"/>
             <a:ext cx="3566160" cy="2286000"/>
           </a:xfrm>
-          <a:prstGeom prst="roundRect">
+          <a:prstGeom prst="rect">
             <a:avLst>
               <a:gd name="adj" fmla="val 4000"/>
             </a:avLst>
           </a:prstGeom>
           <a:solidFill>
-            <a:srgbClr val="111B2F"/>
+            <a:srgbClr val="FAFBF8"/>
           </a:solidFill>
           <a:ln w="9525">
             <a:solidFill>
-              <a:srgbClr val="22314F"/>
+              <a:srgbClr val="CBD2CA"/>
             </a:solidFill>
             <a:prstDash val="solid"/>
           </a:ln>
-          <a:effectLst>
-            <a:outerShdw sx="100000" sy="100000" kx="0" ky="0" algn="bl" rotWithShape="0" blurRad="152400" dist="38100" dir="5400000">
-              <a:srgbClr val="000000">
-                <a:alpha val="35000"/>
-              </a:srgbClr>
-            </a:outerShdw>
-          </a:effectLst>
         </p:spPr>
       </p:sp>
       <p:sp>
@@ -10405,15 +10416,15 @@
             <a:off x="4526280" y="4069080"/>
             <a:ext cx="201168" cy="201168"/>
           </a:xfrm>
-          <a:prstGeom prst="ellipse">
+          <a:prstGeom prst="rect">
             <a:avLst/>
           </a:prstGeom>
           <a:solidFill>
-            <a:srgbClr val="FF3B5C"/>
+            <a:srgbClr val="A3102E"/>
           </a:solidFill>
           <a:ln w="12700">
             <a:solidFill>
-              <a:srgbClr val="FF3B5C"/>
+              <a:srgbClr val="A3102E"/>
             </a:solidFill>
             <a:prstDash val="solid"/>
           </a:ln>
@@ -10446,7 +10457,7 @@
             <a:r>
               <a:rPr lang="en-US" sz="2000" b="1" dirty="0">
                 <a:solidFill>
-                  <a:srgbClr val="E8EEFB"/>
+                  <a:srgbClr val="15211E"/>
                 </a:solidFill>
                 <a:latin typeface="Calibri" pitchFamily="34" charset="0"/>
                 <a:ea typeface="Calibri" pitchFamily="34" charset="-122"/>
@@ -10488,7 +10499,7 @@
             <a:r>
               <a:rPr lang="en-US" sz="1600" dirty="0">
                 <a:solidFill>
-                  <a:srgbClr val="8DA0C2"/>
+                  <a:srgbClr val="4F5D58"/>
                 </a:solidFill>
                 <a:latin typeface="Calibri" pitchFamily="34" charset="0"/>
                 <a:ea typeface="Calibri" pitchFamily="34" charset="-122"/>
@@ -10511,27 +10522,20 @@
             <a:off x="8046720" y="3840480"/>
             <a:ext cx="3566160" cy="2286000"/>
           </a:xfrm>
-          <a:prstGeom prst="roundRect">
+          <a:prstGeom prst="rect">
             <a:avLst>
               <a:gd name="adj" fmla="val 4000"/>
             </a:avLst>
           </a:prstGeom>
           <a:solidFill>
-            <a:srgbClr val="111B2F"/>
+            <a:srgbClr val="FAFBF8"/>
           </a:solidFill>
           <a:ln w="9525">
             <a:solidFill>
-              <a:srgbClr val="22314F"/>
+              <a:srgbClr val="CBD2CA"/>
             </a:solidFill>
             <a:prstDash val="solid"/>
           </a:ln>
-          <a:effectLst>
-            <a:outerShdw sx="100000" sy="100000" kx="0" ky="0" algn="bl" rotWithShape="0" blurRad="152400" dist="38100" dir="5400000">
-              <a:srgbClr val="000000">
-                <a:alpha val="35000"/>
-              </a:srgbClr>
-            </a:outerShdw>
-          </a:effectLst>
         </p:spPr>
       </p:sp>
       <p:sp>
@@ -10545,15 +10549,15 @@
             <a:off x="8275320" y="4069080"/>
             <a:ext cx="201168" cy="201168"/>
           </a:xfrm>
-          <a:prstGeom prst="ellipse">
+          <a:prstGeom prst="rect">
             <a:avLst/>
           </a:prstGeom>
           <a:solidFill>
-            <a:srgbClr val="FFD23F"/>
+            <a:srgbClr val="C79A1B"/>
           </a:solidFill>
           <a:ln w="12700">
             <a:solidFill>
-              <a:srgbClr val="FFD23F"/>
+              <a:srgbClr val="C79A1B"/>
             </a:solidFill>
             <a:prstDash val="solid"/>
           </a:ln>
@@ -10586,7 +10590,7 @@
             <a:r>
               <a:rPr lang="en-US" sz="2000" b="1" dirty="0">
                 <a:solidFill>
-                  <a:srgbClr val="E8EEFB"/>
+                  <a:srgbClr val="15211E"/>
                 </a:solidFill>
                 <a:latin typeface="Calibri" pitchFamily="34" charset="0"/>
                 <a:ea typeface="Calibri" pitchFamily="34" charset="-122"/>
@@ -10628,7 +10632,7 @@
             <a:r>
               <a:rPr lang="en-US" sz="1600" dirty="0">
                 <a:solidFill>
-                  <a:srgbClr val="8DA0C2"/>
+                  <a:srgbClr val="4F5D58"/>
                 </a:solidFill>
                 <a:latin typeface="Calibri" pitchFamily="34" charset="0"/>
                 <a:ea typeface="Calibri" pitchFamily="34" charset="-122"/>
@@ -10670,7 +10674,7 @@
             <a:lvl1pPr>
               <a:defRPr sz="1000">
                 <a:solidFill>
-                  <a:srgbClr val="8DA0C2"/>
+                  <a:srgbClr val="4F5D58"/>
                 </a:solidFill>
                 <a:latin typeface="Calibri"/>
                 <a:ea typeface="Calibri"/>
@@ -10739,7 +10743,7 @@
             </a:pPr>
             <a:r>
               <a:rPr lang="en-US" dirty="0"/>
-              <a:t>The solution: DRISHTI command centre</a:t>
+              <a:t>The solution: the DRISHTI situation room</a:t>
             </a:r>
             <a:endParaRPr lang="en-US" dirty="0"/>
           </a:p>
@@ -10776,7 +10780,7 @@
             <a:r>
               <a:rPr lang="en-US" sz="1600" dirty="0">
                 <a:solidFill>
-                  <a:srgbClr val="E8EEFB"/>
+                  <a:srgbClr val="15211E"/>
                 </a:solidFill>
                 <a:latin typeface="Calibri" pitchFamily="34" charset="0"/>
                 <a:ea typeface="Calibri" pitchFamily="34" charset="-122"/>
@@ -10797,7 +10801,7 @@
             <a:r>
               <a:rPr lang="en-US" sz="1600" dirty="0">
                 <a:solidFill>
-                  <a:srgbClr val="E8EEFB"/>
+                  <a:srgbClr val="15211E"/>
                 </a:solidFill>
                 <a:latin typeface="Calibri" pitchFamily="34" charset="0"/>
                 <a:ea typeface="Calibri" pitchFamily="34" charset="-122"/>
@@ -10818,7 +10822,7 @@
             <a:r>
               <a:rPr lang="en-US" sz="1600" dirty="0">
                 <a:solidFill>
-                  <a:srgbClr val="E8EEFB"/>
+                  <a:srgbClr val="15211E"/>
                 </a:solidFill>
                 <a:latin typeface="Calibri" pitchFamily="34" charset="0"/>
                 <a:ea typeface="Calibri" pitchFamily="34" charset="-122"/>
@@ -10839,7 +10843,7 @@
             <a:r>
               <a:rPr lang="en-US" sz="1600" dirty="0">
                 <a:solidFill>
-                  <a:srgbClr val="E8EEFB"/>
+                  <a:srgbClr val="15211E"/>
                 </a:solidFill>
                 <a:latin typeface="Calibri" pitchFamily="34" charset="0"/>
                 <a:ea typeface="Calibri" pitchFamily="34" charset="-122"/>
@@ -10860,7 +10864,7 @@
             <a:r>
               <a:rPr lang="en-US" sz="1600" dirty="0">
                 <a:solidFill>
-                  <a:srgbClr val="E8EEFB"/>
+                  <a:srgbClr val="15211E"/>
                 </a:solidFill>
                 <a:latin typeface="Calibri" pitchFamily="34" charset="0"/>
                 <a:ea typeface="Calibri" pitchFamily="34" charset="-122"/>
@@ -10881,7 +10885,7 @@
             <a:r>
               <a:rPr lang="en-US" sz="1600" dirty="0">
                 <a:solidFill>
-                  <a:srgbClr val="E8EEFB"/>
+                  <a:srgbClr val="15211E"/>
                 </a:solidFill>
                 <a:latin typeface="Calibri" pitchFamily="34" charset="0"/>
                 <a:ea typeface="Calibri" pitchFamily="34" charset="-122"/>
@@ -10902,29 +10906,22 @@
         <p:spPr>
           <a:xfrm>
             <a:off x="4654296" y="1316736"/>
-            <a:ext cx="7013448" cy="3691033"/>
-          </a:xfrm>
-          <a:prstGeom prst="roundRect">
+            <a:ext cx="7013448" cy="5071777"/>
+          </a:xfrm>
+          <a:prstGeom prst="rect">
             <a:avLst>
-              <a:gd name="adj" fmla="val 1486"/>
+              <a:gd name="adj" fmla="val 1082"/>
             </a:avLst>
           </a:prstGeom>
           <a:solidFill>
-            <a:srgbClr val="111B2F"/>
+            <a:srgbClr val="FAFBF8"/>
           </a:solidFill>
           <a:ln w="12700">
             <a:solidFill>
-              <a:srgbClr val="22314F"/>
+              <a:srgbClr val="CBD2CA"/>
             </a:solidFill>
             <a:prstDash val="solid"/>
           </a:ln>
-          <a:effectLst>
-            <a:outerShdw sx="100000" sy="100000" kx="0" ky="0" algn="bl" rotWithShape="0" blurRad="152400" dist="38100" dir="5400000">
-              <a:srgbClr val="000000">
-                <a:alpha val="35000"/>
-              </a:srgbClr>
-            </a:outerShdw>
-          </a:effectLst>
         </p:spPr>
       </p:sp>
       <p:pic>
@@ -10944,7 +10941,7 @@
         <p:spPr>
           <a:xfrm>
             <a:off x="4709160" y="1371600"/>
-            <a:ext cx="6903720" cy="3581305"/>
+            <a:ext cx="6903720" cy="4962049"/>
           </a:xfrm>
           <a:prstGeom prst="rect">
             <a:avLst/>
@@ -10981,7 +10978,7 @@
             <a:lvl1pPr>
               <a:defRPr sz="1000">
                 <a:solidFill>
-                  <a:srgbClr val="8DA0C2"/>
+                  <a:srgbClr val="4F5D58"/>
                 </a:solidFill>
                 <a:latin typeface="Calibri"/>
                 <a:ea typeface="Calibri"/>
@@ -11067,27 +11064,20 @@
             <a:off x="548640" y="1554480"/>
             <a:ext cx="1691640" cy="3383280"/>
           </a:xfrm>
-          <a:prstGeom prst="roundRect">
+          <a:prstGeom prst="rect">
             <a:avLst>
               <a:gd name="adj" fmla="val 5405"/>
             </a:avLst>
           </a:prstGeom>
           <a:solidFill>
-            <a:srgbClr val="111B2F"/>
+            <a:srgbClr val="FAFBF8"/>
           </a:solidFill>
           <a:ln w="9525">
             <a:solidFill>
-              <a:srgbClr val="22314F"/>
+              <a:srgbClr val="CBD2CA"/>
             </a:solidFill>
             <a:prstDash val="solid"/>
           </a:ln>
-          <a:effectLst>
-            <a:outerShdw sx="100000" sy="100000" kx="0" ky="0" algn="bl" rotWithShape="0" blurRad="152400" dist="38100" dir="5400000">
-              <a:srgbClr val="000000">
-                <a:alpha val="35000"/>
-              </a:srgbClr>
-            </a:outerShdw>
-          </a:effectLst>
         </p:spPr>
       </p:sp>
       <p:sp>
@@ -11101,17 +11091,17 @@
             <a:off x="685800" y="1691640"/>
             <a:ext cx="1417320" cy="457200"/>
           </a:xfrm>
-          <a:prstGeom prst="roundRect">
+          <a:prstGeom prst="rect">
             <a:avLst>
               <a:gd name="adj" fmla="val 16000"/>
             </a:avLst>
           </a:prstGeom>
           <a:solidFill>
-            <a:srgbClr val="B18CFF"/>
+            <a:srgbClr val="6D5BA8"/>
           </a:solidFill>
           <a:ln w="12700">
             <a:solidFill>
-              <a:srgbClr val="B18CFF"/>
+              <a:srgbClr val="6D5BA8"/>
             </a:solidFill>
             <a:prstDash val="solid"/>
           </a:ln>
@@ -11144,7 +11134,7 @@
             <a:r>
               <a:rPr lang="en-US" sz="1400" b="1" dirty="0">
                 <a:solidFill>
-                  <a:srgbClr val="0A101D"/>
+                  <a:srgbClr val="F1F3EF"/>
                 </a:solidFill>
                 <a:latin typeface="Calibri" pitchFamily="34" charset="0"/>
                 <a:ea typeface="Calibri" pitchFamily="34" charset="-122"/>
@@ -11186,7 +11176,7 @@
             <a:r>
               <a:rPr lang="en-US" sz="1400" dirty="0">
                 <a:solidFill>
-                  <a:srgbClr val="E8EEFB"/>
+                  <a:srgbClr val="15211E"/>
                 </a:solidFill>
                 <a:latin typeface="Calibri" pitchFamily="34" charset="0"/>
                 <a:ea typeface="Calibri" pitchFamily="34" charset="-122"/>
@@ -11206,7 +11196,7 @@
             <a:r>
               <a:rPr lang="en-US" sz="1400" dirty="0">
                 <a:solidFill>
-                  <a:srgbClr val="E8EEFB"/>
+                  <a:srgbClr val="15211E"/>
                 </a:solidFill>
                 <a:latin typeface="Calibri" pitchFamily="34" charset="0"/>
                 <a:ea typeface="Calibri" pitchFamily="34" charset="-122"/>
@@ -11226,7 +11216,7 @@
             <a:r>
               <a:rPr lang="en-US" sz="1400" dirty="0">
                 <a:solidFill>
-                  <a:srgbClr val="E8EEFB"/>
+                  <a:srgbClr val="15211E"/>
                 </a:solidFill>
                 <a:latin typeface="Calibri" pitchFamily="34" charset="0"/>
                 <a:ea typeface="Calibri" pitchFamily="34" charset="-122"/>
@@ -11246,7 +11236,7 @@
             <a:r>
               <a:rPr lang="en-US" sz="1400" dirty="0">
                 <a:solidFill>
-                  <a:srgbClr val="E8EEFB"/>
+                  <a:srgbClr val="15211E"/>
                 </a:solidFill>
                 <a:latin typeface="Calibri" pitchFamily="34" charset="0"/>
                 <a:ea typeface="Calibri" pitchFamily="34" charset="-122"/>
@@ -11266,7 +11256,7 @@
             <a:r>
               <a:rPr lang="en-US" sz="1400" dirty="0">
                 <a:solidFill>
-                  <a:srgbClr val="E8EEFB"/>
+                  <a:srgbClr val="15211E"/>
                 </a:solidFill>
                 <a:latin typeface="Calibri" pitchFamily="34" charset="0"/>
                 <a:ea typeface="Calibri" pitchFamily="34" charset="-122"/>
@@ -11305,7 +11295,7 @@
             <a:r>
               <a:rPr lang="en-US" sz="1200" dirty="0">
                 <a:solidFill>
-                  <a:srgbClr val="8DA0C2"/>
+                  <a:srgbClr val="4F5D58"/>
                 </a:solidFill>
                 <a:latin typeface="Calibri" pitchFamily="34" charset="0"/>
                 <a:ea typeface="Calibri" pitchFamily="34" charset="-122"/>
@@ -11328,27 +11318,20 @@
             <a:off x="2423160" y="1554480"/>
             <a:ext cx="1691640" cy="3383280"/>
           </a:xfrm>
-          <a:prstGeom prst="roundRect">
+          <a:prstGeom prst="rect">
             <a:avLst>
               <a:gd name="adj" fmla="val 5405"/>
             </a:avLst>
           </a:prstGeom>
           <a:solidFill>
-            <a:srgbClr val="111B2F"/>
+            <a:srgbClr val="FAFBF8"/>
           </a:solidFill>
           <a:ln w="9525">
             <a:solidFill>
-              <a:srgbClr val="22314F"/>
+              <a:srgbClr val="CBD2CA"/>
             </a:solidFill>
             <a:prstDash val="solid"/>
           </a:ln>
-          <a:effectLst>
-            <a:outerShdw sx="100000" sy="100000" kx="0" ky="0" algn="bl" rotWithShape="0" blurRad="152400" dist="38100" dir="5400000">
-              <a:srgbClr val="000000">
-                <a:alpha val="35000"/>
-              </a:srgbClr>
-            </a:outerShdw>
-          </a:effectLst>
         </p:spPr>
       </p:sp>
       <p:sp>
@@ -11362,17 +11345,17 @@
             <a:off x="2560320" y="1691640"/>
             <a:ext cx="1417320" cy="457200"/>
           </a:xfrm>
-          <a:prstGeom prst="roundRect">
+          <a:prstGeom prst="rect">
             <a:avLst>
               <a:gd name="adj" fmla="val 16000"/>
             </a:avLst>
           </a:prstGeom>
           <a:solidFill>
-            <a:srgbClr val="3DDC97"/>
+            <a:srgbClr val="5B8A8F"/>
           </a:solidFill>
           <a:ln w="12700">
             <a:solidFill>
-              <a:srgbClr val="3DDC97"/>
+              <a:srgbClr val="5B8A8F"/>
             </a:solidFill>
             <a:prstDash val="solid"/>
           </a:ln>
@@ -11405,7 +11388,7 @@
             <a:r>
               <a:rPr lang="en-US" sz="1400" b="1" dirty="0">
                 <a:solidFill>
-                  <a:srgbClr val="0A101D"/>
+                  <a:srgbClr val="F1F3EF"/>
                 </a:solidFill>
                 <a:latin typeface="Calibri" pitchFamily="34" charset="0"/>
                 <a:ea typeface="Calibri" pitchFamily="34" charset="-122"/>
@@ -11447,7 +11430,7 @@
             <a:r>
               <a:rPr lang="en-US" sz="1400" dirty="0">
                 <a:solidFill>
-                  <a:srgbClr val="E8EEFB"/>
+                  <a:srgbClr val="15211E"/>
                 </a:solidFill>
                 <a:latin typeface="Calibri" pitchFamily="34" charset="0"/>
                 <a:ea typeface="Calibri" pitchFamily="34" charset="-122"/>
@@ -11467,7 +11450,7 @@
             <a:r>
               <a:rPr lang="en-US" sz="1400" dirty="0">
                 <a:solidFill>
-                  <a:srgbClr val="E8EEFB"/>
+                  <a:srgbClr val="15211E"/>
                 </a:solidFill>
                 <a:latin typeface="Calibri" pitchFamily="34" charset="0"/>
                 <a:ea typeface="Calibri" pitchFamily="34" charset="-122"/>
@@ -11487,7 +11470,7 @@
             <a:r>
               <a:rPr lang="en-US" sz="1400" dirty="0">
                 <a:solidFill>
-                  <a:srgbClr val="E8EEFB"/>
+                  <a:srgbClr val="15211E"/>
                 </a:solidFill>
                 <a:latin typeface="Calibri" pitchFamily="34" charset="0"/>
                 <a:ea typeface="Calibri" pitchFamily="34" charset="-122"/>
@@ -11507,7 +11490,7 @@
             <a:r>
               <a:rPr lang="en-US" sz="1400" dirty="0">
                 <a:solidFill>
-                  <a:srgbClr val="E8EEFB"/>
+                  <a:srgbClr val="15211E"/>
                 </a:solidFill>
                 <a:latin typeface="Calibri" pitchFamily="34" charset="0"/>
                 <a:ea typeface="Calibri" pitchFamily="34" charset="-122"/>
@@ -11546,7 +11529,7 @@
             <a:r>
               <a:rPr lang="en-US" sz="1200" dirty="0">
                 <a:solidFill>
-                  <a:srgbClr val="8DA0C2"/>
+                  <a:srgbClr val="4F5D58"/>
                 </a:solidFill>
                 <a:latin typeface="Calibri" pitchFamily="34" charset="0"/>
                 <a:ea typeface="Calibri" pitchFamily="34" charset="-122"/>
@@ -11569,27 +11552,20 @@
             <a:off x="4297680" y="1554480"/>
             <a:ext cx="1691640" cy="3383280"/>
           </a:xfrm>
-          <a:prstGeom prst="roundRect">
+          <a:prstGeom prst="rect">
             <a:avLst>
               <a:gd name="adj" fmla="val 5405"/>
             </a:avLst>
           </a:prstGeom>
           <a:solidFill>
-            <a:srgbClr val="111B2F"/>
+            <a:srgbClr val="FAFBF8"/>
           </a:solidFill>
           <a:ln w="9525">
             <a:solidFill>
-              <a:srgbClr val="22314F"/>
+              <a:srgbClr val="CBD2CA"/>
             </a:solidFill>
             <a:prstDash val="solid"/>
           </a:ln>
-          <a:effectLst>
-            <a:outerShdw sx="100000" sy="100000" kx="0" ky="0" algn="bl" rotWithShape="0" blurRad="152400" dist="38100" dir="5400000">
-              <a:srgbClr val="000000">
-                <a:alpha val="35000"/>
-              </a:srgbClr>
-            </a:outerShdw>
-          </a:effectLst>
         </p:spPr>
       </p:sp>
       <p:sp>
@@ -11603,17 +11579,17 @@
             <a:off x="4434840" y="1691640"/>
             <a:ext cx="1417320" cy="457200"/>
           </a:xfrm>
-          <a:prstGeom prst="roundRect">
+          <a:prstGeom prst="rect">
             <a:avLst>
               <a:gd name="adj" fmla="val 16000"/>
             </a:avLst>
           </a:prstGeom>
           <a:solidFill>
-            <a:srgbClr val="3CC8FF"/>
+            <a:srgbClr val="0B5C7A"/>
           </a:solidFill>
           <a:ln w="12700">
             <a:solidFill>
-              <a:srgbClr val="3CC8FF"/>
+              <a:srgbClr val="0B5C7A"/>
             </a:solidFill>
             <a:prstDash val="solid"/>
           </a:ln>
@@ -11646,7 +11622,7 @@
             <a:r>
               <a:rPr lang="en-US" sz="1400" b="1" dirty="0">
                 <a:solidFill>
-                  <a:srgbClr val="0A101D"/>
+                  <a:srgbClr val="F1F3EF"/>
                 </a:solidFill>
                 <a:latin typeface="Calibri" pitchFamily="34" charset="0"/>
                 <a:ea typeface="Calibri" pitchFamily="34" charset="-122"/>
@@ -11688,7 +11664,7 @@
             <a:r>
               <a:rPr lang="en-US" sz="1400" dirty="0">
                 <a:solidFill>
-                  <a:srgbClr val="E8EEFB"/>
+                  <a:srgbClr val="15211E"/>
                 </a:solidFill>
                 <a:latin typeface="Calibri" pitchFamily="34" charset="0"/>
                 <a:ea typeface="Calibri" pitchFamily="34" charset="-122"/>
@@ -11708,7 +11684,7 @@
             <a:r>
               <a:rPr lang="en-US" sz="1400" dirty="0">
                 <a:solidFill>
-                  <a:srgbClr val="E8EEFB"/>
+                  <a:srgbClr val="15211E"/>
                 </a:solidFill>
                 <a:latin typeface="Calibri" pitchFamily="34" charset="0"/>
                 <a:ea typeface="Calibri" pitchFamily="34" charset="-122"/>
@@ -11728,7 +11704,7 @@
             <a:r>
               <a:rPr lang="en-US" sz="1400" dirty="0">
                 <a:solidFill>
-                  <a:srgbClr val="E8EEFB"/>
+                  <a:srgbClr val="15211E"/>
                 </a:solidFill>
                 <a:latin typeface="Calibri" pitchFamily="34" charset="0"/>
                 <a:ea typeface="Calibri" pitchFamily="34" charset="-122"/>
@@ -11748,7 +11724,7 @@
             <a:r>
               <a:rPr lang="en-US" sz="1400" dirty="0">
                 <a:solidFill>
-                  <a:srgbClr val="E8EEFB"/>
+                  <a:srgbClr val="15211E"/>
                 </a:solidFill>
                 <a:latin typeface="Calibri" pitchFamily="34" charset="0"/>
                 <a:ea typeface="Calibri" pitchFamily="34" charset="-122"/>
@@ -11787,7 +11763,7 @@
             <a:r>
               <a:rPr lang="en-US" sz="1200" dirty="0">
                 <a:solidFill>
-                  <a:srgbClr val="8DA0C2"/>
+                  <a:srgbClr val="4F5D58"/>
                 </a:solidFill>
                 <a:latin typeface="Calibri" pitchFamily="34" charset="0"/>
                 <a:ea typeface="Calibri" pitchFamily="34" charset="-122"/>
@@ -11810,27 +11786,20 @@
             <a:off x="6172200" y="1554480"/>
             <a:ext cx="1691640" cy="3383280"/>
           </a:xfrm>
-          <a:prstGeom prst="roundRect">
+          <a:prstGeom prst="rect">
             <a:avLst>
               <a:gd name="adj" fmla="val 5405"/>
             </a:avLst>
           </a:prstGeom>
           <a:solidFill>
-            <a:srgbClr val="111B2F"/>
+            <a:srgbClr val="FAFBF8"/>
           </a:solidFill>
           <a:ln w="9525">
             <a:solidFill>
-              <a:srgbClr val="22314F"/>
+              <a:srgbClr val="CBD2CA"/>
             </a:solidFill>
             <a:prstDash val="solid"/>
           </a:ln>
-          <a:effectLst>
-            <a:outerShdw sx="100000" sy="100000" kx="0" ky="0" algn="bl" rotWithShape="0" blurRad="152400" dist="38100" dir="5400000">
-              <a:srgbClr val="000000">
-                <a:alpha val="35000"/>
-              </a:srgbClr>
-            </a:outerShdw>
-          </a:effectLst>
         </p:spPr>
       </p:sp>
       <p:sp>
@@ -11844,17 +11813,17 @@
             <a:off x="6309360" y="1691640"/>
             <a:ext cx="1417320" cy="457200"/>
           </a:xfrm>
-          <a:prstGeom prst="roundRect">
+          <a:prstGeom prst="rect">
             <a:avLst>
               <a:gd name="adj" fmla="val 16000"/>
             </a:avLst>
           </a:prstGeom>
           <a:solidFill>
-            <a:srgbClr val="FF8A3D"/>
+            <a:srgbClr val="D1561F"/>
           </a:solidFill>
           <a:ln w="12700">
             <a:solidFill>
-              <a:srgbClr val="FF8A3D"/>
+              <a:srgbClr val="D1561F"/>
             </a:solidFill>
             <a:prstDash val="solid"/>
           </a:ln>
@@ -11887,7 +11856,7 @@
             <a:r>
               <a:rPr lang="en-US" sz="1400" b="1" dirty="0">
                 <a:solidFill>
-                  <a:srgbClr val="0A101D"/>
+                  <a:srgbClr val="F1F3EF"/>
                 </a:solidFill>
                 <a:latin typeface="Calibri" pitchFamily="34" charset="0"/>
                 <a:ea typeface="Calibri" pitchFamily="34" charset="-122"/>
@@ -11929,7 +11898,7 @@
             <a:r>
               <a:rPr lang="en-US" sz="1400" dirty="0">
                 <a:solidFill>
-                  <a:srgbClr val="E8EEFB"/>
+                  <a:srgbClr val="15211E"/>
                 </a:solidFill>
                 <a:latin typeface="Calibri" pitchFamily="34" charset="0"/>
                 <a:ea typeface="Calibri" pitchFamily="34" charset="-122"/>
@@ -11949,7 +11918,7 @@
             <a:r>
               <a:rPr lang="en-US" sz="1400" dirty="0">
                 <a:solidFill>
-                  <a:srgbClr val="E8EEFB"/>
+                  <a:srgbClr val="15211E"/>
                 </a:solidFill>
                 <a:latin typeface="Calibri" pitchFamily="34" charset="0"/>
                 <a:ea typeface="Calibri" pitchFamily="34" charset="-122"/>
@@ -11969,7 +11938,7 @@
             <a:r>
               <a:rPr lang="en-US" sz="1400" dirty="0">
                 <a:solidFill>
-                  <a:srgbClr val="E8EEFB"/>
+                  <a:srgbClr val="15211E"/>
                 </a:solidFill>
                 <a:latin typeface="Calibri" pitchFamily="34" charset="0"/>
                 <a:ea typeface="Calibri" pitchFamily="34" charset="-122"/>
@@ -11989,7 +11958,7 @@
             <a:r>
               <a:rPr lang="en-US" sz="1400" dirty="0">
                 <a:solidFill>
-                  <a:srgbClr val="E8EEFB"/>
+                  <a:srgbClr val="15211E"/>
                 </a:solidFill>
                 <a:latin typeface="Calibri" pitchFamily="34" charset="0"/>
                 <a:ea typeface="Calibri" pitchFamily="34" charset="-122"/>
@@ -12028,7 +11997,7 @@
             <a:r>
               <a:rPr lang="en-US" sz="1200" dirty="0">
                 <a:solidFill>
-                  <a:srgbClr val="8DA0C2"/>
+                  <a:srgbClr val="4F5D58"/>
                 </a:solidFill>
                 <a:latin typeface="Calibri" pitchFamily="34" charset="0"/>
                 <a:ea typeface="Calibri" pitchFamily="34" charset="-122"/>
@@ -12051,27 +12020,20 @@
             <a:off x="8046720" y="1554480"/>
             <a:ext cx="1691640" cy="3383280"/>
           </a:xfrm>
-          <a:prstGeom prst="roundRect">
+          <a:prstGeom prst="rect">
             <a:avLst>
               <a:gd name="adj" fmla="val 5405"/>
             </a:avLst>
           </a:prstGeom>
           <a:solidFill>
-            <a:srgbClr val="111B2F"/>
+            <a:srgbClr val="FAFBF8"/>
           </a:solidFill>
           <a:ln w="9525">
             <a:solidFill>
-              <a:srgbClr val="22314F"/>
+              <a:srgbClr val="CBD2CA"/>
             </a:solidFill>
             <a:prstDash val="solid"/>
           </a:ln>
-          <a:effectLst>
-            <a:outerShdw sx="100000" sy="100000" kx="0" ky="0" algn="bl" rotWithShape="0" blurRad="152400" dist="38100" dir="5400000">
-              <a:srgbClr val="000000">
-                <a:alpha val="35000"/>
-              </a:srgbClr>
-            </a:outerShdw>
-          </a:effectLst>
         </p:spPr>
       </p:sp>
       <p:sp>
@@ -12085,17 +12047,17 @@
             <a:off x="8183880" y="1691640"/>
             <a:ext cx="1417320" cy="457200"/>
           </a:xfrm>
-          <a:prstGeom prst="roundRect">
+          <a:prstGeom prst="rect">
             <a:avLst>
               <a:gd name="adj" fmla="val 16000"/>
             </a:avLst>
           </a:prstGeom>
           <a:solidFill>
-            <a:srgbClr val="FFD23F"/>
+            <a:srgbClr val="C79A1B"/>
           </a:solidFill>
           <a:ln w="12700">
             <a:solidFill>
-              <a:srgbClr val="FFD23F"/>
+              <a:srgbClr val="C79A1B"/>
             </a:solidFill>
             <a:prstDash val="solid"/>
           </a:ln>
@@ -12128,7 +12090,7 @@
             <a:r>
               <a:rPr lang="en-US" sz="1400" b="1" dirty="0">
                 <a:solidFill>
-                  <a:srgbClr val="0A101D"/>
+                  <a:srgbClr val="F1F3EF"/>
                 </a:solidFill>
                 <a:latin typeface="Calibri" pitchFamily="34" charset="0"/>
                 <a:ea typeface="Calibri" pitchFamily="34" charset="-122"/>
@@ -12170,7 +12132,7 @@
             <a:r>
               <a:rPr lang="en-US" sz="1400" dirty="0">
                 <a:solidFill>
-                  <a:srgbClr val="E8EEFB"/>
+                  <a:srgbClr val="15211E"/>
                 </a:solidFill>
                 <a:latin typeface="Calibri" pitchFamily="34" charset="0"/>
                 <a:ea typeface="Calibri" pitchFamily="34" charset="-122"/>
@@ -12190,7 +12152,7 @@
             <a:r>
               <a:rPr lang="en-US" sz="1400" dirty="0">
                 <a:solidFill>
-                  <a:srgbClr val="E8EEFB"/>
+                  <a:srgbClr val="15211E"/>
                 </a:solidFill>
                 <a:latin typeface="Calibri" pitchFamily="34" charset="0"/>
                 <a:ea typeface="Calibri" pitchFamily="34" charset="-122"/>
@@ -12210,7 +12172,7 @@
             <a:r>
               <a:rPr lang="en-US" sz="1400" dirty="0">
                 <a:solidFill>
-                  <a:srgbClr val="E8EEFB"/>
+                  <a:srgbClr val="15211E"/>
                 </a:solidFill>
                 <a:latin typeface="Calibri" pitchFamily="34" charset="0"/>
                 <a:ea typeface="Calibri" pitchFamily="34" charset="-122"/>
@@ -12230,7 +12192,7 @@
             <a:r>
               <a:rPr lang="en-US" sz="1400" dirty="0">
                 <a:solidFill>
-                  <a:srgbClr val="E8EEFB"/>
+                  <a:srgbClr val="15211E"/>
                 </a:solidFill>
                 <a:latin typeface="Calibri" pitchFamily="34" charset="0"/>
                 <a:ea typeface="Calibri" pitchFamily="34" charset="-122"/>
@@ -12269,7 +12231,7 @@
             <a:r>
               <a:rPr lang="en-US" sz="1200" dirty="0">
                 <a:solidFill>
-                  <a:srgbClr val="8DA0C2"/>
+                  <a:srgbClr val="4F5D58"/>
                 </a:solidFill>
                 <a:latin typeface="Calibri" pitchFamily="34" charset="0"/>
                 <a:ea typeface="Calibri" pitchFamily="34" charset="-122"/>
@@ -12292,27 +12254,20 @@
             <a:off x="9921240" y="1554480"/>
             <a:ext cx="1691640" cy="3383280"/>
           </a:xfrm>
-          <a:prstGeom prst="roundRect">
+          <a:prstGeom prst="rect">
             <a:avLst>
               <a:gd name="adj" fmla="val 5405"/>
             </a:avLst>
           </a:prstGeom>
           <a:solidFill>
-            <a:srgbClr val="111B2F"/>
+            <a:srgbClr val="FAFBF8"/>
           </a:solidFill>
           <a:ln w="9525">
             <a:solidFill>
-              <a:srgbClr val="22314F"/>
+              <a:srgbClr val="CBD2CA"/>
             </a:solidFill>
             <a:prstDash val="solid"/>
           </a:ln>
-          <a:effectLst>
-            <a:outerShdw sx="100000" sy="100000" kx="0" ky="0" algn="bl" rotWithShape="0" blurRad="152400" dist="38100" dir="5400000">
-              <a:srgbClr val="000000">
-                <a:alpha val="35000"/>
-              </a:srgbClr>
-            </a:outerShdw>
-          </a:effectLst>
         </p:spPr>
       </p:sp>
       <p:sp>
@@ -12326,17 +12281,17 @@
             <a:off x="10058400" y="1691640"/>
             <a:ext cx="1417320" cy="457200"/>
           </a:xfrm>
-          <a:prstGeom prst="roundRect">
+          <a:prstGeom prst="rect">
             <a:avLst>
               <a:gd name="adj" fmla="val 16000"/>
             </a:avLst>
           </a:prstGeom>
           <a:solidFill>
-            <a:srgbClr val="FF3B5C"/>
+            <a:srgbClr val="A3102E"/>
           </a:solidFill>
           <a:ln w="12700">
             <a:solidFill>
-              <a:srgbClr val="FF3B5C"/>
+              <a:srgbClr val="A3102E"/>
             </a:solidFill>
             <a:prstDash val="solid"/>
           </a:ln>
@@ -12369,7 +12324,7 @@
             <a:r>
               <a:rPr lang="en-US" sz="1400" b="1" dirty="0">
                 <a:solidFill>
-                  <a:srgbClr val="0A101D"/>
+                  <a:srgbClr val="F1F3EF"/>
                 </a:solidFill>
                 <a:latin typeface="Calibri" pitchFamily="34" charset="0"/>
                 <a:ea typeface="Calibri" pitchFamily="34" charset="-122"/>
@@ -12411,7 +12366,7 @@
             <a:r>
               <a:rPr lang="en-US" sz="1400" dirty="0">
                 <a:solidFill>
-                  <a:srgbClr val="E8EEFB"/>
+                  <a:srgbClr val="15211E"/>
                 </a:solidFill>
                 <a:latin typeface="Calibri" pitchFamily="34" charset="0"/>
                 <a:ea typeface="Calibri" pitchFamily="34" charset="-122"/>
@@ -12431,7 +12386,7 @@
             <a:r>
               <a:rPr lang="en-US" sz="1400" dirty="0">
                 <a:solidFill>
-                  <a:srgbClr val="E8EEFB"/>
+                  <a:srgbClr val="15211E"/>
                 </a:solidFill>
                 <a:latin typeface="Calibri" pitchFamily="34" charset="0"/>
                 <a:ea typeface="Calibri" pitchFamily="34" charset="-122"/>
@@ -12451,7 +12406,7 @@
             <a:r>
               <a:rPr lang="en-US" sz="1400" dirty="0">
                 <a:solidFill>
-                  <a:srgbClr val="E8EEFB"/>
+                  <a:srgbClr val="15211E"/>
                 </a:solidFill>
                 <a:latin typeface="Calibri" pitchFamily="34" charset="0"/>
                 <a:ea typeface="Calibri" pitchFamily="34" charset="-122"/>
@@ -12471,7 +12426,7 @@
             <a:r>
               <a:rPr lang="en-US" sz="1400" dirty="0">
                 <a:solidFill>
-                  <a:srgbClr val="E8EEFB"/>
+                  <a:srgbClr val="15211E"/>
                 </a:solidFill>
                 <a:latin typeface="Calibri" pitchFamily="34" charset="0"/>
                 <a:ea typeface="Calibri" pitchFamily="34" charset="-122"/>
@@ -12510,7 +12465,7 @@
             <a:r>
               <a:rPr lang="en-US" sz="1600" dirty="0">
                 <a:solidFill>
-                  <a:srgbClr val="8DA0C2"/>
+                  <a:srgbClr val="4F5D58"/>
                 </a:solidFill>
                 <a:latin typeface="Calibri" pitchFamily="34" charset="0"/>
                 <a:ea typeface="Calibri" pitchFamily="34" charset="-122"/>
@@ -12552,7 +12507,7 @@
             <a:lvl1pPr>
               <a:defRPr sz="1000">
                 <a:solidFill>
-                  <a:srgbClr val="8DA0C2"/>
+                  <a:srgbClr val="4F5D58"/>
                 </a:solidFill>
                 <a:latin typeface="Calibri"/>
                 <a:ea typeface="Calibri"/>
@@ -12667,7 +12622,7 @@
                       <a:r>
                         <a:rPr lang="en-US" sz="1400" b="1" dirty="0">
                           <a:solidFill>
-                            <a:srgbClr val="3CC8FF"/>
+                            <a:srgbClr val="0B5C7A"/>
                           </a:solidFill>
                           <a:latin typeface="Calibri" pitchFamily="34" charset="0"/>
                           <a:ea typeface="Calibri" pitchFamily="34" charset="-122"/>
@@ -12685,7 +12640,7 @@
                   <a:tcPr marL="109728" marR="109728" marT="0" marB="0" anchor="ctr">
                     <a:lnL w="9525" cap="flat" cmpd="sng" algn="ctr">
                       <a:solidFill>
-                        <a:srgbClr val="22314F"/>
+                        <a:srgbClr val="CBD2CA"/>
                       </a:solidFill>
                       <a:prstDash val="solid"/>
                       <a:round/>
@@ -12694,7 +12649,7 @@
                     </a:lnL>
                     <a:lnR w="9525" cap="flat" cmpd="sng" algn="ctr">
                       <a:solidFill>
-                        <a:srgbClr val="22314F"/>
+                        <a:srgbClr val="CBD2CA"/>
                       </a:solidFill>
                       <a:prstDash val="solid"/>
                       <a:round/>
@@ -12703,7 +12658,7 @@
                     </a:lnR>
                     <a:lnT w="9525" cap="flat" cmpd="sng" algn="ctr">
                       <a:solidFill>
-                        <a:srgbClr val="22314F"/>
+                        <a:srgbClr val="CBD2CA"/>
                       </a:solidFill>
                       <a:prstDash val="solid"/>
                       <a:round/>
@@ -12712,7 +12667,7 @@
                     </a:lnT>
                     <a:lnB w="9525" cap="flat" cmpd="sng" algn="ctr">
                       <a:solidFill>
-                        <a:srgbClr val="22314F"/>
+                        <a:srgbClr val="CBD2CA"/>
                       </a:solidFill>
                       <a:prstDash val="solid"/>
                       <a:round/>
@@ -12720,7 +12675,7 @@
                       <a:tailEnd type="none" w="med" len="med"/>
                     </a:lnB>
                     <a:solidFill>
-                      <a:srgbClr val="16223A"/>
+                      <a:srgbClr val="E6EAE4"/>
                     </a:solidFill>
                   </a:tcPr>
                 </a:tc>
@@ -12735,7 +12690,7 @@
                       <a:r>
                         <a:rPr lang="en-US" sz="1400" b="1" dirty="0">
                           <a:solidFill>
-                            <a:srgbClr val="3CC8FF"/>
+                            <a:srgbClr val="0B5C7A"/>
                           </a:solidFill>
                           <a:latin typeface="Calibri" pitchFamily="34" charset="0"/>
                           <a:ea typeface="Calibri" pitchFamily="34" charset="-122"/>
@@ -12753,7 +12708,7 @@
                   <a:tcPr marL="109728" marR="109728" marT="0" marB="0" anchor="ctr">
                     <a:lnL w="9525" cap="flat" cmpd="sng" algn="ctr">
                       <a:solidFill>
-                        <a:srgbClr val="22314F"/>
+                        <a:srgbClr val="CBD2CA"/>
                       </a:solidFill>
                       <a:prstDash val="solid"/>
                       <a:round/>
@@ -12762,7 +12717,7 @@
                     </a:lnL>
                     <a:lnR w="9525" cap="flat" cmpd="sng" algn="ctr">
                       <a:solidFill>
-                        <a:srgbClr val="22314F"/>
+                        <a:srgbClr val="CBD2CA"/>
                       </a:solidFill>
                       <a:prstDash val="solid"/>
                       <a:round/>
@@ -12771,7 +12726,7 @@
                     </a:lnR>
                     <a:lnT w="9525" cap="flat" cmpd="sng" algn="ctr">
                       <a:solidFill>
-                        <a:srgbClr val="22314F"/>
+                        <a:srgbClr val="CBD2CA"/>
                       </a:solidFill>
                       <a:prstDash val="solid"/>
                       <a:round/>
@@ -12780,7 +12735,7 @@
                     </a:lnT>
                     <a:lnB w="9525" cap="flat" cmpd="sng" algn="ctr">
                       <a:solidFill>
-                        <a:srgbClr val="22314F"/>
+                        <a:srgbClr val="CBD2CA"/>
                       </a:solidFill>
                       <a:prstDash val="solid"/>
                       <a:round/>
@@ -12788,7 +12743,7 @@
                       <a:tailEnd type="none" w="med" len="med"/>
                     </a:lnB>
                     <a:solidFill>
-                      <a:srgbClr val="16223A"/>
+                      <a:srgbClr val="E6EAE4"/>
                     </a:solidFill>
                   </a:tcPr>
                 </a:tc>
@@ -12803,7 +12758,7 @@
                       <a:r>
                         <a:rPr lang="en-US" sz="1400" b="1" dirty="0">
                           <a:solidFill>
-                            <a:srgbClr val="3CC8FF"/>
+                            <a:srgbClr val="0B5C7A"/>
                           </a:solidFill>
                           <a:latin typeface="Calibri" pitchFamily="34" charset="0"/>
                           <a:ea typeface="Calibri" pitchFamily="34" charset="-122"/>
@@ -12821,7 +12776,7 @@
                   <a:tcPr marL="109728" marR="109728" marT="0" marB="0" anchor="ctr">
                     <a:lnL w="9525" cap="flat" cmpd="sng" algn="ctr">
                       <a:solidFill>
-                        <a:srgbClr val="22314F"/>
+                        <a:srgbClr val="CBD2CA"/>
                       </a:solidFill>
                       <a:prstDash val="solid"/>
                       <a:round/>
@@ -12830,7 +12785,7 @@
                     </a:lnL>
                     <a:lnR w="9525" cap="flat" cmpd="sng" algn="ctr">
                       <a:solidFill>
-                        <a:srgbClr val="22314F"/>
+                        <a:srgbClr val="CBD2CA"/>
                       </a:solidFill>
                       <a:prstDash val="solid"/>
                       <a:round/>
@@ -12839,7 +12794,7 @@
                     </a:lnR>
                     <a:lnT w="9525" cap="flat" cmpd="sng" algn="ctr">
                       <a:solidFill>
-                        <a:srgbClr val="22314F"/>
+                        <a:srgbClr val="CBD2CA"/>
                       </a:solidFill>
                       <a:prstDash val="solid"/>
                       <a:round/>
@@ -12848,7 +12803,7 @@
                     </a:lnT>
                     <a:lnB w="9525" cap="flat" cmpd="sng" algn="ctr">
                       <a:solidFill>
-                        <a:srgbClr val="22314F"/>
+                        <a:srgbClr val="CBD2CA"/>
                       </a:solidFill>
                       <a:prstDash val="solid"/>
                       <a:round/>
@@ -12856,7 +12811,7 @@
                       <a:tailEnd type="none" w="med" len="med"/>
                     </a:lnB>
                     <a:solidFill>
-                      <a:srgbClr val="16223A"/>
+                      <a:srgbClr val="E6EAE4"/>
                     </a:solidFill>
                   </a:tcPr>
                 </a:tc>
@@ -12871,7 +12826,7 @@
                       <a:r>
                         <a:rPr lang="en-US" sz="1400" b="1" dirty="0">
                           <a:solidFill>
-                            <a:srgbClr val="3CC8FF"/>
+                            <a:srgbClr val="0B5C7A"/>
                           </a:solidFill>
                           <a:latin typeface="Calibri" pitchFamily="34" charset="0"/>
                           <a:ea typeface="Calibri" pitchFamily="34" charset="-122"/>
@@ -12889,7 +12844,7 @@
                   <a:tcPr marL="109728" marR="109728" marT="0" marB="0" anchor="ctr">
                     <a:lnL w="9525" cap="flat" cmpd="sng" algn="ctr">
                       <a:solidFill>
-                        <a:srgbClr val="22314F"/>
+                        <a:srgbClr val="CBD2CA"/>
                       </a:solidFill>
                       <a:prstDash val="solid"/>
                       <a:round/>
@@ -12898,7 +12853,7 @@
                     </a:lnL>
                     <a:lnR w="9525" cap="flat" cmpd="sng" algn="ctr">
                       <a:solidFill>
-                        <a:srgbClr val="22314F"/>
+                        <a:srgbClr val="CBD2CA"/>
                       </a:solidFill>
                       <a:prstDash val="solid"/>
                       <a:round/>
@@ -12907,7 +12862,7 @@
                     </a:lnR>
                     <a:lnT w="9525" cap="flat" cmpd="sng" algn="ctr">
                       <a:solidFill>
-                        <a:srgbClr val="22314F"/>
+                        <a:srgbClr val="CBD2CA"/>
                       </a:solidFill>
                       <a:prstDash val="solid"/>
                       <a:round/>
@@ -12916,7 +12871,7 @@
                     </a:lnT>
                     <a:lnB w="9525" cap="flat" cmpd="sng" algn="ctr">
                       <a:solidFill>
-                        <a:srgbClr val="22314F"/>
+                        <a:srgbClr val="CBD2CA"/>
                       </a:solidFill>
                       <a:prstDash val="solid"/>
                       <a:round/>
@@ -12924,7 +12879,7 @@
                       <a:tailEnd type="none" w="med" len="med"/>
                     </a:lnB>
                     <a:solidFill>
-                      <a:srgbClr val="16223A"/>
+                      <a:srgbClr val="E6EAE4"/>
                     </a:solidFill>
                   </a:tcPr>
                 </a:tc>
@@ -12941,7 +12896,7 @@
                       <a:r>
                         <a:rPr lang="en-US" sz="1400" b="1" dirty="0">
                           <a:solidFill>
-                            <a:srgbClr val="E8EEFB"/>
+                            <a:srgbClr val="15211E"/>
                           </a:solidFill>
                           <a:latin typeface="Calibri" pitchFamily="34" charset="0"/>
                           <a:ea typeface="Calibri" pitchFamily="34" charset="-122"/>
@@ -12959,7 +12914,7 @@
                   <a:tcPr marL="109728" marR="109728" marT="0" marB="0" anchor="ctr">
                     <a:lnL w="9525" cap="flat" cmpd="sng" algn="ctr">
                       <a:solidFill>
-                        <a:srgbClr val="22314F"/>
+                        <a:srgbClr val="CBD2CA"/>
                       </a:solidFill>
                       <a:prstDash val="solid"/>
                       <a:round/>
@@ -12968,7 +12923,7 @@
                     </a:lnL>
                     <a:lnR w="9525" cap="flat" cmpd="sng" algn="ctr">
                       <a:solidFill>
-                        <a:srgbClr val="22314F"/>
+                        <a:srgbClr val="CBD2CA"/>
                       </a:solidFill>
                       <a:prstDash val="solid"/>
                       <a:round/>
@@ -12977,7 +12932,7 @@
                     </a:lnR>
                     <a:lnT w="9525" cap="flat" cmpd="sng" algn="ctr">
                       <a:solidFill>
-                        <a:srgbClr val="22314F"/>
+                        <a:srgbClr val="CBD2CA"/>
                       </a:solidFill>
                       <a:prstDash val="solid"/>
                       <a:round/>
@@ -12986,7 +12941,7 @@
                     </a:lnT>
                     <a:lnB w="9525" cap="flat" cmpd="sng" algn="ctr">
                       <a:solidFill>
-                        <a:srgbClr val="22314F"/>
+                        <a:srgbClr val="CBD2CA"/>
                       </a:solidFill>
                       <a:prstDash val="solid"/>
                       <a:round/>
@@ -12994,7 +12949,7 @@
                       <a:tailEnd type="none" w="med" len="med"/>
                     </a:lnB>
                     <a:solidFill>
-                      <a:srgbClr val="111B2F"/>
+                      <a:srgbClr val="FAFBF8"/>
                     </a:solidFill>
                   </a:tcPr>
                 </a:tc>
@@ -13009,7 +12964,7 @@
                       <a:r>
                         <a:rPr lang="en-US" sz="1400" dirty="0">
                           <a:solidFill>
-                            <a:srgbClr val="8DA0C2"/>
+                            <a:srgbClr val="4F5D58"/>
                           </a:solidFill>
                           <a:latin typeface="Calibri" pitchFamily="34" charset="0"/>
                           <a:ea typeface="Calibri" pitchFamily="34" charset="-122"/>
@@ -13027,7 +12982,7 @@
                   <a:tcPr marL="109728" marR="109728" marT="0" marB="0" anchor="ctr">
                     <a:lnL w="9525" cap="flat" cmpd="sng" algn="ctr">
                       <a:solidFill>
-                        <a:srgbClr val="22314F"/>
+                        <a:srgbClr val="CBD2CA"/>
                       </a:solidFill>
                       <a:prstDash val="solid"/>
                       <a:round/>
@@ -13036,7 +12991,7 @@
                     </a:lnL>
                     <a:lnR w="9525" cap="flat" cmpd="sng" algn="ctr">
                       <a:solidFill>
-                        <a:srgbClr val="22314F"/>
+                        <a:srgbClr val="CBD2CA"/>
                       </a:solidFill>
                       <a:prstDash val="solid"/>
                       <a:round/>
@@ -13045,7 +13000,7 @@
                     </a:lnR>
                     <a:lnT w="9525" cap="flat" cmpd="sng" algn="ctr">
                       <a:solidFill>
-                        <a:srgbClr val="22314F"/>
+                        <a:srgbClr val="CBD2CA"/>
                       </a:solidFill>
                       <a:prstDash val="solid"/>
                       <a:round/>
@@ -13054,7 +13009,7 @@
                     </a:lnT>
                     <a:lnB w="9525" cap="flat" cmpd="sng" algn="ctr">
                       <a:solidFill>
-                        <a:srgbClr val="22314F"/>
+                        <a:srgbClr val="CBD2CA"/>
                       </a:solidFill>
                       <a:prstDash val="solid"/>
                       <a:round/>
@@ -13062,7 +13017,7 @@
                       <a:tailEnd type="none" w="med" len="med"/>
                     </a:lnB>
                     <a:solidFill>
-                      <a:srgbClr val="111B2F"/>
+                      <a:srgbClr val="FAFBF8"/>
                     </a:solidFill>
                   </a:tcPr>
                 </a:tc>
@@ -13077,7 +13032,7 @@
                       <a:r>
                         <a:rPr lang="en-US" sz="1400" dirty="0">
                           <a:solidFill>
-                            <a:srgbClr val="E8EEFB"/>
+                            <a:srgbClr val="15211E"/>
                           </a:solidFill>
                           <a:latin typeface="Calibri" pitchFamily="34" charset="0"/>
                           <a:ea typeface="Calibri" pitchFamily="34" charset="-122"/>
@@ -13095,7 +13050,7 @@
                   <a:tcPr marL="109728" marR="109728" marT="0" marB="0" anchor="ctr">
                     <a:lnL w="9525" cap="flat" cmpd="sng" algn="ctr">
                       <a:solidFill>
-                        <a:srgbClr val="22314F"/>
+                        <a:srgbClr val="CBD2CA"/>
                       </a:solidFill>
                       <a:prstDash val="solid"/>
                       <a:round/>
@@ -13104,7 +13059,7 @@
                     </a:lnL>
                     <a:lnR w="9525" cap="flat" cmpd="sng" algn="ctr">
                       <a:solidFill>
-                        <a:srgbClr val="22314F"/>
+                        <a:srgbClr val="CBD2CA"/>
                       </a:solidFill>
                       <a:prstDash val="solid"/>
                       <a:round/>
@@ -13113,7 +13068,7 @@
                     </a:lnR>
                     <a:lnT w="9525" cap="flat" cmpd="sng" algn="ctr">
                       <a:solidFill>
-                        <a:srgbClr val="22314F"/>
+                        <a:srgbClr val="CBD2CA"/>
                       </a:solidFill>
                       <a:prstDash val="solid"/>
                       <a:round/>
@@ -13122,7 +13077,7 @@
                     </a:lnT>
                     <a:lnB w="9525" cap="flat" cmpd="sng" algn="ctr">
                       <a:solidFill>
-                        <a:srgbClr val="22314F"/>
+                        <a:srgbClr val="CBD2CA"/>
                       </a:solidFill>
                       <a:prstDash val="solid"/>
                       <a:round/>
@@ -13130,7 +13085,7 @@
                       <a:tailEnd type="none" w="med" len="med"/>
                     </a:lnB>
                     <a:solidFill>
-                      <a:srgbClr val="111B2F"/>
+                      <a:srgbClr val="FAFBF8"/>
                     </a:solidFill>
                   </a:tcPr>
                 </a:tc>
@@ -13145,7 +13100,7 @@
                       <a:r>
                         <a:rPr lang="en-US" sz="1400" dirty="0">
                           <a:solidFill>
-                            <a:srgbClr val="E8EEFB"/>
+                            <a:srgbClr val="15211E"/>
                           </a:solidFill>
                           <a:latin typeface="Calibri" pitchFamily="34" charset="0"/>
                           <a:ea typeface="Calibri" pitchFamily="34" charset="-122"/>
@@ -13163,7 +13118,7 @@
                   <a:tcPr marL="109728" marR="109728" marT="0" marB="0" anchor="ctr">
                     <a:lnL w="9525" cap="flat" cmpd="sng" algn="ctr">
                       <a:solidFill>
-                        <a:srgbClr val="22314F"/>
+                        <a:srgbClr val="CBD2CA"/>
                       </a:solidFill>
                       <a:prstDash val="solid"/>
                       <a:round/>
@@ -13172,7 +13127,7 @@
                     </a:lnL>
                     <a:lnR w="9525" cap="flat" cmpd="sng" algn="ctr">
                       <a:solidFill>
-                        <a:srgbClr val="22314F"/>
+                        <a:srgbClr val="CBD2CA"/>
                       </a:solidFill>
                       <a:prstDash val="solid"/>
                       <a:round/>
@@ -13181,7 +13136,7 @@
                     </a:lnR>
                     <a:lnT w="9525" cap="flat" cmpd="sng" algn="ctr">
                       <a:solidFill>
-                        <a:srgbClr val="22314F"/>
+                        <a:srgbClr val="CBD2CA"/>
                       </a:solidFill>
                       <a:prstDash val="solid"/>
                       <a:round/>
@@ -13190,7 +13145,7 @@
                     </a:lnT>
                     <a:lnB w="9525" cap="flat" cmpd="sng" algn="ctr">
                       <a:solidFill>
-                        <a:srgbClr val="22314F"/>
+                        <a:srgbClr val="CBD2CA"/>
                       </a:solidFill>
                       <a:prstDash val="solid"/>
                       <a:round/>
@@ -13198,7 +13153,7 @@
                       <a:tailEnd type="none" w="med" len="med"/>
                     </a:lnB>
                     <a:solidFill>
-                      <a:srgbClr val="111B2F"/>
+                      <a:srgbClr val="FAFBF8"/>
                     </a:solidFill>
                   </a:tcPr>
                 </a:tc>
@@ -13215,7 +13170,7 @@
                       <a:r>
                         <a:rPr lang="en-US" sz="1400" b="1" dirty="0">
                           <a:solidFill>
-                            <a:srgbClr val="E8EEFB"/>
+                            <a:srgbClr val="15211E"/>
                           </a:solidFill>
                           <a:latin typeface="Calibri" pitchFamily="34" charset="0"/>
                           <a:ea typeface="Calibri" pitchFamily="34" charset="-122"/>
@@ -13233,7 +13188,7 @@
                   <a:tcPr marL="109728" marR="109728" marT="0" marB="0" anchor="ctr">
                     <a:lnL w="9525" cap="flat" cmpd="sng" algn="ctr">
                       <a:solidFill>
-                        <a:srgbClr val="22314F"/>
+                        <a:srgbClr val="CBD2CA"/>
                       </a:solidFill>
                       <a:prstDash val="solid"/>
                       <a:round/>
@@ -13242,7 +13197,7 @@
                     </a:lnL>
                     <a:lnR w="9525" cap="flat" cmpd="sng" algn="ctr">
                       <a:solidFill>
-                        <a:srgbClr val="22314F"/>
+                        <a:srgbClr val="CBD2CA"/>
                       </a:solidFill>
                       <a:prstDash val="solid"/>
                       <a:round/>
@@ -13251,7 +13206,7 @@
                     </a:lnR>
                     <a:lnT w="9525" cap="flat" cmpd="sng" algn="ctr">
                       <a:solidFill>
-                        <a:srgbClr val="22314F"/>
+                        <a:srgbClr val="CBD2CA"/>
                       </a:solidFill>
                       <a:prstDash val="solid"/>
                       <a:round/>
@@ -13260,7 +13215,7 @@
                     </a:lnT>
                     <a:lnB w="9525" cap="flat" cmpd="sng" algn="ctr">
                       <a:solidFill>
-                        <a:srgbClr val="22314F"/>
+                        <a:srgbClr val="CBD2CA"/>
                       </a:solidFill>
                       <a:prstDash val="solid"/>
                       <a:round/>
@@ -13268,7 +13223,7 @@
                       <a:tailEnd type="none" w="med" len="med"/>
                     </a:lnB>
                     <a:solidFill>
-                      <a:srgbClr val="111B2F"/>
+                      <a:srgbClr val="FAFBF8"/>
                     </a:solidFill>
                   </a:tcPr>
                 </a:tc>
@@ -13283,7 +13238,7 @@
                       <a:r>
                         <a:rPr lang="en-US" sz="1400" dirty="0">
                           <a:solidFill>
-                            <a:srgbClr val="3DDC97"/>
+                            <a:srgbClr val="5B8A8F"/>
                           </a:solidFill>
                           <a:latin typeface="Calibri" pitchFamily="34" charset="0"/>
                           <a:ea typeface="Calibri" pitchFamily="34" charset="-122"/>
@@ -13301,7 +13256,7 @@
                   <a:tcPr marL="109728" marR="109728" marT="0" marB="0" anchor="ctr">
                     <a:lnL w="9525" cap="flat" cmpd="sng" algn="ctr">
                       <a:solidFill>
-                        <a:srgbClr val="22314F"/>
+                        <a:srgbClr val="CBD2CA"/>
                       </a:solidFill>
                       <a:prstDash val="solid"/>
                       <a:round/>
@@ -13310,7 +13265,7 @@
                     </a:lnL>
                     <a:lnR w="9525" cap="flat" cmpd="sng" algn="ctr">
                       <a:solidFill>
-                        <a:srgbClr val="22314F"/>
+                        <a:srgbClr val="CBD2CA"/>
                       </a:solidFill>
                       <a:prstDash val="solid"/>
                       <a:round/>
@@ -13319,7 +13274,7 @@
                     </a:lnR>
                     <a:lnT w="9525" cap="flat" cmpd="sng" algn="ctr">
                       <a:solidFill>
-                        <a:srgbClr val="22314F"/>
+                        <a:srgbClr val="CBD2CA"/>
                       </a:solidFill>
                       <a:prstDash val="solid"/>
                       <a:round/>
@@ -13328,7 +13283,7 @@
                     </a:lnT>
                     <a:lnB w="9525" cap="flat" cmpd="sng" algn="ctr">
                       <a:solidFill>
-                        <a:srgbClr val="22314F"/>
+                        <a:srgbClr val="CBD2CA"/>
                       </a:solidFill>
                       <a:prstDash val="solid"/>
                       <a:round/>
@@ -13336,7 +13291,7 @@
                       <a:tailEnd type="none" w="med" len="med"/>
                     </a:lnB>
                     <a:solidFill>
-                      <a:srgbClr val="111B2F"/>
+                      <a:srgbClr val="FAFBF8"/>
                     </a:solidFill>
                   </a:tcPr>
                 </a:tc>
@@ -13351,7 +13306,7 @@
                       <a:r>
                         <a:rPr lang="en-US" sz="1400" dirty="0">
                           <a:solidFill>
-                            <a:srgbClr val="E8EEFB"/>
+                            <a:srgbClr val="15211E"/>
                           </a:solidFill>
                           <a:latin typeface="Calibri" pitchFamily="34" charset="0"/>
                           <a:ea typeface="Calibri" pitchFamily="34" charset="-122"/>
@@ -13369,7 +13324,7 @@
                   <a:tcPr marL="109728" marR="109728" marT="0" marB="0" anchor="ctr">
                     <a:lnL w="9525" cap="flat" cmpd="sng" algn="ctr">
                       <a:solidFill>
-                        <a:srgbClr val="22314F"/>
+                        <a:srgbClr val="CBD2CA"/>
                       </a:solidFill>
                       <a:prstDash val="solid"/>
                       <a:round/>
@@ -13378,7 +13333,7 @@
                     </a:lnL>
                     <a:lnR w="9525" cap="flat" cmpd="sng" algn="ctr">
                       <a:solidFill>
-                        <a:srgbClr val="22314F"/>
+                        <a:srgbClr val="CBD2CA"/>
                       </a:solidFill>
                       <a:prstDash val="solid"/>
                       <a:round/>
@@ -13387,7 +13342,7 @@
                     </a:lnR>
                     <a:lnT w="9525" cap="flat" cmpd="sng" algn="ctr">
                       <a:solidFill>
-                        <a:srgbClr val="22314F"/>
+                        <a:srgbClr val="CBD2CA"/>
                       </a:solidFill>
                       <a:prstDash val="solid"/>
                       <a:round/>
@@ -13396,7 +13351,7 @@
                     </a:lnT>
                     <a:lnB w="9525" cap="flat" cmpd="sng" algn="ctr">
                       <a:solidFill>
-                        <a:srgbClr val="22314F"/>
+                        <a:srgbClr val="CBD2CA"/>
                       </a:solidFill>
                       <a:prstDash val="solid"/>
                       <a:round/>
@@ -13404,7 +13359,7 @@
                       <a:tailEnd type="none" w="med" len="med"/>
                     </a:lnB>
                     <a:solidFill>
-                      <a:srgbClr val="111B2F"/>
+                      <a:srgbClr val="FAFBF8"/>
                     </a:solidFill>
                   </a:tcPr>
                 </a:tc>
@@ -13419,7 +13374,7 @@
                       <a:r>
                         <a:rPr lang="en-US" sz="1400" dirty="0">
                           <a:solidFill>
-                            <a:srgbClr val="E8EEFB"/>
+                            <a:srgbClr val="15211E"/>
                           </a:solidFill>
                           <a:latin typeface="Calibri" pitchFamily="34" charset="0"/>
                           <a:ea typeface="Calibri" pitchFamily="34" charset="-122"/>
@@ -13437,7 +13392,7 @@
                   <a:tcPr marL="109728" marR="109728" marT="0" marB="0" anchor="ctr">
                     <a:lnL w="9525" cap="flat" cmpd="sng" algn="ctr">
                       <a:solidFill>
-                        <a:srgbClr val="22314F"/>
+                        <a:srgbClr val="CBD2CA"/>
                       </a:solidFill>
                       <a:prstDash val="solid"/>
                       <a:round/>
@@ -13446,7 +13401,7 @@
                     </a:lnL>
                     <a:lnR w="9525" cap="flat" cmpd="sng" algn="ctr">
                       <a:solidFill>
-                        <a:srgbClr val="22314F"/>
+                        <a:srgbClr val="CBD2CA"/>
                       </a:solidFill>
                       <a:prstDash val="solid"/>
                       <a:round/>
@@ -13455,7 +13410,7 @@
                     </a:lnR>
                     <a:lnT w="9525" cap="flat" cmpd="sng" algn="ctr">
                       <a:solidFill>
-                        <a:srgbClr val="22314F"/>
+                        <a:srgbClr val="CBD2CA"/>
                       </a:solidFill>
                       <a:prstDash val="solid"/>
                       <a:round/>
@@ -13464,7 +13419,7 @@
                     </a:lnT>
                     <a:lnB w="9525" cap="flat" cmpd="sng" algn="ctr">
                       <a:solidFill>
-                        <a:srgbClr val="22314F"/>
+                        <a:srgbClr val="CBD2CA"/>
                       </a:solidFill>
                       <a:prstDash val="solid"/>
                       <a:round/>
@@ -13472,7 +13427,7 @@
                       <a:tailEnd type="none" w="med" len="med"/>
                     </a:lnB>
                     <a:solidFill>
-                      <a:srgbClr val="111B2F"/>
+                      <a:srgbClr val="FAFBF8"/>
                     </a:solidFill>
                   </a:tcPr>
                 </a:tc>
@@ -13489,7 +13444,7 @@
                       <a:r>
                         <a:rPr lang="en-US" sz="1400" b="1" dirty="0">
                           <a:solidFill>
-                            <a:srgbClr val="E8EEFB"/>
+                            <a:srgbClr val="15211E"/>
                           </a:solidFill>
                           <a:latin typeface="Calibri" pitchFamily="34" charset="0"/>
                           <a:ea typeface="Calibri" pitchFamily="34" charset="-122"/>
@@ -13507,7 +13462,7 @@
                   <a:tcPr marL="109728" marR="109728" marT="0" marB="0" anchor="ctr">
                     <a:lnL w="9525" cap="flat" cmpd="sng" algn="ctr">
                       <a:solidFill>
-                        <a:srgbClr val="22314F"/>
+                        <a:srgbClr val="CBD2CA"/>
                       </a:solidFill>
                       <a:prstDash val="solid"/>
                       <a:round/>
@@ -13516,7 +13471,7 @@
                     </a:lnL>
                     <a:lnR w="9525" cap="flat" cmpd="sng" algn="ctr">
                       <a:solidFill>
-                        <a:srgbClr val="22314F"/>
+                        <a:srgbClr val="CBD2CA"/>
                       </a:solidFill>
                       <a:prstDash val="solid"/>
                       <a:round/>
@@ -13525,7 +13480,7 @@
                     </a:lnR>
                     <a:lnT w="9525" cap="flat" cmpd="sng" algn="ctr">
                       <a:solidFill>
-                        <a:srgbClr val="22314F"/>
+                        <a:srgbClr val="CBD2CA"/>
                       </a:solidFill>
                       <a:prstDash val="solid"/>
                       <a:round/>
@@ -13534,7 +13489,7 @@
                     </a:lnT>
                     <a:lnB w="9525" cap="flat" cmpd="sng" algn="ctr">
                       <a:solidFill>
-                        <a:srgbClr val="22314F"/>
+                        <a:srgbClr val="CBD2CA"/>
                       </a:solidFill>
                       <a:prstDash val="solid"/>
                       <a:round/>
@@ -13542,7 +13497,7 @@
                       <a:tailEnd type="none" w="med" len="med"/>
                     </a:lnB>
                     <a:solidFill>
-                      <a:srgbClr val="111B2F"/>
+                      <a:srgbClr val="FAFBF8"/>
                     </a:solidFill>
                   </a:tcPr>
                 </a:tc>
@@ -13557,7 +13512,7 @@
                       <a:r>
                         <a:rPr lang="en-US" sz="1400" dirty="0">
                           <a:solidFill>
-                            <a:srgbClr val="3DDC97"/>
+                            <a:srgbClr val="5B8A8F"/>
                           </a:solidFill>
                           <a:latin typeface="Calibri" pitchFamily="34" charset="0"/>
                           <a:ea typeface="Calibri" pitchFamily="34" charset="-122"/>
@@ -13575,7 +13530,7 @@
                   <a:tcPr marL="109728" marR="109728" marT="0" marB="0" anchor="ctr">
                     <a:lnL w="9525" cap="flat" cmpd="sng" algn="ctr">
                       <a:solidFill>
-                        <a:srgbClr val="22314F"/>
+                        <a:srgbClr val="CBD2CA"/>
                       </a:solidFill>
                       <a:prstDash val="solid"/>
                       <a:round/>
@@ -13584,7 +13539,7 @@
                     </a:lnL>
                     <a:lnR w="9525" cap="flat" cmpd="sng" algn="ctr">
                       <a:solidFill>
-                        <a:srgbClr val="22314F"/>
+                        <a:srgbClr val="CBD2CA"/>
                       </a:solidFill>
                       <a:prstDash val="solid"/>
                       <a:round/>
@@ -13593,7 +13548,7 @@
                     </a:lnR>
                     <a:lnT w="9525" cap="flat" cmpd="sng" algn="ctr">
                       <a:solidFill>
-                        <a:srgbClr val="22314F"/>
+                        <a:srgbClr val="CBD2CA"/>
                       </a:solidFill>
                       <a:prstDash val="solid"/>
                       <a:round/>
@@ -13602,7 +13557,7 @@
                     </a:lnT>
                     <a:lnB w="9525" cap="flat" cmpd="sng" algn="ctr">
                       <a:solidFill>
-                        <a:srgbClr val="22314F"/>
+                        <a:srgbClr val="CBD2CA"/>
                       </a:solidFill>
                       <a:prstDash val="solid"/>
                       <a:round/>
@@ -13610,7 +13565,7 @@
                       <a:tailEnd type="none" w="med" len="med"/>
                     </a:lnB>
                     <a:solidFill>
-                      <a:srgbClr val="111B2F"/>
+                      <a:srgbClr val="FAFBF8"/>
                     </a:solidFill>
                   </a:tcPr>
                 </a:tc>
@@ -13625,7 +13580,7 @@
                       <a:r>
                         <a:rPr lang="en-US" sz="1400" dirty="0">
                           <a:solidFill>
-                            <a:srgbClr val="E8EEFB"/>
+                            <a:srgbClr val="15211E"/>
                           </a:solidFill>
                           <a:latin typeface="Calibri" pitchFamily="34" charset="0"/>
                           <a:ea typeface="Calibri" pitchFamily="34" charset="-122"/>
@@ -13643,7 +13598,7 @@
                   <a:tcPr marL="109728" marR="109728" marT="0" marB="0" anchor="ctr">
                     <a:lnL w="9525" cap="flat" cmpd="sng" algn="ctr">
                       <a:solidFill>
-                        <a:srgbClr val="22314F"/>
+                        <a:srgbClr val="CBD2CA"/>
                       </a:solidFill>
                       <a:prstDash val="solid"/>
                       <a:round/>
@@ -13652,7 +13607,7 @@
                     </a:lnL>
                     <a:lnR w="9525" cap="flat" cmpd="sng" algn="ctr">
                       <a:solidFill>
-                        <a:srgbClr val="22314F"/>
+                        <a:srgbClr val="CBD2CA"/>
                       </a:solidFill>
                       <a:prstDash val="solid"/>
                       <a:round/>
@@ -13661,7 +13616,7 @@
                     </a:lnR>
                     <a:lnT w="9525" cap="flat" cmpd="sng" algn="ctr">
                       <a:solidFill>
-                        <a:srgbClr val="22314F"/>
+                        <a:srgbClr val="CBD2CA"/>
                       </a:solidFill>
                       <a:prstDash val="solid"/>
                       <a:round/>
@@ -13670,7 +13625,7 @@
                     </a:lnT>
                     <a:lnB w="9525" cap="flat" cmpd="sng" algn="ctr">
                       <a:solidFill>
-                        <a:srgbClr val="22314F"/>
+                        <a:srgbClr val="CBD2CA"/>
                       </a:solidFill>
                       <a:prstDash val="solid"/>
                       <a:round/>
@@ -13678,7 +13633,7 @@
                       <a:tailEnd type="none" w="med" len="med"/>
                     </a:lnB>
                     <a:solidFill>
-                      <a:srgbClr val="111B2F"/>
+                      <a:srgbClr val="FAFBF8"/>
                     </a:solidFill>
                   </a:tcPr>
                 </a:tc>
@@ -13693,7 +13648,7 @@
                       <a:r>
                         <a:rPr lang="en-US" sz="1400" dirty="0">
                           <a:solidFill>
-                            <a:srgbClr val="E8EEFB"/>
+                            <a:srgbClr val="15211E"/>
                           </a:solidFill>
                           <a:latin typeface="Calibri" pitchFamily="34" charset="0"/>
                           <a:ea typeface="Calibri" pitchFamily="34" charset="-122"/>
@@ -13711,7 +13666,7 @@
                   <a:tcPr marL="109728" marR="109728" marT="0" marB="0" anchor="ctr">
                     <a:lnL w="9525" cap="flat" cmpd="sng" algn="ctr">
                       <a:solidFill>
-                        <a:srgbClr val="22314F"/>
+                        <a:srgbClr val="CBD2CA"/>
                       </a:solidFill>
                       <a:prstDash val="solid"/>
                       <a:round/>
@@ -13720,7 +13675,7 @@
                     </a:lnL>
                     <a:lnR w="9525" cap="flat" cmpd="sng" algn="ctr">
                       <a:solidFill>
-                        <a:srgbClr val="22314F"/>
+                        <a:srgbClr val="CBD2CA"/>
                       </a:solidFill>
                       <a:prstDash val="solid"/>
                       <a:round/>
@@ -13729,7 +13684,7 @@
                     </a:lnR>
                     <a:lnT w="9525" cap="flat" cmpd="sng" algn="ctr">
                       <a:solidFill>
-                        <a:srgbClr val="22314F"/>
+                        <a:srgbClr val="CBD2CA"/>
                       </a:solidFill>
                       <a:prstDash val="solid"/>
                       <a:round/>
@@ -13738,7 +13693,7 @@
                     </a:lnT>
                     <a:lnB w="9525" cap="flat" cmpd="sng" algn="ctr">
                       <a:solidFill>
-                        <a:srgbClr val="22314F"/>
+                        <a:srgbClr val="CBD2CA"/>
                       </a:solidFill>
                       <a:prstDash val="solid"/>
                       <a:round/>
@@ -13746,7 +13701,7 @@
                       <a:tailEnd type="none" w="med" len="med"/>
                     </a:lnB>
                     <a:solidFill>
-                      <a:srgbClr val="111B2F"/>
+                      <a:srgbClr val="FAFBF8"/>
                     </a:solidFill>
                   </a:tcPr>
                 </a:tc>
@@ -13763,7 +13718,7 @@
                       <a:r>
                         <a:rPr lang="en-US" sz="1400" b="1" dirty="0">
                           <a:solidFill>
-                            <a:srgbClr val="E8EEFB"/>
+                            <a:srgbClr val="15211E"/>
                           </a:solidFill>
                           <a:latin typeface="Calibri" pitchFamily="34" charset="0"/>
                           <a:ea typeface="Calibri" pitchFamily="34" charset="-122"/>
@@ -13781,7 +13736,7 @@
                   <a:tcPr marL="109728" marR="109728" marT="0" marB="0" anchor="ctr">
                     <a:lnL w="9525" cap="flat" cmpd="sng" algn="ctr">
                       <a:solidFill>
-                        <a:srgbClr val="22314F"/>
+                        <a:srgbClr val="CBD2CA"/>
                       </a:solidFill>
                       <a:prstDash val="solid"/>
                       <a:round/>
@@ -13790,7 +13745,7 @@
                     </a:lnL>
                     <a:lnR w="9525" cap="flat" cmpd="sng" algn="ctr">
                       <a:solidFill>
-                        <a:srgbClr val="22314F"/>
+                        <a:srgbClr val="CBD2CA"/>
                       </a:solidFill>
                       <a:prstDash val="solid"/>
                       <a:round/>
@@ -13799,7 +13754,7 @@
                     </a:lnR>
                     <a:lnT w="9525" cap="flat" cmpd="sng" algn="ctr">
                       <a:solidFill>
-                        <a:srgbClr val="22314F"/>
+                        <a:srgbClr val="CBD2CA"/>
                       </a:solidFill>
                       <a:prstDash val="solid"/>
                       <a:round/>
@@ -13808,7 +13763,7 @@
                     </a:lnT>
                     <a:lnB w="9525" cap="flat" cmpd="sng" algn="ctr">
                       <a:solidFill>
-                        <a:srgbClr val="22314F"/>
+                        <a:srgbClr val="CBD2CA"/>
                       </a:solidFill>
                       <a:prstDash val="solid"/>
                       <a:round/>
@@ -13816,7 +13771,7 @@
                       <a:tailEnd type="none" w="med" len="med"/>
                     </a:lnB>
                     <a:solidFill>
-                      <a:srgbClr val="111B2F"/>
+                      <a:srgbClr val="FAFBF8"/>
                     </a:solidFill>
                   </a:tcPr>
                 </a:tc>
@@ -13831,7 +13786,7 @@
                       <a:r>
                         <a:rPr lang="en-US" sz="1400" dirty="0">
                           <a:solidFill>
-                            <a:srgbClr val="3DDC97"/>
+                            <a:srgbClr val="5B8A8F"/>
                           </a:solidFill>
                           <a:latin typeface="Calibri" pitchFamily="34" charset="0"/>
                           <a:ea typeface="Calibri" pitchFamily="34" charset="-122"/>
@@ -13849,7 +13804,7 @@
                   <a:tcPr marL="109728" marR="109728" marT="0" marB="0" anchor="ctr">
                     <a:lnL w="9525" cap="flat" cmpd="sng" algn="ctr">
                       <a:solidFill>
-                        <a:srgbClr val="22314F"/>
+                        <a:srgbClr val="CBD2CA"/>
                       </a:solidFill>
                       <a:prstDash val="solid"/>
                       <a:round/>
@@ -13858,7 +13813,7 @@
                     </a:lnL>
                     <a:lnR w="9525" cap="flat" cmpd="sng" algn="ctr">
                       <a:solidFill>
-                        <a:srgbClr val="22314F"/>
+                        <a:srgbClr val="CBD2CA"/>
                       </a:solidFill>
                       <a:prstDash val="solid"/>
                       <a:round/>
@@ -13867,7 +13822,7 @@
                     </a:lnR>
                     <a:lnT w="9525" cap="flat" cmpd="sng" algn="ctr">
                       <a:solidFill>
-                        <a:srgbClr val="22314F"/>
+                        <a:srgbClr val="CBD2CA"/>
                       </a:solidFill>
                       <a:prstDash val="solid"/>
                       <a:round/>
@@ -13876,7 +13831,7 @@
                     </a:lnT>
                     <a:lnB w="9525" cap="flat" cmpd="sng" algn="ctr">
                       <a:solidFill>
-                        <a:srgbClr val="22314F"/>
+                        <a:srgbClr val="CBD2CA"/>
                       </a:solidFill>
                       <a:prstDash val="solid"/>
                       <a:round/>
@@ -13884,7 +13839,7 @@
                       <a:tailEnd type="none" w="med" len="med"/>
                     </a:lnB>
                     <a:solidFill>
-                      <a:srgbClr val="111B2F"/>
+                      <a:srgbClr val="FAFBF8"/>
                     </a:solidFill>
                   </a:tcPr>
                 </a:tc>
@@ -13899,7 +13854,7 @@
                       <a:r>
                         <a:rPr lang="en-US" sz="1400" dirty="0">
                           <a:solidFill>
-                            <a:srgbClr val="E8EEFB"/>
+                            <a:srgbClr val="15211E"/>
                           </a:solidFill>
                           <a:latin typeface="Calibri" pitchFamily="34" charset="0"/>
                           <a:ea typeface="Calibri" pitchFamily="34" charset="-122"/>
@@ -13917,7 +13872,7 @@
                   <a:tcPr marL="109728" marR="109728" marT="0" marB="0" anchor="ctr">
                     <a:lnL w="9525" cap="flat" cmpd="sng" algn="ctr">
                       <a:solidFill>
-                        <a:srgbClr val="22314F"/>
+                        <a:srgbClr val="CBD2CA"/>
                       </a:solidFill>
                       <a:prstDash val="solid"/>
                       <a:round/>
@@ -13926,7 +13881,7 @@
                     </a:lnL>
                     <a:lnR w="9525" cap="flat" cmpd="sng" algn="ctr">
                       <a:solidFill>
-                        <a:srgbClr val="22314F"/>
+                        <a:srgbClr val="CBD2CA"/>
                       </a:solidFill>
                       <a:prstDash val="solid"/>
                       <a:round/>
@@ -13935,7 +13890,7 @@
                     </a:lnR>
                     <a:lnT w="9525" cap="flat" cmpd="sng" algn="ctr">
                       <a:solidFill>
-                        <a:srgbClr val="22314F"/>
+                        <a:srgbClr val="CBD2CA"/>
                       </a:solidFill>
                       <a:prstDash val="solid"/>
                       <a:round/>
@@ -13944,7 +13899,7 @@
                     </a:lnT>
                     <a:lnB w="9525" cap="flat" cmpd="sng" algn="ctr">
                       <a:solidFill>
-                        <a:srgbClr val="22314F"/>
+                        <a:srgbClr val="CBD2CA"/>
                       </a:solidFill>
                       <a:prstDash val="solid"/>
                       <a:round/>
@@ -13952,7 +13907,7 @@
                       <a:tailEnd type="none" w="med" len="med"/>
                     </a:lnB>
                     <a:solidFill>
-                      <a:srgbClr val="111B2F"/>
+                      <a:srgbClr val="FAFBF8"/>
                     </a:solidFill>
                   </a:tcPr>
                 </a:tc>
@@ -13967,7 +13922,7 @@
                       <a:r>
                         <a:rPr lang="en-US" sz="1400" dirty="0">
                           <a:solidFill>
-                            <a:srgbClr val="E8EEFB"/>
+                            <a:srgbClr val="15211E"/>
                           </a:solidFill>
                           <a:latin typeface="Calibri" pitchFamily="34" charset="0"/>
                           <a:ea typeface="Calibri" pitchFamily="34" charset="-122"/>
@@ -13985,7 +13940,7 @@
                   <a:tcPr marL="109728" marR="109728" marT="0" marB="0" anchor="ctr">
                     <a:lnL w="9525" cap="flat" cmpd="sng" algn="ctr">
                       <a:solidFill>
-                        <a:srgbClr val="22314F"/>
+                        <a:srgbClr val="CBD2CA"/>
                       </a:solidFill>
                       <a:prstDash val="solid"/>
                       <a:round/>
@@ -13994,7 +13949,7 @@
                     </a:lnL>
                     <a:lnR w="9525" cap="flat" cmpd="sng" algn="ctr">
                       <a:solidFill>
-                        <a:srgbClr val="22314F"/>
+                        <a:srgbClr val="CBD2CA"/>
                       </a:solidFill>
                       <a:prstDash val="solid"/>
                       <a:round/>
@@ -14003,7 +13958,7 @@
                     </a:lnR>
                     <a:lnT w="9525" cap="flat" cmpd="sng" algn="ctr">
                       <a:solidFill>
-                        <a:srgbClr val="22314F"/>
+                        <a:srgbClr val="CBD2CA"/>
                       </a:solidFill>
                       <a:prstDash val="solid"/>
                       <a:round/>
@@ -14012,7 +13967,7 @@
                     </a:lnT>
                     <a:lnB w="9525" cap="flat" cmpd="sng" algn="ctr">
                       <a:solidFill>
-                        <a:srgbClr val="22314F"/>
+                        <a:srgbClr val="CBD2CA"/>
                       </a:solidFill>
                       <a:prstDash val="solid"/>
                       <a:round/>
@@ -14020,7 +13975,7 @@
                       <a:tailEnd type="none" w="med" len="med"/>
                     </a:lnB>
                     <a:solidFill>
-                      <a:srgbClr val="111B2F"/>
+                      <a:srgbClr val="FAFBF8"/>
                     </a:solidFill>
                   </a:tcPr>
                 </a:tc>
@@ -14037,7 +13992,7 @@
                       <a:r>
                         <a:rPr lang="en-US" sz="1400" b="1" dirty="0">
                           <a:solidFill>
-                            <a:srgbClr val="E8EEFB"/>
+                            <a:srgbClr val="15211E"/>
                           </a:solidFill>
                           <a:latin typeface="Calibri" pitchFamily="34" charset="0"/>
                           <a:ea typeface="Calibri" pitchFamily="34" charset="-122"/>
@@ -14055,7 +14010,7 @@
                   <a:tcPr marL="109728" marR="109728" marT="0" marB="0" anchor="ctr">
                     <a:lnL w="9525" cap="flat" cmpd="sng" algn="ctr">
                       <a:solidFill>
-                        <a:srgbClr val="22314F"/>
+                        <a:srgbClr val="CBD2CA"/>
                       </a:solidFill>
                       <a:prstDash val="solid"/>
                       <a:round/>
@@ -14064,7 +14019,7 @@
                     </a:lnL>
                     <a:lnR w="9525" cap="flat" cmpd="sng" algn="ctr">
                       <a:solidFill>
-                        <a:srgbClr val="22314F"/>
+                        <a:srgbClr val="CBD2CA"/>
                       </a:solidFill>
                       <a:prstDash val="solid"/>
                       <a:round/>
@@ -14073,7 +14028,7 @@
                     </a:lnR>
                     <a:lnT w="9525" cap="flat" cmpd="sng" algn="ctr">
                       <a:solidFill>
-                        <a:srgbClr val="22314F"/>
+                        <a:srgbClr val="CBD2CA"/>
                       </a:solidFill>
                       <a:prstDash val="solid"/>
                       <a:round/>
@@ -14082,7 +14037,7 @@
                     </a:lnT>
                     <a:lnB w="9525" cap="flat" cmpd="sng" algn="ctr">
                       <a:solidFill>
-                        <a:srgbClr val="22314F"/>
+                        <a:srgbClr val="CBD2CA"/>
                       </a:solidFill>
                       <a:prstDash val="solid"/>
                       <a:round/>
@@ -14090,7 +14045,7 @@
                       <a:tailEnd type="none" w="med" len="med"/>
                     </a:lnB>
                     <a:solidFill>
-                      <a:srgbClr val="111B2F"/>
+                      <a:srgbClr val="FAFBF8"/>
                     </a:solidFill>
                   </a:tcPr>
                 </a:tc>
@@ -14105,7 +14060,7 @@
                       <a:r>
                         <a:rPr lang="en-US" sz="1400" dirty="0">
                           <a:solidFill>
-                            <a:srgbClr val="8DA0C2"/>
+                            <a:srgbClr val="4F5D58"/>
                           </a:solidFill>
                           <a:latin typeface="Calibri" pitchFamily="34" charset="0"/>
                           <a:ea typeface="Calibri" pitchFamily="34" charset="-122"/>
@@ -14123,7 +14078,7 @@
                   <a:tcPr marL="109728" marR="109728" marT="0" marB="0" anchor="ctr">
                     <a:lnL w="9525" cap="flat" cmpd="sng" algn="ctr">
                       <a:solidFill>
-                        <a:srgbClr val="22314F"/>
+                        <a:srgbClr val="CBD2CA"/>
                       </a:solidFill>
                       <a:prstDash val="solid"/>
                       <a:round/>
@@ -14132,7 +14087,7 @@
                     </a:lnL>
                     <a:lnR w="9525" cap="flat" cmpd="sng" algn="ctr">
                       <a:solidFill>
-                        <a:srgbClr val="22314F"/>
+                        <a:srgbClr val="CBD2CA"/>
                       </a:solidFill>
                       <a:prstDash val="solid"/>
                       <a:round/>
@@ -14141,7 +14096,7 @@
                     </a:lnR>
                     <a:lnT w="9525" cap="flat" cmpd="sng" algn="ctr">
                       <a:solidFill>
-                        <a:srgbClr val="22314F"/>
+                        <a:srgbClr val="CBD2CA"/>
                       </a:solidFill>
                       <a:prstDash val="solid"/>
                       <a:round/>
@@ -14150,7 +14105,7 @@
                     </a:lnT>
                     <a:lnB w="9525" cap="flat" cmpd="sng" algn="ctr">
                       <a:solidFill>
-                        <a:srgbClr val="22314F"/>
+                        <a:srgbClr val="CBD2CA"/>
                       </a:solidFill>
                       <a:prstDash val="solid"/>
                       <a:round/>
@@ -14158,7 +14113,7 @@
                       <a:tailEnd type="none" w="med" len="med"/>
                     </a:lnB>
                     <a:solidFill>
-                      <a:srgbClr val="111B2F"/>
+                      <a:srgbClr val="FAFBF8"/>
                     </a:solidFill>
                   </a:tcPr>
                 </a:tc>
@@ -14173,7 +14128,7 @@
                       <a:r>
                         <a:rPr lang="en-US" sz="1400" dirty="0">
                           <a:solidFill>
-                            <a:srgbClr val="E8EEFB"/>
+                            <a:srgbClr val="15211E"/>
                           </a:solidFill>
                           <a:latin typeface="Calibri" pitchFamily="34" charset="0"/>
                           <a:ea typeface="Calibri" pitchFamily="34" charset="-122"/>
@@ -14191,7 +14146,7 @@
                   <a:tcPr marL="109728" marR="109728" marT="0" marB="0" anchor="ctr">
                     <a:lnL w="9525" cap="flat" cmpd="sng" algn="ctr">
                       <a:solidFill>
-                        <a:srgbClr val="22314F"/>
+                        <a:srgbClr val="CBD2CA"/>
                       </a:solidFill>
                       <a:prstDash val="solid"/>
                       <a:round/>
@@ -14200,7 +14155,7 @@
                     </a:lnL>
                     <a:lnR w="9525" cap="flat" cmpd="sng" algn="ctr">
                       <a:solidFill>
-                        <a:srgbClr val="22314F"/>
+                        <a:srgbClr val="CBD2CA"/>
                       </a:solidFill>
                       <a:prstDash val="solid"/>
                       <a:round/>
@@ -14209,7 +14164,7 @@
                     </a:lnR>
                     <a:lnT w="9525" cap="flat" cmpd="sng" algn="ctr">
                       <a:solidFill>
-                        <a:srgbClr val="22314F"/>
+                        <a:srgbClr val="CBD2CA"/>
                       </a:solidFill>
                       <a:prstDash val="solid"/>
                       <a:round/>
@@ -14218,7 +14173,7 @@
                     </a:lnT>
                     <a:lnB w="9525" cap="flat" cmpd="sng" algn="ctr">
                       <a:solidFill>
-                        <a:srgbClr val="22314F"/>
+                        <a:srgbClr val="CBD2CA"/>
                       </a:solidFill>
                       <a:prstDash val="solid"/>
                       <a:round/>
@@ -14226,7 +14181,7 @@
                       <a:tailEnd type="none" w="med" len="med"/>
                     </a:lnB>
                     <a:solidFill>
-                      <a:srgbClr val="111B2F"/>
+                      <a:srgbClr val="FAFBF8"/>
                     </a:solidFill>
                   </a:tcPr>
                 </a:tc>
@@ -14241,7 +14196,7 @@
                       <a:r>
                         <a:rPr lang="en-US" sz="1400" dirty="0">
                           <a:solidFill>
-                            <a:srgbClr val="E8EEFB"/>
+                            <a:srgbClr val="15211E"/>
                           </a:solidFill>
                           <a:latin typeface="Calibri" pitchFamily="34" charset="0"/>
                           <a:ea typeface="Calibri" pitchFamily="34" charset="-122"/>
@@ -14259,7 +14214,7 @@
                   <a:tcPr marL="109728" marR="109728" marT="0" marB="0" anchor="ctr">
                     <a:lnL w="9525" cap="flat" cmpd="sng" algn="ctr">
                       <a:solidFill>
-                        <a:srgbClr val="22314F"/>
+                        <a:srgbClr val="CBD2CA"/>
                       </a:solidFill>
                       <a:prstDash val="solid"/>
                       <a:round/>
@@ -14268,7 +14223,7 @@
                     </a:lnL>
                     <a:lnR w="9525" cap="flat" cmpd="sng" algn="ctr">
                       <a:solidFill>
-                        <a:srgbClr val="22314F"/>
+                        <a:srgbClr val="CBD2CA"/>
                       </a:solidFill>
                       <a:prstDash val="solid"/>
                       <a:round/>
@@ -14277,7 +14232,7 @@
                     </a:lnR>
                     <a:lnT w="9525" cap="flat" cmpd="sng" algn="ctr">
                       <a:solidFill>
-                        <a:srgbClr val="22314F"/>
+                        <a:srgbClr val="CBD2CA"/>
                       </a:solidFill>
                       <a:prstDash val="solid"/>
                       <a:round/>
@@ -14286,7 +14241,7 @@
                     </a:lnT>
                     <a:lnB w="9525" cap="flat" cmpd="sng" algn="ctr">
                       <a:solidFill>
-                        <a:srgbClr val="22314F"/>
+                        <a:srgbClr val="CBD2CA"/>
                       </a:solidFill>
                       <a:prstDash val="solid"/>
                       <a:round/>
@@ -14294,7 +14249,7 @@
                       <a:tailEnd type="none" w="med" len="med"/>
                     </a:lnB>
                     <a:solidFill>
-                      <a:srgbClr val="111B2F"/>
+                      <a:srgbClr val="FAFBF8"/>
                     </a:solidFill>
                   </a:tcPr>
                 </a:tc>
@@ -14311,7 +14266,7 @@
                       <a:r>
                         <a:rPr lang="en-US" sz="1400" b="1" dirty="0">
                           <a:solidFill>
-                            <a:srgbClr val="E8EEFB"/>
+                            <a:srgbClr val="15211E"/>
                           </a:solidFill>
                           <a:latin typeface="Calibri" pitchFamily="34" charset="0"/>
                           <a:ea typeface="Calibri" pitchFamily="34" charset="-122"/>
@@ -14329,7 +14284,7 @@
                   <a:tcPr marL="109728" marR="109728" marT="0" marB="0" anchor="ctr">
                     <a:lnL w="9525" cap="flat" cmpd="sng" algn="ctr">
                       <a:solidFill>
-                        <a:srgbClr val="22314F"/>
+                        <a:srgbClr val="CBD2CA"/>
                       </a:solidFill>
                       <a:prstDash val="solid"/>
                       <a:round/>
@@ -14338,7 +14293,7 @@
                     </a:lnL>
                     <a:lnR w="9525" cap="flat" cmpd="sng" algn="ctr">
                       <a:solidFill>
-                        <a:srgbClr val="22314F"/>
+                        <a:srgbClr val="CBD2CA"/>
                       </a:solidFill>
                       <a:prstDash val="solid"/>
                       <a:round/>
@@ -14347,7 +14302,7 @@
                     </a:lnR>
                     <a:lnT w="9525" cap="flat" cmpd="sng" algn="ctr">
                       <a:solidFill>
-                        <a:srgbClr val="22314F"/>
+                        <a:srgbClr val="CBD2CA"/>
                       </a:solidFill>
                       <a:prstDash val="solid"/>
                       <a:round/>
@@ -14356,7 +14311,7 @@
                     </a:lnT>
                     <a:lnB w="9525" cap="flat" cmpd="sng" algn="ctr">
                       <a:solidFill>
-                        <a:srgbClr val="22314F"/>
+                        <a:srgbClr val="CBD2CA"/>
                       </a:solidFill>
                       <a:prstDash val="solid"/>
                       <a:round/>
@@ -14364,7 +14319,7 @@
                       <a:tailEnd type="none" w="med" len="med"/>
                     </a:lnB>
                     <a:solidFill>
-                      <a:srgbClr val="111B2F"/>
+                      <a:srgbClr val="FAFBF8"/>
                     </a:solidFill>
                   </a:tcPr>
                 </a:tc>
@@ -14379,7 +14334,7 @@
                       <a:r>
                         <a:rPr lang="en-US" sz="1400" dirty="0">
                           <a:solidFill>
-                            <a:srgbClr val="8DA0C2"/>
+                            <a:srgbClr val="4F5D58"/>
                           </a:solidFill>
                           <a:latin typeface="Calibri" pitchFamily="34" charset="0"/>
                           <a:ea typeface="Calibri" pitchFamily="34" charset="-122"/>
@@ -14397,7 +14352,7 @@
                   <a:tcPr marL="109728" marR="109728" marT="0" marB="0" anchor="ctr">
                     <a:lnL w="9525" cap="flat" cmpd="sng" algn="ctr">
                       <a:solidFill>
-                        <a:srgbClr val="22314F"/>
+                        <a:srgbClr val="CBD2CA"/>
                       </a:solidFill>
                       <a:prstDash val="solid"/>
                       <a:round/>
@@ -14406,7 +14361,7 @@
                     </a:lnL>
                     <a:lnR w="9525" cap="flat" cmpd="sng" algn="ctr">
                       <a:solidFill>
-                        <a:srgbClr val="22314F"/>
+                        <a:srgbClr val="CBD2CA"/>
                       </a:solidFill>
                       <a:prstDash val="solid"/>
                       <a:round/>
@@ -14415,7 +14370,7 @@
                     </a:lnR>
                     <a:lnT w="9525" cap="flat" cmpd="sng" algn="ctr">
                       <a:solidFill>
-                        <a:srgbClr val="22314F"/>
+                        <a:srgbClr val="CBD2CA"/>
                       </a:solidFill>
                       <a:prstDash val="solid"/>
                       <a:round/>
@@ -14424,7 +14379,7 @@
                     </a:lnT>
                     <a:lnB w="9525" cap="flat" cmpd="sng" algn="ctr">
                       <a:solidFill>
-                        <a:srgbClr val="22314F"/>
+                        <a:srgbClr val="CBD2CA"/>
                       </a:solidFill>
                       <a:prstDash val="solid"/>
                       <a:round/>
@@ -14432,7 +14387,7 @@
                       <a:tailEnd type="none" w="med" len="med"/>
                     </a:lnB>
                     <a:solidFill>
-                      <a:srgbClr val="111B2F"/>
+                      <a:srgbClr val="FAFBF8"/>
                     </a:solidFill>
                   </a:tcPr>
                 </a:tc>
@@ -14447,7 +14402,7 @@
                       <a:r>
                         <a:rPr lang="en-US" sz="1400" dirty="0">
                           <a:solidFill>
-                            <a:srgbClr val="E8EEFB"/>
+                            <a:srgbClr val="15211E"/>
                           </a:solidFill>
                           <a:latin typeface="Calibri" pitchFamily="34" charset="0"/>
                           <a:ea typeface="Calibri" pitchFamily="34" charset="-122"/>
@@ -14465,7 +14420,7 @@
                   <a:tcPr marL="109728" marR="109728" marT="0" marB="0" anchor="ctr">
                     <a:lnL w="9525" cap="flat" cmpd="sng" algn="ctr">
                       <a:solidFill>
-                        <a:srgbClr val="22314F"/>
+                        <a:srgbClr val="CBD2CA"/>
                       </a:solidFill>
                       <a:prstDash val="solid"/>
                       <a:round/>
@@ -14474,7 +14429,7 @@
                     </a:lnL>
                     <a:lnR w="9525" cap="flat" cmpd="sng" algn="ctr">
                       <a:solidFill>
-                        <a:srgbClr val="22314F"/>
+                        <a:srgbClr val="CBD2CA"/>
                       </a:solidFill>
                       <a:prstDash val="solid"/>
                       <a:round/>
@@ -14483,7 +14438,7 @@
                     </a:lnR>
                     <a:lnT w="9525" cap="flat" cmpd="sng" algn="ctr">
                       <a:solidFill>
-                        <a:srgbClr val="22314F"/>
+                        <a:srgbClr val="CBD2CA"/>
                       </a:solidFill>
                       <a:prstDash val="solid"/>
                       <a:round/>
@@ -14492,7 +14447,7 @@
                     </a:lnT>
                     <a:lnB w="9525" cap="flat" cmpd="sng" algn="ctr">
                       <a:solidFill>
-                        <a:srgbClr val="22314F"/>
+                        <a:srgbClr val="CBD2CA"/>
                       </a:solidFill>
                       <a:prstDash val="solid"/>
                       <a:round/>
@@ -14500,7 +14455,7 @@
                       <a:tailEnd type="none" w="med" len="med"/>
                     </a:lnB>
                     <a:solidFill>
-                      <a:srgbClr val="111B2F"/>
+                      <a:srgbClr val="FAFBF8"/>
                     </a:solidFill>
                   </a:tcPr>
                 </a:tc>
@@ -14515,7 +14470,7 @@
                       <a:r>
                         <a:rPr lang="en-US" sz="1400" dirty="0">
                           <a:solidFill>
-                            <a:srgbClr val="E8EEFB"/>
+                            <a:srgbClr val="15211E"/>
                           </a:solidFill>
                           <a:latin typeface="Calibri" pitchFamily="34" charset="0"/>
                           <a:ea typeface="Calibri" pitchFamily="34" charset="-122"/>
@@ -14533,7 +14488,7 @@
                   <a:tcPr marL="109728" marR="109728" marT="0" marB="0" anchor="ctr">
                     <a:lnL w="9525" cap="flat" cmpd="sng" algn="ctr">
                       <a:solidFill>
-                        <a:srgbClr val="22314F"/>
+                        <a:srgbClr val="CBD2CA"/>
                       </a:solidFill>
                       <a:prstDash val="solid"/>
                       <a:round/>
@@ -14542,7 +14497,7 @@
                     </a:lnL>
                     <a:lnR w="9525" cap="flat" cmpd="sng" algn="ctr">
                       <a:solidFill>
-                        <a:srgbClr val="22314F"/>
+                        <a:srgbClr val="CBD2CA"/>
                       </a:solidFill>
                       <a:prstDash val="solid"/>
                       <a:round/>
@@ -14551,7 +14506,7 @@
                     </a:lnR>
                     <a:lnT w="9525" cap="flat" cmpd="sng" algn="ctr">
                       <a:solidFill>
-                        <a:srgbClr val="22314F"/>
+                        <a:srgbClr val="CBD2CA"/>
                       </a:solidFill>
                       <a:prstDash val="solid"/>
                       <a:round/>
@@ -14560,7 +14515,7 @@
                     </a:lnT>
                     <a:lnB w="9525" cap="flat" cmpd="sng" algn="ctr">
                       <a:solidFill>
-                        <a:srgbClr val="22314F"/>
+                        <a:srgbClr val="CBD2CA"/>
                       </a:solidFill>
                       <a:prstDash val="solid"/>
                       <a:round/>
@@ -14568,7 +14523,7 @@
                       <a:tailEnd type="none" w="med" len="med"/>
                     </a:lnB>
                     <a:solidFill>
-                      <a:srgbClr val="111B2F"/>
+                      <a:srgbClr val="FAFBF8"/>
                     </a:solidFill>
                   </a:tcPr>
                 </a:tc>
@@ -14585,7 +14540,7 @@
                       <a:r>
                         <a:rPr lang="en-US" sz="1400" b="1" dirty="0">
                           <a:solidFill>
-                            <a:srgbClr val="E8EEFB"/>
+                            <a:srgbClr val="15211E"/>
                           </a:solidFill>
                           <a:latin typeface="Calibri" pitchFamily="34" charset="0"/>
                           <a:ea typeface="Calibri" pitchFamily="34" charset="-122"/>
@@ -14603,7 +14558,7 @@
                   <a:tcPr marL="109728" marR="109728" marT="0" marB="0" anchor="ctr">
                     <a:lnL w="9525" cap="flat" cmpd="sng" algn="ctr">
                       <a:solidFill>
-                        <a:srgbClr val="22314F"/>
+                        <a:srgbClr val="CBD2CA"/>
                       </a:solidFill>
                       <a:prstDash val="solid"/>
                       <a:round/>
@@ -14612,7 +14567,7 @@
                     </a:lnL>
                     <a:lnR w="9525" cap="flat" cmpd="sng" algn="ctr">
                       <a:solidFill>
-                        <a:srgbClr val="22314F"/>
+                        <a:srgbClr val="CBD2CA"/>
                       </a:solidFill>
                       <a:prstDash val="solid"/>
                       <a:round/>
@@ -14621,7 +14576,7 @@
                     </a:lnR>
                     <a:lnT w="9525" cap="flat" cmpd="sng" algn="ctr">
                       <a:solidFill>
-                        <a:srgbClr val="22314F"/>
+                        <a:srgbClr val="CBD2CA"/>
                       </a:solidFill>
                       <a:prstDash val="solid"/>
                       <a:round/>
@@ -14630,7 +14585,7 @@
                     </a:lnT>
                     <a:lnB w="9525" cap="flat" cmpd="sng" algn="ctr">
                       <a:solidFill>
-                        <a:srgbClr val="22314F"/>
+                        <a:srgbClr val="CBD2CA"/>
                       </a:solidFill>
                       <a:prstDash val="solid"/>
                       <a:round/>
@@ -14638,7 +14593,7 @@
                       <a:tailEnd type="none" w="med" len="med"/>
                     </a:lnB>
                     <a:solidFill>
-                      <a:srgbClr val="111B2F"/>
+                      <a:srgbClr val="FAFBF8"/>
                     </a:solidFill>
                   </a:tcPr>
                 </a:tc>
@@ -14653,7 +14608,7 @@
                       <a:r>
                         <a:rPr lang="en-US" sz="1400" dirty="0">
                           <a:solidFill>
-                            <a:srgbClr val="B18CFF"/>
+                            <a:srgbClr val="6D5BA8"/>
                           </a:solidFill>
                           <a:latin typeface="Calibri" pitchFamily="34" charset="0"/>
                           <a:ea typeface="Calibri" pitchFamily="34" charset="-122"/>
@@ -14671,7 +14626,7 @@
                   <a:tcPr marL="109728" marR="109728" marT="0" marB="0" anchor="ctr">
                     <a:lnL w="9525" cap="flat" cmpd="sng" algn="ctr">
                       <a:solidFill>
-                        <a:srgbClr val="22314F"/>
+                        <a:srgbClr val="CBD2CA"/>
                       </a:solidFill>
                       <a:prstDash val="solid"/>
                       <a:round/>
@@ -14680,7 +14635,7 @@
                     </a:lnL>
                     <a:lnR w="9525" cap="flat" cmpd="sng" algn="ctr">
                       <a:solidFill>
-                        <a:srgbClr val="22314F"/>
+                        <a:srgbClr val="CBD2CA"/>
                       </a:solidFill>
                       <a:prstDash val="solid"/>
                       <a:round/>
@@ -14689,7 +14644,7 @@
                     </a:lnR>
                     <a:lnT w="9525" cap="flat" cmpd="sng" algn="ctr">
                       <a:solidFill>
-                        <a:srgbClr val="22314F"/>
+                        <a:srgbClr val="CBD2CA"/>
                       </a:solidFill>
                       <a:prstDash val="solid"/>
                       <a:round/>
@@ -14698,7 +14653,7 @@
                     </a:lnT>
                     <a:lnB w="9525" cap="flat" cmpd="sng" algn="ctr">
                       <a:solidFill>
-                        <a:srgbClr val="22314F"/>
+                        <a:srgbClr val="CBD2CA"/>
                       </a:solidFill>
                       <a:prstDash val="solid"/>
                       <a:round/>
@@ -14706,7 +14661,7 @@
                       <a:tailEnd type="none" w="med" len="med"/>
                     </a:lnB>
                     <a:solidFill>
-                      <a:srgbClr val="111B2F"/>
+                      <a:srgbClr val="FAFBF8"/>
                     </a:solidFill>
                   </a:tcPr>
                 </a:tc>
@@ -14721,7 +14676,7 @@
                       <a:r>
                         <a:rPr lang="en-US" sz="1400" dirty="0">
                           <a:solidFill>
-                            <a:srgbClr val="E8EEFB"/>
+                            <a:srgbClr val="15211E"/>
                           </a:solidFill>
                           <a:latin typeface="Calibri" pitchFamily="34" charset="0"/>
                           <a:ea typeface="Calibri" pitchFamily="34" charset="-122"/>
@@ -14739,7 +14694,7 @@
                   <a:tcPr marL="109728" marR="109728" marT="0" marB="0" anchor="ctr">
                     <a:lnL w="9525" cap="flat" cmpd="sng" algn="ctr">
                       <a:solidFill>
-                        <a:srgbClr val="22314F"/>
+                        <a:srgbClr val="CBD2CA"/>
                       </a:solidFill>
                       <a:prstDash val="solid"/>
                       <a:round/>
@@ -14748,7 +14703,7 @@
                     </a:lnL>
                     <a:lnR w="9525" cap="flat" cmpd="sng" algn="ctr">
                       <a:solidFill>
-                        <a:srgbClr val="22314F"/>
+                        <a:srgbClr val="CBD2CA"/>
                       </a:solidFill>
                       <a:prstDash val="solid"/>
                       <a:round/>
@@ -14757,7 +14712,7 @@
                     </a:lnR>
                     <a:lnT w="9525" cap="flat" cmpd="sng" algn="ctr">
                       <a:solidFill>
-                        <a:srgbClr val="22314F"/>
+                        <a:srgbClr val="CBD2CA"/>
                       </a:solidFill>
                       <a:prstDash val="solid"/>
                       <a:round/>
@@ -14766,7 +14721,7 @@
                     </a:lnT>
                     <a:lnB w="9525" cap="flat" cmpd="sng" algn="ctr">
                       <a:solidFill>
-                        <a:srgbClr val="22314F"/>
+                        <a:srgbClr val="CBD2CA"/>
                       </a:solidFill>
                       <a:prstDash val="solid"/>
                       <a:round/>
@@ -14774,7 +14729,7 @@
                       <a:tailEnd type="none" w="med" len="med"/>
                     </a:lnB>
                     <a:solidFill>
-                      <a:srgbClr val="111B2F"/>
+                      <a:srgbClr val="FAFBF8"/>
                     </a:solidFill>
                   </a:tcPr>
                 </a:tc>
@@ -14789,7 +14744,7 @@
                       <a:r>
                         <a:rPr lang="en-US" sz="1400" dirty="0">
                           <a:solidFill>
-                            <a:srgbClr val="E8EEFB"/>
+                            <a:srgbClr val="15211E"/>
                           </a:solidFill>
                           <a:latin typeface="Calibri" pitchFamily="34" charset="0"/>
                           <a:ea typeface="Calibri" pitchFamily="34" charset="-122"/>
@@ -14807,7 +14762,7 @@
                   <a:tcPr marL="109728" marR="109728" marT="0" marB="0" anchor="ctr">
                     <a:lnL w="9525" cap="flat" cmpd="sng" algn="ctr">
                       <a:solidFill>
-                        <a:srgbClr val="22314F"/>
+                        <a:srgbClr val="CBD2CA"/>
                       </a:solidFill>
                       <a:prstDash val="solid"/>
                       <a:round/>
@@ -14816,7 +14771,7 @@
                     </a:lnL>
                     <a:lnR w="9525" cap="flat" cmpd="sng" algn="ctr">
                       <a:solidFill>
-                        <a:srgbClr val="22314F"/>
+                        <a:srgbClr val="CBD2CA"/>
                       </a:solidFill>
                       <a:prstDash val="solid"/>
                       <a:round/>
@@ -14825,7 +14780,7 @@
                     </a:lnR>
                     <a:lnT w="9525" cap="flat" cmpd="sng" algn="ctr">
                       <a:solidFill>
-                        <a:srgbClr val="22314F"/>
+                        <a:srgbClr val="CBD2CA"/>
                       </a:solidFill>
                       <a:prstDash val="solid"/>
                       <a:round/>
@@ -14834,7 +14789,7 @@
                     </a:lnT>
                     <a:lnB w="9525" cap="flat" cmpd="sng" algn="ctr">
                       <a:solidFill>
-                        <a:srgbClr val="22314F"/>
+                        <a:srgbClr val="CBD2CA"/>
                       </a:solidFill>
                       <a:prstDash val="solid"/>
                       <a:round/>
@@ -14842,7 +14797,7 @@
                       <a:tailEnd type="none" w="med" len="med"/>
                     </a:lnB>
                     <a:solidFill>
-                      <a:srgbClr val="111B2F"/>
+                      <a:srgbClr val="FAFBF8"/>
                     </a:solidFill>
                   </a:tcPr>
                 </a:tc>
@@ -14859,7 +14814,7 @@
                       <a:r>
                         <a:rPr lang="en-US" sz="1400" b="1" dirty="0">
                           <a:solidFill>
-                            <a:srgbClr val="E8EEFB"/>
+                            <a:srgbClr val="15211E"/>
                           </a:solidFill>
                           <a:latin typeface="Calibri" pitchFamily="34" charset="0"/>
                           <a:ea typeface="Calibri" pitchFamily="34" charset="-122"/>
@@ -14877,7 +14832,7 @@
                   <a:tcPr marL="109728" marR="109728" marT="0" marB="0" anchor="ctr">
                     <a:lnL w="9525" cap="flat" cmpd="sng" algn="ctr">
                       <a:solidFill>
-                        <a:srgbClr val="22314F"/>
+                        <a:srgbClr val="CBD2CA"/>
                       </a:solidFill>
                       <a:prstDash val="solid"/>
                       <a:round/>
@@ -14886,7 +14841,7 @@
                     </a:lnL>
                     <a:lnR w="9525" cap="flat" cmpd="sng" algn="ctr">
                       <a:solidFill>
-                        <a:srgbClr val="22314F"/>
+                        <a:srgbClr val="CBD2CA"/>
                       </a:solidFill>
                       <a:prstDash val="solid"/>
                       <a:round/>
@@ -14895,7 +14850,7 @@
                     </a:lnR>
                     <a:lnT w="9525" cap="flat" cmpd="sng" algn="ctr">
                       <a:solidFill>
-                        <a:srgbClr val="22314F"/>
+                        <a:srgbClr val="CBD2CA"/>
                       </a:solidFill>
                       <a:prstDash val="solid"/>
                       <a:round/>
@@ -14904,7 +14859,7 @@
                     </a:lnT>
                     <a:lnB w="9525" cap="flat" cmpd="sng" algn="ctr">
                       <a:solidFill>
-                        <a:srgbClr val="22314F"/>
+                        <a:srgbClr val="CBD2CA"/>
                       </a:solidFill>
                       <a:prstDash val="solid"/>
                       <a:round/>
@@ -14912,7 +14867,7 @@
                       <a:tailEnd type="none" w="med" len="med"/>
                     </a:lnB>
                     <a:solidFill>
-                      <a:srgbClr val="111B2F"/>
+                      <a:srgbClr val="FAFBF8"/>
                     </a:solidFill>
                   </a:tcPr>
                 </a:tc>
@@ -14927,7 +14882,7 @@
                       <a:r>
                         <a:rPr lang="en-US" sz="1400" dirty="0">
                           <a:solidFill>
-                            <a:srgbClr val="B18CFF"/>
+                            <a:srgbClr val="6D5BA8"/>
                           </a:solidFill>
                           <a:latin typeface="Calibri" pitchFamily="34" charset="0"/>
                           <a:ea typeface="Calibri" pitchFamily="34" charset="-122"/>
@@ -14945,7 +14900,7 @@
                   <a:tcPr marL="109728" marR="109728" marT="0" marB="0" anchor="ctr">
                     <a:lnL w="9525" cap="flat" cmpd="sng" algn="ctr">
                       <a:solidFill>
-                        <a:srgbClr val="22314F"/>
+                        <a:srgbClr val="CBD2CA"/>
                       </a:solidFill>
                       <a:prstDash val="solid"/>
                       <a:round/>
@@ -14954,7 +14909,7 @@
                     </a:lnL>
                     <a:lnR w="9525" cap="flat" cmpd="sng" algn="ctr">
                       <a:solidFill>
-                        <a:srgbClr val="22314F"/>
+                        <a:srgbClr val="CBD2CA"/>
                       </a:solidFill>
                       <a:prstDash val="solid"/>
                       <a:round/>
@@ -14963,7 +14918,7 @@
                     </a:lnR>
                     <a:lnT w="9525" cap="flat" cmpd="sng" algn="ctr">
                       <a:solidFill>
-                        <a:srgbClr val="22314F"/>
+                        <a:srgbClr val="CBD2CA"/>
                       </a:solidFill>
                       <a:prstDash val="solid"/>
                       <a:round/>
@@ -14972,7 +14927,7 @@
                     </a:lnT>
                     <a:lnB w="9525" cap="flat" cmpd="sng" algn="ctr">
                       <a:solidFill>
-                        <a:srgbClr val="22314F"/>
+                        <a:srgbClr val="CBD2CA"/>
                       </a:solidFill>
                       <a:prstDash val="solid"/>
                       <a:round/>
@@ -14980,7 +14935,7 @@
                       <a:tailEnd type="none" w="med" len="med"/>
                     </a:lnB>
                     <a:solidFill>
-                      <a:srgbClr val="111B2F"/>
+                      <a:srgbClr val="FAFBF8"/>
                     </a:solidFill>
                   </a:tcPr>
                 </a:tc>
@@ -14995,7 +14950,7 @@
                       <a:r>
                         <a:rPr lang="en-US" sz="1400" dirty="0">
                           <a:solidFill>
-                            <a:srgbClr val="E8EEFB"/>
+                            <a:srgbClr val="15211E"/>
                           </a:solidFill>
                           <a:latin typeface="Calibri" pitchFamily="34" charset="0"/>
                           <a:ea typeface="Calibri" pitchFamily="34" charset="-122"/>
@@ -15013,7 +14968,7 @@
                   <a:tcPr marL="109728" marR="109728" marT="0" marB="0" anchor="ctr">
                     <a:lnL w="9525" cap="flat" cmpd="sng" algn="ctr">
                       <a:solidFill>
-                        <a:srgbClr val="22314F"/>
+                        <a:srgbClr val="CBD2CA"/>
                       </a:solidFill>
                       <a:prstDash val="solid"/>
                       <a:round/>
@@ -15022,7 +14977,7 @@
                     </a:lnL>
                     <a:lnR w="9525" cap="flat" cmpd="sng" algn="ctr">
                       <a:solidFill>
-                        <a:srgbClr val="22314F"/>
+                        <a:srgbClr val="CBD2CA"/>
                       </a:solidFill>
                       <a:prstDash val="solid"/>
                       <a:round/>
@@ -15031,7 +14986,7 @@
                     </a:lnR>
                     <a:lnT w="9525" cap="flat" cmpd="sng" algn="ctr">
                       <a:solidFill>
-                        <a:srgbClr val="22314F"/>
+                        <a:srgbClr val="CBD2CA"/>
                       </a:solidFill>
                       <a:prstDash val="solid"/>
                       <a:round/>
@@ -15040,7 +14995,7 @@
                     </a:lnT>
                     <a:lnB w="9525" cap="flat" cmpd="sng" algn="ctr">
                       <a:solidFill>
-                        <a:srgbClr val="22314F"/>
+                        <a:srgbClr val="CBD2CA"/>
                       </a:solidFill>
                       <a:prstDash val="solid"/>
                       <a:round/>
@@ -15048,7 +15003,7 @@
                       <a:tailEnd type="none" w="med" len="med"/>
                     </a:lnB>
                     <a:solidFill>
-                      <a:srgbClr val="111B2F"/>
+                      <a:srgbClr val="FAFBF8"/>
                     </a:solidFill>
                   </a:tcPr>
                 </a:tc>
@@ -15063,7 +15018,7 @@
                       <a:r>
                         <a:rPr lang="en-US" sz="1400" dirty="0">
                           <a:solidFill>
-                            <a:srgbClr val="E8EEFB"/>
+                            <a:srgbClr val="15211E"/>
                           </a:solidFill>
                           <a:latin typeface="Calibri" pitchFamily="34" charset="0"/>
                           <a:ea typeface="Calibri" pitchFamily="34" charset="-122"/>
@@ -15081,7 +15036,7 @@
                   <a:tcPr marL="109728" marR="109728" marT="0" marB="0" anchor="ctr">
                     <a:lnL w="9525" cap="flat" cmpd="sng" algn="ctr">
                       <a:solidFill>
-                        <a:srgbClr val="22314F"/>
+                        <a:srgbClr val="CBD2CA"/>
                       </a:solidFill>
                       <a:prstDash val="solid"/>
                       <a:round/>
@@ -15090,7 +15045,7 @@
                     </a:lnL>
                     <a:lnR w="9525" cap="flat" cmpd="sng" algn="ctr">
                       <a:solidFill>
-                        <a:srgbClr val="22314F"/>
+                        <a:srgbClr val="CBD2CA"/>
                       </a:solidFill>
                       <a:prstDash val="solid"/>
                       <a:round/>
@@ -15099,7 +15054,7 @@
                     </a:lnR>
                     <a:lnT w="9525" cap="flat" cmpd="sng" algn="ctr">
                       <a:solidFill>
-                        <a:srgbClr val="22314F"/>
+                        <a:srgbClr val="CBD2CA"/>
                       </a:solidFill>
                       <a:prstDash val="solid"/>
                       <a:round/>
@@ -15108,7 +15063,7 @@
                     </a:lnT>
                     <a:lnB w="9525" cap="flat" cmpd="sng" algn="ctr">
                       <a:solidFill>
-                        <a:srgbClr val="22314F"/>
+                        <a:srgbClr val="CBD2CA"/>
                       </a:solidFill>
                       <a:prstDash val="solid"/>
                       <a:round/>
@@ -15116,7 +15071,7 @@
                       <a:tailEnd type="none" w="med" len="med"/>
                     </a:lnB>
                     <a:solidFill>
-                      <a:srgbClr val="111B2F"/>
+                      <a:srgbClr val="FAFBF8"/>
                     </a:solidFill>
                   </a:tcPr>
                 </a:tc>
@@ -15155,7 +15110,7 @@
             <a:lvl1pPr>
               <a:defRPr sz="1000">
                 <a:solidFill>
-                  <a:srgbClr val="8DA0C2"/>
+                  <a:srgbClr val="4F5D58"/>
                 </a:solidFill>
                 <a:latin typeface="Calibri"/>
                 <a:ea typeface="Calibri"/>
@@ -15241,27 +15196,20 @@
             <a:off x="548640" y="1371600"/>
             <a:ext cx="3566160" cy="2286000"/>
           </a:xfrm>
-          <a:prstGeom prst="roundRect">
+          <a:prstGeom prst="rect">
             <a:avLst>
               <a:gd name="adj" fmla="val 4000"/>
             </a:avLst>
           </a:prstGeom>
           <a:solidFill>
-            <a:srgbClr val="111B2F"/>
+            <a:srgbClr val="FAFBF8"/>
           </a:solidFill>
           <a:ln w="9525">
             <a:solidFill>
-              <a:srgbClr val="22314F"/>
+              <a:srgbClr val="CBD2CA"/>
             </a:solidFill>
             <a:prstDash val="solid"/>
           </a:ln>
-          <a:effectLst>
-            <a:outerShdw sx="100000" sy="100000" kx="0" ky="0" algn="bl" rotWithShape="0" blurRad="152400" dist="38100" dir="5400000">
-              <a:srgbClr val="000000">
-                <a:alpha val="35000"/>
-              </a:srgbClr>
-            </a:outerShdw>
-          </a:effectLst>
         </p:spPr>
       </p:sp>
       <p:sp>
@@ -15291,7 +15239,7 @@
             <a:r>
               <a:rPr lang="en-US" sz="4400" b="1" dirty="0">
                 <a:solidFill>
-                  <a:srgbClr val="3CC8FF"/>
+                  <a:srgbClr val="0B5C7A"/>
                 </a:solidFill>
                 <a:latin typeface="Calibri" pitchFamily="34" charset="0"/>
                 <a:ea typeface="Calibri" pitchFamily="34" charset="-122"/>
@@ -15330,7 +15278,7 @@
             <a:r>
               <a:rPr lang="en-US" sz="1600" b="1" dirty="0">
                 <a:solidFill>
-                  <a:srgbClr val="E8EEFB"/>
+                  <a:srgbClr val="15211E"/>
                 </a:solidFill>
                 <a:latin typeface="Calibri" pitchFamily="34" charset="0"/>
                 <a:ea typeface="Calibri" pitchFamily="34" charset="-122"/>
@@ -15369,7 +15317,7 @@
             <a:r>
               <a:rPr lang="en-US" sz="1400" dirty="0">
                 <a:solidFill>
-                  <a:srgbClr val="8DA0C2"/>
+                  <a:srgbClr val="4F5D58"/>
                 </a:solidFill>
                 <a:latin typeface="Calibri" pitchFamily="34" charset="0"/>
                 <a:ea typeface="Calibri" pitchFamily="34" charset="-122"/>
@@ -15392,27 +15340,20 @@
             <a:off x="4297680" y="1371600"/>
             <a:ext cx="3566160" cy="2286000"/>
           </a:xfrm>
-          <a:prstGeom prst="roundRect">
+          <a:prstGeom prst="rect">
             <a:avLst>
               <a:gd name="adj" fmla="val 4000"/>
             </a:avLst>
           </a:prstGeom>
           <a:solidFill>
-            <a:srgbClr val="111B2F"/>
+            <a:srgbClr val="FAFBF8"/>
           </a:solidFill>
           <a:ln w="9525">
             <a:solidFill>
-              <a:srgbClr val="22314F"/>
+              <a:srgbClr val="CBD2CA"/>
             </a:solidFill>
             <a:prstDash val="solid"/>
           </a:ln>
-          <a:effectLst>
-            <a:outerShdw sx="100000" sy="100000" kx="0" ky="0" algn="bl" rotWithShape="0" blurRad="152400" dist="38100" dir="5400000">
-              <a:srgbClr val="000000">
-                <a:alpha val="35000"/>
-              </a:srgbClr>
-            </a:outerShdw>
-          </a:effectLst>
         </p:spPr>
       </p:sp>
       <p:sp>
@@ -15442,7 +15383,7 @@
             <a:r>
               <a:rPr lang="en-US" sz="4400" b="1" dirty="0">
                 <a:solidFill>
-                  <a:srgbClr val="3DDC97"/>
+                  <a:srgbClr val="5B8A8F"/>
                 </a:solidFill>
                 <a:latin typeface="Calibri" pitchFamily="34" charset="0"/>
                 <a:ea typeface="Calibri" pitchFamily="34" charset="-122"/>
@@ -15481,7 +15422,7 @@
             <a:r>
               <a:rPr lang="en-US" sz="1600" b="1" dirty="0">
                 <a:solidFill>
-                  <a:srgbClr val="E8EEFB"/>
+                  <a:srgbClr val="15211E"/>
                 </a:solidFill>
                 <a:latin typeface="Calibri" pitchFamily="34" charset="0"/>
                 <a:ea typeface="Calibri" pitchFamily="34" charset="-122"/>
@@ -15520,7 +15461,7 @@
             <a:r>
               <a:rPr lang="en-US" sz="1400" dirty="0">
                 <a:solidFill>
-                  <a:srgbClr val="8DA0C2"/>
+                  <a:srgbClr val="4F5D58"/>
                 </a:solidFill>
                 <a:latin typeface="Calibri" pitchFamily="34" charset="0"/>
                 <a:ea typeface="Calibri" pitchFamily="34" charset="-122"/>
@@ -15543,27 +15484,20 @@
             <a:off x="8046720" y="1371600"/>
             <a:ext cx="3566160" cy="2286000"/>
           </a:xfrm>
-          <a:prstGeom prst="roundRect">
+          <a:prstGeom prst="rect">
             <a:avLst>
               <a:gd name="adj" fmla="val 4000"/>
             </a:avLst>
           </a:prstGeom>
           <a:solidFill>
-            <a:srgbClr val="111B2F"/>
+            <a:srgbClr val="FAFBF8"/>
           </a:solidFill>
           <a:ln w="9525">
             <a:solidFill>
-              <a:srgbClr val="22314F"/>
+              <a:srgbClr val="CBD2CA"/>
             </a:solidFill>
             <a:prstDash val="solid"/>
           </a:ln>
-          <a:effectLst>
-            <a:outerShdw sx="100000" sy="100000" kx="0" ky="0" algn="bl" rotWithShape="0" blurRad="152400" dist="38100" dir="5400000">
-              <a:srgbClr val="000000">
-                <a:alpha val="35000"/>
-              </a:srgbClr>
-            </a:outerShdw>
-          </a:effectLst>
         </p:spPr>
       </p:sp>
       <p:sp>
@@ -15593,7 +15527,7 @@
             <a:r>
               <a:rPr lang="en-US" sz="4400" b="1" dirty="0">
                 <a:solidFill>
-                  <a:srgbClr val="B18CFF"/>
+                  <a:srgbClr val="6D5BA8"/>
                 </a:solidFill>
                 <a:latin typeface="Calibri" pitchFamily="34" charset="0"/>
                 <a:ea typeface="Calibri" pitchFamily="34" charset="-122"/>
@@ -15632,7 +15566,7 @@
             <a:r>
               <a:rPr lang="en-US" sz="1600" b="1" dirty="0">
                 <a:solidFill>
-                  <a:srgbClr val="E8EEFB"/>
+                  <a:srgbClr val="15211E"/>
                 </a:solidFill>
                 <a:latin typeface="Calibri" pitchFamily="34" charset="0"/>
                 <a:ea typeface="Calibri" pitchFamily="34" charset="-122"/>
@@ -15671,7 +15605,7 @@
             <a:r>
               <a:rPr lang="en-US" sz="1400" dirty="0">
                 <a:solidFill>
-                  <a:srgbClr val="8DA0C2"/>
+                  <a:srgbClr val="4F5D58"/>
                 </a:solidFill>
                 <a:latin typeface="Calibri" pitchFamily="34" charset="0"/>
                 <a:ea typeface="Calibri" pitchFamily="34" charset="-122"/>
@@ -15694,27 +15628,20 @@
             <a:off x="548640" y="3840480"/>
             <a:ext cx="3566160" cy="2286000"/>
           </a:xfrm>
-          <a:prstGeom prst="roundRect">
+          <a:prstGeom prst="rect">
             <a:avLst>
               <a:gd name="adj" fmla="val 4000"/>
             </a:avLst>
           </a:prstGeom>
           <a:solidFill>
-            <a:srgbClr val="111B2F"/>
+            <a:srgbClr val="FAFBF8"/>
           </a:solidFill>
           <a:ln w="9525">
             <a:solidFill>
-              <a:srgbClr val="22314F"/>
+              <a:srgbClr val="CBD2CA"/>
             </a:solidFill>
             <a:prstDash val="solid"/>
           </a:ln>
-          <a:effectLst>
-            <a:outerShdw sx="100000" sy="100000" kx="0" ky="0" algn="bl" rotWithShape="0" blurRad="152400" dist="38100" dir="5400000">
-              <a:srgbClr val="000000">
-                <a:alpha val="35000"/>
-              </a:srgbClr>
-            </a:outerShdw>
-          </a:effectLst>
         </p:spPr>
       </p:sp>
       <p:sp>
@@ -15744,7 +15671,7 @@
             <a:r>
               <a:rPr lang="en-US" sz="4400" b="1" dirty="0">
                 <a:solidFill>
-                  <a:srgbClr val="FF8A3D"/>
+                  <a:srgbClr val="D1561F"/>
                 </a:solidFill>
                 <a:latin typeface="Calibri" pitchFamily="34" charset="0"/>
                 <a:ea typeface="Calibri" pitchFamily="34" charset="-122"/>
@@ -15783,7 +15710,7 @@
             <a:r>
               <a:rPr lang="en-US" sz="1600" b="1" dirty="0">
                 <a:solidFill>
-                  <a:srgbClr val="E8EEFB"/>
+                  <a:srgbClr val="15211E"/>
                 </a:solidFill>
                 <a:latin typeface="Calibri" pitchFamily="34" charset="0"/>
                 <a:ea typeface="Calibri" pitchFamily="34" charset="-122"/>
@@ -15822,7 +15749,7 @@
             <a:r>
               <a:rPr lang="en-US" sz="1400" dirty="0">
                 <a:solidFill>
-                  <a:srgbClr val="8DA0C2"/>
+                  <a:srgbClr val="4F5D58"/>
                 </a:solidFill>
                 <a:latin typeface="Calibri" pitchFamily="34" charset="0"/>
                 <a:ea typeface="Calibri" pitchFamily="34" charset="-122"/>
@@ -15845,27 +15772,20 @@
             <a:off x="4297680" y="3840480"/>
             <a:ext cx="3566160" cy="2286000"/>
           </a:xfrm>
-          <a:prstGeom prst="roundRect">
+          <a:prstGeom prst="rect">
             <a:avLst>
               <a:gd name="adj" fmla="val 4000"/>
             </a:avLst>
           </a:prstGeom>
           <a:solidFill>
-            <a:srgbClr val="111B2F"/>
+            <a:srgbClr val="FAFBF8"/>
           </a:solidFill>
           <a:ln w="9525">
             <a:solidFill>
-              <a:srgbClr val="22314F"/>
+              <a:srgbClr val="CBD2CA"/>
             </a:solidFill>
             <a:prstDash val="solid"/>
           </a:ln>
-          <a:effectLst>
-            <a:outerShdw sx="100000" sy="100000" kx="0" ky="0" algn="bl" rotWithShape="0" blurRad="152400" dist="38100" dir="5400000">
-              <a:srgbClr val="000000">
-                <a:alpha val="35000"/>
-              </a:srgbClr>
-            </a:outerShdw>
-          </a:effectLst>
         </p:spPr>
       </p:sp>
       <p:sp>
@@ -15895,7 +15815,7 @@
             <a:r>
               <a:rPr lang="en-US" sz="4400" b="1" dirty="0">
                 <a:solidFill>
-                  <a:srgbClr val="FFD23F"/>
+                  <a:srgbClr val="C79A1B"/>
                 </a:solidFill>
                 <a:latin typeface="Calibri" pitchFamily="34" charset="0"/>
                 <a:ea typeface="Calibri" pitchFamily="34" charset="-122"/>
@@ -15934,7 +15854,7 @@
             <a:r>
               <a:rPr lang="en-US" sz="1600" b="1" dirty="0">
                 <a:solidFill>
-                  <a:srgbClr val="E8EEFB"/>
+                  <a:srgbClr val="15211E"/>
                 </a:solidFill>
                 <a:latin typeface="Calibri" pitchFamily="34" charset="0"/>
                 <a:ea typeface="Calibri" pitchFamily="34" charset="-122"/>
@@ -15973,7 +15893,7 @@
             <a:r>
               <a:rPr lang="en-US" sz="1400" dirty="0">
                 <a:solidFill>
-                  <a:srgbClr val="8DA0C2"/>
+                  <a:srgbClr val="4F5D58"/>
                 </a:solidFill>
                 <a:latin typeface="Calibri" pitchFamily="34" charset="0"/>
                 <a:ea typeface="Calibri" pitchFamily="34" charset="-122"/>
@@ -15996,27 +15916,20 @@
             <a:off x="8046720" y="3840480"/>
             <a:ext cx="3566160" cy="2286000"/>
           </a:xfrm>
-          <a:prstGeom prst="roundRect">
+          <a:prstGeom prst="rect">
             <a:avLst>
               <a:gd name="adj" fmla="val 4000"/>
             </a:avLst>
           </a:prstGeom>
           <a:solidFill>
-            <a:srgbClr val="111B2F"/>
+            <a:srgbClr val="FAFBF8"/>
           </a:solidFill>
           <a:ln w="9525">
             <a:solidFill>
-              <a:srgbClr val="22314F"/>
+              <a:srgbClr val="CBD2CA"/>
             </a:solidFill>
             <a:prstDash val="solid"/>
           </a:ln>
-          <a:effectLst>
-            <a:outerShdw sx="100000" sy="100000" kx="0" ky="0" algn="bl" rotWithShape="0" blurRad="152400" dist="38100" dir="5400000">
-              <a:srgbClr val="000000">
-                <a:alpha val="35000"/>
-              </a:srgbClr>
-            </a:outerShdw>
-          </a:effectLst>
         </p:spPr>
       </p:sp>
       <p:sp>
@@ -16046,7 +15959,7 @@
             <a:r>
               <a:rPr lang="en-US" sz="4400" b="1" dirty="0">
                 <a:solidFill>
-                  <a:srgbClr val="FF3B5C"/>
+                  <a:srgbClr val="A3102E"/>
                 </a:solidFill>
                 <a:latin typeface="Calibri" pitchFamily="34" charset="0"/>
                 <a:ea typeface="Calibri" pitchFamily="34" charset="-122"/>
@@ -16085,7 +15998,7 @@
             <a:r>
               <a:rPr lang="en-US" sz="1600" b="1" dirty="0">
                 <a:solidFill>
-                  <a:srgbClr val="E8EEFB"/>
+                  <a:srgbClr val="15211E"/>
                 </a:solidFill>
                 <a:latin typeface="Calibri" pitchFamily="34" charset="0"/>
                 <a:ea typeface="Calibri" pitchFamily="34" charset="-122"/>
@@ -16124,7 +16037,7 @@
             <a:r>
               <a:rPr lang="en-US" sz="1400" dirty="0">
                 <a:solidFill>
-                  <a:srgbClr val="8DA0C2"/>
+                  <a:srgbClr val="4F5D58"/>
                 </a:solidFill>
                 <a:latin typeface="Calibri" pitchFamily="34" charset="0"/>
                 <a:ea typeface="Calibri" pitchFamily="34" charset="-122"/>
@@ -16163,7 +16076,7 @@
             <a:r>
               <a:rPr lang="en-US" sz="1200" i="1" dirty="0">
                 <a:solidFill>
-                  <a:srgbClr val="8DA0C2"/>
+                  <a:srgbClr val="4F5D58"/>
                 </a:solidFill>
                 <a:latin typeface="Calibri" pitchFamily="34" charset="0"/>
                 <a:ea typeface="Calibri" pitchFamily="34" charset="-122"/>
@@ -16205,7 +16118,7 @@
             <a:lvl1pPr>
               <a:defRPr sz="1000">
                 <a:solidFill>
-                  <a:srgbClr val="8DA0C2"/>
+                  <a:srgbClr val="4F5D58"/>
                 </a:solidFill>
                 <a:latin typeface="Calibri"/>
                 <a:ea typeface="Calibri"/>
@@ -16291,27 +16204,20 @@
             <a:off x="548640" y="1371600"/>
             <a:ext cx="3566160" cy="2286000"/>
           </a:xfrm>
-          <a:prstGeom prst="roundRect">
+          <a:prstGeom prst="rect">
             <a:avLst>
               <a:gd name="adj" fmla="val 4000"/>
             </a:avLst>
           </a:prstGeom>
           <a:solidFill>
-            <a:srgbClr val="111B2F"/>
+            <a:srgbClr val="FAFBF8"/>
           </a:solidFill>
           <a:ln w="9525">
             <a:solidFill>
-              <a:srgbClr val="22314F"/>
+              <a:srgbClr val="CBD2CA"/>
             </a:solidFill>
             <a:prstDash val="solid"/>
           </a:ln>
-          <a:effectLst>
-            <a:outerShdw sx="100000" sy="100000" kx="0" ky="0" algn="bl" rotWithShape="0" blurRad="152400" dist="38100" dir="5400000">
-              <a:srgbClr val="000000">
-                <a:alpha val="35000"/>
-              </a:srgbClr>
-            </a:outerShdw>
-          </a:effectLst>
         </p:spPr>
       </p:sp>
       <p:sp>
@@ -16325,15 +16231,15 @@
             <a:off x="777240" y="1600200"/>
             <a:ext cx="201168" cy="201168"/>
           </a:xfrm>
-          <a:prstGeom prst="ellipse">
+          <a:prstGeom prst="rect">
             <a:avLst/>
           </a:prstGeom>
           <a:solidFill>
-            <a:srgbClr val="3CC8FF"/>
+            <a:srgbClr val="0B5C7A"/>
           </a:solidFill>
           <a:ln w="12700">
             <a:solidFill>
-              <a:srgbClr val="3CC8FF"/>
+              <a:srgbClr val="0B5C7A"/>
             </a:solidFill>
             <a:prstDash val="solid"/>
           </a:ln>
@@ -16366,7 +16272,7 @@
             <a:r>
               <a:rPr lang="en-US" sz="1800" b="1" dirty="0">
                 <a:solidFill>
-                  <a:srgbClr val="E8EEFB"/>
+                  <a:srgbClr val="15211E"/>
                 </a:solidFill>
                 <a:latin typeface="Calibri" pitchFamily="34" charset="0"/>
                 <a:ea typeface="Calibri" pitchFamily="34" charset="-122"/>
@@ -16408,7 +16314,7 @@
             <a:r>
               <a:rPr lang="en-US" sz="1500" dirty="0">
                 <a:solidFill>
-                  <a:srgbClr val="8DA0C2"/>
+                  <a:srgbClr val="4F5D58"/>
                 </a:solidFill>
                 <a:latin typeface="Calibri" pitchFamily="34" charset="0"/>
                 <a:ea typeface="Calibri" pitchFamily="34" charset="-122"/>
@@ -16431,27 +16337,20 @@
             <a:off x="4297680" y="1371600"/>
             <a:ext cx="3566160" cy="2286000"/>
           </a:xfrm>
-          <a:prstGeom prst="roundRect">
+          <a:prstGeom prst="rect">
             <a:avLst>
               <a:gd name="adj" fmla="val 4000"/>
             </a:avLst>
           </a:prstGeom>
           <a:solidFill>
-            <a:srgbClr val="111B2F"/>
+            <a:srgbClr val="FAFBF8"/>
           </a:solidFill>
           <a:ln w="9525">
             <a:solidFill>
-              <a:srgbClr val="22314F"/>
+              <a:srgbClr val="CBD2CA"/>
             </a:solidFill>
             <a:prstDash val="solid"/>
           </a:ln>
-          <a:effectLst>
-            <a:outerShdw sx="100000" sy="100000" kx="0" ky="0" algn="bl" rotWithShape="0" blurRad="152400" dist="38100" dir="5400000">
-              <a:srgbClr val="000000">
-                <a:alpha val="35000"/>
-              </a:srgbClr>
-            </a:outerShdw>
-          </a:effectLst>
         </p:spPr>
       </p:sp>
       <p:sp>
@@ -16465,15 +16364,15 @@
             <a:off x="4526280" y="1600200"/>
             <a:ext cx="201168" cy="201168"/>
           </a:xfrm>
-          <a:prstGeom prst="ellipse">
+          <a:prstGeom prst="rect">
             <a:avLst/>
           </a:prstGeom>
           <a:solidFill>
-            <a:srgbClr val="B18CFF"/>
+            <a:srgbClr val="6D5BA8"/>
           </a:solidFill>
           <a:ln w="12700">
             <a:solidFill>
-              <a:srgbClr val="B18CFF"/>
+              <a:srgbClr val="6D5BA8"/>
             </a:solidFill>
             <a:prstDash val="solid"/>
           </a:ln>
@@ -16506,7 +16405,7 @@
             <a:r>
               <a:rPr lang="en-US" sz="1800" b="1" dirty="0">
                 <a:solidFill>
-                  <a:srgbClr val="E8EEFB"/>
+                  <a:srgbClr val="15211E"/>
                 </a:solidFill>
                 <a:latin typeface="Calibri" pitchFamily="34" charset="0"/>
                 <a:ea typeface="Calibri" pitchFamily="34" charset="-122"/>
@@ -16548,7 +16447,7 @@
             <a:r>
               <a:rPr lang="en-US" sz="1500" dirty="0">
                 <a:solidFill>
-                  <a:srgbClr val="8DA0C2"/>
+                  <a:srgbClr val="4F5D58"/>
                 </a:solidFill>
                 <a:latin typeface="Calibri" pitchFamily="34" charset="0"/>
                 <a:ea typeface="Calibri" pitchFamily="34" charset="-122"/>
@@ -16571,27 +16470,20 @@
             <a:off x="8046720" y="1371600"/>
             <a:ext cx="3566160" cy="2286000"/>
           </a:xfrm>
-          <a:prstGeom prst="roundRect">
+          <a:prstGeom prst="rect">
             <a:avLst>
               <a:gd name="adj" fmla="val 4000"/>
             </a:avLst>
           </a:prstGeom>
           <a:solidFill>
-            <a:srgbClr val="111B2F"/>
+            <a:srgbClr val="FAFBF8"/>
           </a:solidFill>
           <a:ln w="9525">
             <a:solidFill>
-              <a:srgbClr val="22314F"/>
+              <a:srgbClr val="CBD2CA"/>
             </a:solidFill>
             <a:prstDash val="solid"/>
           </a:ln>
-          <a:effectLst>
-            <a:outerShdw sx="100000" sy="100000" kx="0" ky="0" algn="bl" rotWithShape="0" blurRad="152400" dist="38100" dir="5400000">
-              <a:srgbClr val="000000">
-                <a:alpha val="35000"/>
-              </a:srgbClr>
-            </a:outerShdw>
-          </a:effectLst>
         </p:spPr>
       </p:sp>
       <p:sp>
@@ -16605,15 +16497,15 @@
             <a:off x="8275320" y="1600200"/>
             <a:ext cx="201168" cy="201168"/>
           </a:xfrm>
-          <a:prstGeom prst="ellipse">
+          <a:prstGeom prst="rect">
             <a:avLst/>
           </a:prstGeom>
           <a:solidFill>
-            <a:srgbClr val="FF8A3D"/>
+            <a:srgbClr val="D1561F"/>
           </a:solidFill>
           <a:ln w="12700">
             <a:solidFill>
-              <a:srgbClr val="FF8A3D"/>
+              <a:srgbClr val="D1561F"/>
             </a:solidFill>
             <a:prstDash val="solid"/>
           </a:ln>
@@ -16646,7 +16538,7 @@
             <a:r>
               <a:rPr lang="en-US" sz="1800" b="1" dirty="0">
                 <a:solidFill>
-                  <a:srgbClr val="E8EEFB"/>
+                  <a:srgbClr val="15211E"/>
                 </a:solidFill>
                 <a:latin typeface="Calibri" pitchFamily="34" charset="0"/>
                 <a:ea typeface="Calibri" pitchFamily="34" charset="-122"/>
@@ -16688,7 +16580,7 @@
             <a:r>
               <a:rPr lang="en-US" sz="1500" dirty="0">
                 <a:solidFill>
-                  <a:srgbClr val="8DA0C2"/>
+                  <a:srgbClr val="4F5D58"/>
                 </a:solidFill>
                 <a:latin typeface="Calibri" pitchFamily="34" charset="0"/>
                 <a:ea typeface="Calibri" pitchFamily="34" charset="-122"/>
@@ -16711,27 +16603,20 @@
             <a:off x="548640" y="3840480"/>
             <a:ext cx="3566160" cy="2286000"/>
           </a:xfrm>
-          <a:prstGeom prst="roundRect">
+          <a:prstGeom prst="rect">
             <a:avLst>
               <a:gd name="adj" fmla="val 4000"/>
             </a:avLst>
           </a:prstGeom>
           <a:solidFill>
-            <a:srgbClr val="111B2F"/>
+            <a:srgbClr val="FAFBF8"/>
           </a:solidFill>
           <a:ln w="9525">
             <a:solidFill>
-              <a:srgbClr val="22314F"/>
+              <a:srgbClr val="CBD2CA"/>
             </a:solidFill>
             <a:prstDash val="solid"/>
           </a:ln>
-          <a:effectLst>
-            <a:outerShdw sx="100000" sy="100000" kx="0" ky="0" algn="bl" rotWithShape="0" blurRad="152400" dist="38100" dir="5400000">
-              <a:srgbClr val="000000">
-                <a:alpha val="35000"/>
-              </a:srgbClr>
-            </a:outerShdw>
-          </a:effectLst>
         </p:spPr>
       </p:sp>
       <p:sp>
@@ -16745,15 +16630,15 @@
             <a:off x="777240" y="4069080"/>
             <a:ext cx="201168" cy="201168"/>
           </a:xfrm>
-          <a:prstGeom prst="ellipse">
+          <a:prstGeom prst="rect">
             <a:avLst/>
           </a:prstGeom>
           <a:solidFill>
-            <a:srgbClr val="3DDC97"/>
+            <a:srgbClr val="5B8A8F"/>
           </a:solidFill>
           <a:ln w="12700">
             <a:solidFill>
-              <a:srgbClr val="3DDC97"/>
+              <a:srgbClr val="5B8A8F"/>
             </a:solidFill>
             <a:prstDash val="solid"/>
           </a:ln>
@@ -16786,7 +16671,7 @@
             <a:r>
               <a:rPr lang="en-US" sz="1800" b="1" dirty="0">
                 <a:solidFill>
-                  <a:srgbClr val="E8EEFB"/>
+                  <a:srgbClr val="15211E"/>
                 </a:solidFill>
                 <a:latin typeface="Calibri" pitchFamily="34" charset="0"/>
                 <a:ea typeface="Calibri" pitchFamily="34" charset="-122"/>
@@ -16828,7 +16713,7 @@
             <a:r>
               <a:rPr lang="en-US" sz="1500" dirty="0">
                 <a:solidFill>
-                  <a:srgbClr val="8DA0C2"/>
+                  <a:srgbClr val="4F5D58"/>
                 </a:solidFill>
                 <a:latin typeface="Calibri" pitchFamily="34" charset="0"/>
                 <a:ea typeface="Calibri" pitchFamily="34" charset="-122"/>
@@ -16851,27 +16736,20 @@
             <a:off x="4297680" y="3840480"/>
             <a:ext cx="3566160" cy="2286000"/>
           </a:xfrm>
-          <a:prstGeom prst="roundRect">
+          <a:prstGeom prst="rect">
             <a:avLst>
               <a:gd name="adj" fmla="val 4000"/>
             </a:avLst>
           </a:prstGeom>
           <a:solidFill>
-            <a:srgbClr val="111B2F"/>
+            <a:srgbClr val="FAFBF8"/>
           </a:solidFill>
           <a:ln w="9525">
             <a:solidFill>
-              <a:srgbClr val="22314F"/>
+              <a:srgbClr val="CBD2CA"/>
             </a:solidFill>
             <a:prstDash val="solid"/>
           </a:ln>
-          <a:effectLst>
-            <a:outerShdw sx="100000" sy="100000" kx="0" ky="0" algn="bl" rotWithShape="0" blurRad="152400" dist="38100" dir="5400000">
-              <a:srgbClr val="000000">
-                <a:alpha val="35000"/>
-              </a:srgbClr>
-            </a:outerShdw>
-          </a:effectLst>
         </p:spPr>
       </p:sp>
       <p:sp>
@@ -16885,15 +16763,15 @@
             <a:off x="4526280" y="4069080"/>
             <a:ext cx="201168" cy="201168"/>
           </a:xfrm>
-          <a:prstGeom prst="ellipse">
+          <a:prstGeom prst="rect">
             <a:avLst/>
           </a:prstGeom>
           <a:solidFill>
-            <a:srgbClr val="FFD23F"/>
+            <a:srgbClr val="C79A1B"/>
           </a:solidFill>
           <a:ln w="12700">
             <a:solidFill>
-              <a:srgbClr val="FFD23F"/>
+              <a:srgbClr val="C79A1B"/>
             </a:solidFill>
             <a:prstDash val="solid"/>
           </a:ln>
@@ -16926,7 +16804,7 @@
             <a:r>
               <a:rPr lang="en-US" sz="1800" b="1" dirty="0">
                 <a:solidFill>
-                  <a:srgbClr val="E8EEFB"/>
+                  <a:srgbClr val="15211E"/>
                 </a:solidFill>
                 <a:latin typeface="Calibri" pitchFamily="34" charset="0"/>
                 <a:ea typeface="Calibri" pitchFamily="34" charset="-122"/>
@@ -16968,7 +16846,7 @@
             <a:r>
               <a:rPr lang="en-US" sz="1500" dirty="0">
                 <a:solidFill>
-                  <a:srgbClr val="8DA0C2"/>
+                  <a:srgbClr val="4F5D58"/>
                 </a:solidFill>
                 <a:latin typeface="Calibri" pitchFamily="34" charset="0"/>
                 <a:ea typeface="Calibri" pitchFamily="34" charset="-122"/>
@@ -16991,27 +16869,20 @@
             <a:off x="8046720" y="3840480"/>
             <a:ext cx="3566160" cy="2286000"/>
           </a:xfrm>
-          <a:prstGeom prst="roundRect">
+          <a:prstGeom prst="rect">
             <a:avLst>
               <a:gd name="adj" fmla="val 4000"/>
             </a:avLst>
           </a:prstGeom>
           <a:solidFill>
-            <a:srgbClr val="111B2F"/>
+            <a:srgbClr val="FAFBF8"/>
           </a:solidFill>
           <a:ln w="9525">
             <a:solidFill>
-              <a:srgbClr val="22314F"/>
+              <a:srgbClr val="CBD2CA"/>
             </a:solidFill>
             <a:prstDash val="solid"/>
           </a:ln>
-          <a:effectLst>
-            <a:outerShdw sx="100000" sy="100000" kx="0" ky="0" algn="bl" rotWithShape="0" blurRad="152400" dist="38100" dir="5400000">
-              <a:srgbClr val="000000">
-                <a:alpha val="35000"/>
-              </a:srgbClr>
-            </a:outerShdw>
-          </a:effectLst>
         </p:spPr>
       </p:sp>
       <p:sp>
@@ -17025,15 +16896,15 @@
             <a:off x="8275320" y="4069080"/>
             <a:ext cx="201168" cy="201168"/>
           </a:xfrm>
-          <a:prstGeom prst="ellipse">
+          <a:prstGeom prst="rect">
             <a:avLst/>
           </a:prstGeom>
           <a:solidFill>
-            <a:srgbClr val="FF3B5C"/>
+            <a:srgbClr val="A3102E"/>
           </a:solidFill>
           <a:ln w="12700">
             <a:solidFill>
-              <a:srgbClr val="FF3B5C"/>
+              <a:srgbClr val="A3102E"/>
             </a:solidFill>
             <a:prstDash val="solid"/>
           </a:ln>
@@ -17066,7 +16937,7 @@
             <a:r>
               <a:rPr lang="en-US" sz="1800" b="1" dirty="0">
                 <a:solidFill>
-                  <a:srgbClr val="E8EEFB"/>
+                  <a:srgbClr val="15211E"/>
                 </a:solidFill>
                 <a:latin typeface="Calibri" pitchFamily="34" charset="0"/>
                 <a:ea typeface="Calibri" pitchFamily="34" charset="-122"/>
@@ -17108,7 +16979,7 @@
             <a:r>
               <a:rPr lang="en-US" sz="1500" dirty="0">
                 <a:solidFill>
-                  <a:srgbClr val="8DA0C2"/>
+                  <a:srgbClr val="4F5D58"/>
                 </a:solidFill>
                 <a:latin typeface="Calibri" pitchFamily="34" charset="0"/>
                 <a:ea typeface="Calibri" pitchFamily="34" charset="-122"/>
@@ -17150,7 +17021,7 @@
             <a:lvl1pPr>
               <a:defRPr sz="1000">
                 <a:solidFill>
-                  <a:srgbClr val="8DA0C2"/>
+                  <a:srgbClr val="4F5D58"/>
                 </a:solidFill>
                 <a:latin typeface="Calibri"/>
                 <a:ea typeface="Calibri"/>
